--- a/output/wordlabs-migrate-3day.pptx
+++ b/output/wordlabs-migrate-3day.pptx
@@ -5622,7 +5622,7 @@
                 <a:ea typeface="Trebuchet MS" pitchFamily="34" charset="-122"/>
                 <a:cs typeface="Trebuchet MS" pitchFamily="34" charset="-120"/>
               </a:rPr>
-              <a:t>0</a:t>
+              <a:t>1</a:t>
             </a:r>
             <a:pPr algn="ctr" indent="0" marL="0">
               <a:buNone/>
@@ -6040,7 +6040,7 @@
                 <a:ea typeface="Calibri" pitchFamily="34" charset="-122"/>
                 <a:cs typeface="Calibri" pitchFamily="34" charset="-120"/>
               </a:rPr>
-              <a:t>Many </a:t>
+              <a:t>Many families choose to </a:t>
             </a:r>
             <a:pPr algn="l" indent="0" marL="0">
               <a:buNone/>
@@ -6057,7 +6057,7 @@
                 <a:ea typeface="Calibri" pitchFamily="34" charset="-122"/>
                 <a:cs typeface="Calibri" pitchFamily="34" charset="-120"/>
               </a:rPr>
-              <a:t>migratory</a:t>
+              <a:t>immigrate</a:t>
             </a:r>
             <a:pPr algn="l" indent="0" marL="0">
               <a:buNone/>
@@ -6071,7 +6071,7 @@
                 <a:ea typeface="Calibri" pitchFamily="34" charset="-122"/>
                 <a:cs typeface="Calibri" pitchFamily="34" charset="-120"/>
               </a:rPr>
-              <a:t> birds follow the same </a:t>
+              <a:t> to Australia, and their </a:t>
             </a:r>
             <a:pPr algn="l" indent="0" marL="0">
               <a:buNone/>
@@ -6102,7 +6102,7 @@
                 <a:ea typeface="Calibri" pitchFamily="34" charset="-122"/>
                 <a:cs typeface="Calibri" pitchFamily="34" charset="-120"/>
               </a:rPr>
-              <a:t> route each year.</a:t>
+              <a:t> journey can take many months.</a:t>
             </a:r>
             <a:endParaRPr lang="en-US" sz="1800" dirty="0"/>
           </a:p>
@@ -6257,7 +6257,7 @@
                 <a:ea typeface="Trebuchet MS" pitchFamily="34" charset="-122"/>
                 <a:cs typeface="Trebuchet MS" pitchFamily="34" charset="-120"/>
               </a:rPr>
-              <a:t>migratory</a:t>
+              <a:t>immigrate</a:t>
             </a:r>
             <a:endParaRPr lang="en-US" sz="1400" dirty="0"/>
           </a:p>
@@ -6855,7 +6855,7 @@
                 <a:ea typeface="Trebuchet MS" pitchFamily="34" charset="-122"/>
                 <a:cs typeface="Trebuchet MS" pitchFamily="34" charset="-120"/>
               </a:rPr>
-              <a:t>migratory</a:t>
+              <a:t>immigrate</a:t>
             </a:r>
             <a:endParaRPr lang="en-US" sz="2800" dirty="0"/>
           </a:p>
@@ -7682,7 +7682,7 @@
                 <a:ea typeface="Trebuchet MS" pitchFamily="34" charset="-122"/>
                 <a:cs typeface="Trebuchet MS" pitchFamily="34" charset="-120"/>
               </a:rPr>
-              <a:t>migratory</a:t>
+              <a:t>immigrate</a:t>
             </a:r>
             <a:endParaRPr lang="en-US" sz="2800" dirty="0"/>
           </a:p>
@@ -7771,11 +7771,11 @@
             </a:avLst>
           </a:prstGeom>
           <a:solidFill>
-            <a:srgbClr val="CCFBF1"/>
+            <a:srgbClr val="DDD6FE"/>
           </a:solidFill>
           <a:ln w="19050">
             <a:solidFill>
-              <a:srgbClr val="0D9488"/>
+              <a:srgbClr val="7C3AED"/>
             </a:solidFill>
             <a:prstDash val="solid"/>
           </a:ln>
@@ -7815,13 +7815,13 @@
             <a:r>
               <a:rPr lang="en-US" sz="1300" b="1" dirty="0">
                 <a:solidFill>
-                  <a:srgbClr val="0F766E"/>
+                  <a:srgbClr val="4C1D95"/>
                 </a:solidFill>
                 <a:latin typeface="Trebuchet MS" pitchFamily="34" charset="0"/>
                 <a:ea typeface="Trebuchet MS" pitchFamily="34" charset="-122"/>
                 <a:cs typeface="Trebuchet MS" pitchFamily="34" charset="-120"/>
               </a:rPr>
-              <a:t>migrate</a:t>
+              <a:t>im</a:t>
             </a:r>
             <a:endParaRPr lang="en-US" sz="1300" dirty="0"/>
           </a:p>
@@ -7860,7 +7860,7 @@
                 <a:ea typeface="Calibri" pitchFamily="34" charset="-122"/>
                 <a:cs typeface="Calibri" pitchFamily="34" charset="-120"/>
               </a:rPr>
-              <a:t>to move from one place</a:t>
+              <a:t>into</a:t>
             </a:r>
             <a:endParaRPr lang="en-US" sz="850" dirty="0"/>
           </a:p>
@@ -7899,7 +7899,7 @@
                 <a:ea typeface="Calibri" pitchFamily="34" charset="-122"/>
                 <a:cs typeface="Calibri" pitchFamily="34" charset="-120"/>
               </a:rPr>
-              <a:t>'e' dropped before vowel suffix</a:t>
+              <a:t>in → im before 'm'</a:t>
             </a:r>
             <a:endParaRPr lang="en-US" sz="700" dirty="0"/>
           </a:p>
@@ -7922,11 +7922,11 @@
             </a:avLst>
           </a:prstGeom>
           <a:solidFill>
-            <a:srgbClr val="FCE7F3"/>
+            <a:srgbClr val="CCFBF1"/>
           </a:solidFill>
           <a:ln w="19050">
             <a:solidFill>
-              <a:srgbClr val="DB2777"/>
+              <a:srgbClr val="0D9488"/>
             </a:solidFill>
             <a:prstDash val="solid"/>
           </a:ln>
@@ -7966,13 +7966,13 @@
             <a:r>
               <a:rPr lang="en-US" sz="1300" b="1" dirty="0">
                 <a:solidFill>
-                  <a:srgbClr val="9D174D"/>
+                  <a:srgbClr val="0F766E"/>
                 </a:solidFill>
                 <a:latin typeface="Trebuchet MS" pitchFamily="34" charset="0"/>
                 <a:ea typeface="Trebuchet MS" pitchFamily="34" charset="-122"/>
                 <a:cs typeface="Trebuchet MS" pitchFamily="34" charset="-120"/>
               </a:rPr>
-              <a:t>ory</a:t>
+              <a:t>migrate</a:t>
             </a:r>
             <a:endParaRPr lang="en-US" sz="1300" dirty="0"/>
           </a:p>
@@ -8011,7 +8011,7 @@
                 <a:ea typeface="Calibri" pitchFamily="34" charset="-122"/>
                 <a:cs typeface="Calibri" pitchFamily="34" charset="-120"/>
               </a:rPr>
-              <a:t>relating to or having the quality of</a:t>
+              <a:t>move from one place</a:t>
             </a:r>
             <a:endParaRPr lang="en-US" sz="850" dirty="0"/>
           </a:p>
@@ -8706,7 +8706,7 @@
                 <a:ea typeface="Trebuchet MS" pitchFamily="34" charset="-122"/>
                 <a:cs typeface="Trebuchet MS" pitchFamily="34" charset="-120"/>
               </a:rPr>
-              <a:t>migratory</a:t>
+              <a:t>immigrate</a:t>
             </a:r>
             <a:endParaRPr lang="en-US" sz="2800" dirty="0"/>
           </a:p>
@@ -8795,11 +8795,11 @@
             </a:avLst>
           </a:prstGeom>
           <a:solidFill>
-            <a:srgbClr val="CCFBF1"/>
+            <a:srgbClr val="DDD6FE"/>
           </a:solidFill>
           <a:ln w="19050">
             <a:solidFill>
-              <a:srgbClr val="0D9488"/>
+              <a:srgbClr val="7C3AED"/>
             </a:solidFill>
             <a:prstDash val="solid"/>
           </a:ln>
@@ -8839,13 +8839,13 @@
             <a:r>
               <a:rPr lang="en-US" sz="1300" b="1" dirty="0">
                 <a:solidFill>
-                  <a:srgbClr val="0F766E"/>
+                  <a:srgbClr val="4C1D95"/>
                 </a:solidFill>
                 <a:latin typeface="Trebuchet MS" pitchFamily="34" charset="0"/>
                 <a:ea typeface="Trebuchet MS" pitchFamily="34" charset="-122"/>
                 <a:cs typeface="Trebuchet MS" pitchFamily="34" charset="-120"/>
               </a:rPr>
-              <a:t>migrate</a:t>
+              <a:t>im</a:t>
             </a:r>
             <a:endParaRPr lang="en-US" sz="1300" dirty="0"/>
           </a:p>
@@ -8884,7 +8884,7 @@
                 <a:ea typeface="Calibri" pitchFamily="34" charset="-122"/>
                 <a:cs typeface="Calibri" pitchFamily="34" charset="-120"/>
               </a:rPr>
-              <a:t>to move from one place</a:t>
+              <a:t>into</a:t>
             </a:r>
             <a:endParaRPr lang="en-US" sz="850" dirty="0"/>
           </a:p>
@@ -8923,7 +8923,7 @@
                 <a:ea typeface="Calibri" pitchFamily="34" charset="-122"/>
                 <a:cs typeface="Calibri" pitchFamily="34" charset="-120"/>
               </a:rPr>
-              <a:t>'e' dropped before vowel suffix</a:t>
+              <a:t>in → im before 'm'</a:t>
             </a:r>
             <a:endParaRPr lang="en-US" sz="700" dirty="0"/>
           </a:p>
@@ -8946,11 +8946,11 @@
             </a:avLst>
           </a:prstGeom>
           <a:solidFill>
-            <a:srgbClr val="FCE7F3"/>
+            <a:srgbClr val="CCFBF1"/>
           </a:solidFill>
           <a:ln w="19050">
             <a:solidFill>
-              <a:srgbClr val="DB2777"/>
+              <a:srgbClr val="0D9488"/>
             </a:solidFill>
             <a:prstDash val="solid"/>
           </a:ln>
@@ -8990,13 +8990,13 @@
             <a:r>
               <a:rPr lang="en-US" sz="1300" b="1" dirty="0">
                 <a:solidFill>
-                  <a:srgbClr val="9D174D"/>
+                  <a:srgbClr val="0F766E"/>
                 </a:solidFill>
                 <a:latin typeface="Trebuchet MS" pitchFamily="34" charset="0"/>
                 <a:ea typeface="Trebuchet MS" pitchFamily="34" charset="-122"/>
                 <a:cs typeface="Trebuchet MS" pitchFamily="34" charset="-120"/>
               </a:rPr>
-              <a:t>ory</a:t>
+              <a:t>migrate</a:t>
             </a:r>
             <a:endParaRPr lang="en-US" sz="1300" dirty="0"/>
           </a:p>
@@ -9035,7 +9035,7 @@
                 <a:ea typeface="Calibri" pitchFamily="34" charset="-122"/>
                 <a:cs typeface="Calibri" pitchFamily="34" charset="-120"/>
               </a:rPr>
-              <a:t>relating to or having the quality of</a:t>
+              <a:t>move from one place</a:t>
             </a:r>
             <a:endParaRPr lang="en-US" sz="850" dirty="0"/>
           </a:p>
@@ -9142,8 +9142,8 @@
         </p:nvSpPr>
         <p:spPr>
           <a:xfrm>
-            <a:off x="1975104" y="3364992"/>
-            <a:ext cx="1554480" cy="475488"/>
+            <a:off x="2313432" y="3364992"/>
+            <a:ext cx="1645920" cy="475488"/>
           </a:xfrm>
           <a:prstGeom prst="rect">
             <a:avLst>
@@ -9169,8 +9169,8 @@
         </p:nvSpPr>
         <p:spPr>
           <a:xfrm>
-            <a:off x="1975104" y="3364992"/>
-            <a:ext cx="1554480" cy="475488"/>
+            <a:off x="2313432" y="3364992"/>
+            <a:ext cx="1645920" cy="475488"/>
           </a:xfrm>
           <a:prstGeom prst="rect">
             <a:avLst/>
@@ -9194,7 +9194,7 @@
                 <a:ea typeface="Trebuchet MS" pitchFamily="34" charset="-122"/>
                 <a:cs typeface="Trebuchet MS" pitchFamily="34" charset="-120"/>
               </a:rPr>
-              <a:t>mi</a:t>
+              <a:t>im</a:t>
             </a:r>
             <a:endParaRPr lang="en-US" sz="1400" dirty="0"/>
           </a:p>
@@ -9208,8 +9208,8 @@
         </p:nvSpPr>
         <p:spPr>
           <a:xfrm>
-            <a:off x="3529584" y="3364992"/>
-            <a:ext cx="73152" cy="475488"/>
+            <a:off x="3959352" y="3364992"/>
+            <a:ext cx="411480" cy="475488"/>
           </a:xfrm>
           <a:prstGeom prst="rect">
             <a:avLst/>
@@ -9247,8 +9247,8 @@
         </p:nvSpPr>
         <p:spPr>
           <a:xfrm>
-            <a:off x="3602736" y="3364992"/>
-            <a:ext cx="1554480" cy="475488"/>
+            <a:off x="4370832" y="3364992"/>
+            <a:ext cx="1645920" cy="475488"/>
           </a:xfrm>
           <a:prstGeom prst="rect">
             <a:avLst>
@@ -9274,8 +9274,8 @@
         </p:nvSpPr>
         <p:spPr>
           <a:xfrm>
-            <a:off x="3602736" y="3364992"/>
-            <a:ext cx="1554480" cy="475488"/>
+            <a:off x="4370832" y="3364992"/>
+            <a:ext cx="1645920" cy="475488"/>
           </a:xfrm>
           <a:prstGeom prst="rect">
             <a:avLst/>
@@ -9299,7 +9299,7 @@
                 <a:ea typeface="Trebuchet MS" pitchFamily="34" charset="-122"/>
                 <a:cs typeface="Trebuchet MS" pitchFamily="34" charset="-120"/>
               </a:rPr>
-              <a:t>gra</a:t>
+              <a:t>mi</a:t>
             </a:r>
             <a:endParaRPr lang="en-US" sz="1400" dirty="0"/>
           </a:p>
@@ -9313,8 +9313,8 @@
         </p:nvSpPr>
         <p:spPr>
           <a:xfrm>
-            <a:off x="5157216" y="3364992"/>
-            <a:ext cx="73152" cy="475488"/>
+            <a:off x="6016752" y="3364992"/>
+            <a:ext cx="411480" cy="475488"/>
           </a:xfrm>
           <a:prstGeom prst="rect">
             <a:avLst/>
@@ -9352,8 +9352,8 @@
         </p:nvSpPr>
         <p:spPr>
           <a:xfrm>
-            <a:off x="5230368" y="3364992"/>
-            <a:ext cx="1554480" cy="475488"/>
+            <a:off x="6428232" y="3364992"/>
+            <a:ext cx="1645920" cy="475488"/>
           </a:xfrm>
           <a:prstGeom prst="rect">
             <a:avLst>
@@ -9379,8 +9379,8 @@
         </p:nvSpPr>
         <p:spPr>
           <a:xfrm>
-            <a:off x="5230368" y="3364992"/>
-            <a:ext cx="1554480" cy="475488"/>
+            <a:off x="6428232" y="3364992"/>
+            <a:ext cx="1645920" cy="475488"/>
           </a:xfrm>
           <a:prstGeom prst="rect">
             <a:avLst/>
@@ -9404,7 +9404,7 @@
                 <a:ea typeface="Trebuchet MS" pitchFamily="34" charset="-122"/>
                 <a:cs typeface="Trebuchet MS" pitchFamily="34" charset="-120"/>
               </a:rPr>
-              <a:t>to</a:t>
+              <a:t>grate</a:t>
             </a:r>
             <a:endParaRPr lang="en-US" sz="1400" dirty="0"/>
           </a:p>
@@ -9412,119 +9412,80 @@
       </p:sp>
       <p:sp>
         <p:nvSpPr>
-          <p:cNvPr id="34" name="Text 32"/>
-          <p:cNvSpPr/>
-          <p:nvPr/>
-        </p:nvSpPr>
-        <p:spPr>
-          <a:xfrm>
-            <a:off x="6784848" y="3364992"/>
-            <a:ext cx="73152" cy="475488"/>
-          </a:xfrm>
-          <a:prstGeom prst="rect">
-            <a:avLst/>
-          </a:prstGeom>
-          <a:noFill/>
-          <a:ln/>
-        </p:spPr>
-        <p:txBody>
-          <a:bodyPr wrap="square" lIns="0" tIns="0" rIns="0" bIns="0" rtlCol="0" anchor="ctr"/>
-          <a:lstStyle/>
-          <a:p>
-            <a:pPr algn="ctr" indent="0" marL="0">
-              <a:buNone/>
-            </a:pPr>
-            <a:r>
-              <a:rPr lang="en-US" sz="1600" b="1" dirty="0">
-                <a:solidFill>
-                  <a:srgbClr val="0D9488"/>
+          <p:cNvPr id="34" name="Shape 32"/>
+          <p:cNvSpPr/>
+          <p:nvPr/>
+        </p:nvSpPr>
+        <p:spPr>
+          <a:xfrm>
+            <a:off x="365760" y="4096512"/>
+            <a:ext cx="1371600" cy="804672"/>
+          </a:xfrm>
+          <a:prstGeom prst="rect">
+            <a:avLst>
+              <a:gd name="adj" fmla="val 6818"/>
+            </a:avLst>
+          </a:prstGeom>
+          <a:solidFill>
+            <a:srgbClr val="E2E8F0"/>
+          </a:solidFill>
+          <a:ln w="12700">
+            <a:solidFill>
+              <a:srgbClr val="E2E8F0"/>
+            </a:solidFill>
+            <a:prstDash val="solid"/>
+          </a:ln>
+        </p:spPr>
+      </p:sp>
+      <p:sp>
+        <p:nvSpPr>
+          <p:cNvPr id="35" name="Text 33"/>
+          <p:cNvSpPr/>
+          <p:nvPr/>
+        </p:nvSpPr>
+        <p:spPr>
+          <a:xfrm>
+            <a:off x="365760" y="4096512"/>
+            <a:ext cx="1371600" cy="804672"/>
+          </a:xfrm>
+          <a:prstGeom prst="rect">
+            <a:avLst/>
+          </a:prstGeom>
+          <a:noFill/>
+          <a:ln/>
+        </p:spPr>
+        <p:txBody>
+          <a:bodyPr wrap="square" lIns="0" tIns="0" rIns="0" bIns="0" rtlCol="0" anchor="ctr"/>
+          <a:lstStyle/>
+          <a:p>
+            <a:pPr algn="ctr" indent="0" marL="0">
+              <a:buNone/>
+            </a:pPr>
+            <a:r>
+              <a:rPr lang="en-US" sz="1100" b="1" dirty="0">
+                <a:solidFill>
+                  <a:srgbClr val="475569"/>
                 </a:solidFill>
                 <a:latin typeface="Trebuchet MS" pitchFamily="34" charset="0"/>
                 <a:ea typeface="Trebuchet MS" pitchFamily="34" charset="-122"/>
                 <a:cs typeface="Trebuchet MS" pitchFamily="34" charset="-120"/>
               </a:rPr>
-              <a:t>·</a:t>
-            </a:r>
-            <a:endParaRPr lang="en-US" sz="1600" dirty="0"/>
-          </a:p>
-        </p:txBody>
-      </p:sp>
-      <p:sp>
-        <p:nvSpPr>
-          <p:cNvPr id="35" name="Shape 33"/>
-          <p:cNvSpPr/>
-          <p:nvPr/>
-        </p:nvSpPr>
-        <p:spPr>
-          <a:xfrm>
-            <a:off x="6858000" y="3364992"/>
-            <a:ext cx="1554480" cy="475488"/>
-          </a:xfrm>
-          <a:prstGeom prst="rect">
-            <a:avLst>
-              <a:gd name="adj" fmla="val 9615"/>
-            </a:avLst>
-          </a:prstGeom>
-          <a:solidFill>
-            <a:srgbClr val="FFFFFF"/>
-          </a:solidFill>
-          <a:ln w="12700">
-            <a:solidFill>
-              <a:srgbClr val="0D9488"/>
-            </a:solidFill>
-            <a:prstDash val="solid"/>
-          </a:ln>
-        </p:spPr>
-      </p:sp>
-      <p:sp>
-        <p:nvSpPr>
-          <p:cNvPr id="36" name="Text 34"/>
-          <p:cNvSpPr/>
-          <p:nvPr/>
-        </p:nvSpPr>
-        <p:spPr>
-          <a:xfrm>
-            <a:off x="6858000" y="3364992"/>
-            <a:ext cx="1554480" cy="475488"/>
-          </a:xfrm>
-          <a:prstGeom prst="rect">
-            <a:avLst/>
-          </a:prstGeom>
-          <a:noFill/>
-          <a:ln/>
-        </p:spPr>
-        <p:txBody>
-          <a:bodyPr wrap="square" lIns="0" tIns="0" rIns="0" bIns="0" rtlCol="0" anchor="ctr"/>
-          <a:lstStyle/>
-          <a:p>
-            <a:pPr algn="ctr" indent="0" marL="0">
-              <a:buNone/>
-            </a:pPr>
-            <a:r>
-              <a:rPr lang="en-US" sz="1400" b="1" dirty="0">
-                <a:solidFill>
-                  <a:srgbClr val="0D9488"/>
-                </a:solidFill>
-                <a:latin typeface="Trebuchet MS" pitchFamily="34" charset="0"/>
-                <a:ea typeface="Trebuchet MS" pitchFamily="34" charset="-122"/>
-                <a:cs typeface="Trebuchet MS" pitchFamily="34" charset="-120"/>
-              </a:rPr>
-              <a:t>ry</a:t>
-            </a:r>
-            <a:endParaRPr lang="en-US" sz="1400" dirty="0"/>
-          </a:p>
-        </p:txBody>
-      </p:sp>
-      <p:sp>
-        <p:nvSpPr>
-          <p:cNvPr id="37" name="Shape 35"/>
-          <p:cNvSpPr/>
-          <p:nvPr/>
-        </p:nvSpPr>
-        <p:spPr>
-          <a:xfrm>
-            <a:off x="365760" y="4096512"/>
-            <a:ext cx="1371600" cy="804672"/>
+              <a:t>Phonemes</a:t>
+            </a:r>
+            <a:endParaRPr lang="en-US" sz="1100" dirty="0"/>
+          </a:p>
+        </p:txBody>
+      </p:sp>
+      <p:sp>
+        <p:nvSpPr>
+          <p:cNvPr id="36" name="Shape 34"/>
+          <p:cNvSpPr/>
+          <p:nvPr/>
+        </p:nvSpPr>
+        <p:spPr>
+          <a:xfrm>
+            <a:off x="1874520" y="4096512"/>
+            <a:ext cx="6903720" cy="804672"/>
           </a:xfrm>
           <a:prstGeom prst="rect">
             <a:avLst>
@@ -9532,85 +9493,19 @@
             </a:avLst>
           </a:prstGeom>
           <a:solidFill>
-            <a:srgbClr val="E2E8F0"/>
+            <a:srgbClr val="F8FAFC"/>
           </a:solidFill>
           <a:ln w="12700">
             <a:solidFill>
               <a:srgbClr val="E2E8F0"/>
             </a:solidFill>
-            <a:prstDash val="solid"/>
-          </a:ln>
-        </p:spPr>
-      </p:sp>
-      <p:sp>
-        <p:nvSpPr>
-          <p:cNvPr id="38" name="Text 36"/>
-          <p:cNvSpPr/>
-          <p:nvPr/>
-        </p:nvSpPr>
-        <p:spPr>
-          <a:xfrm>
-            <a:off x="365760" y="4096512"/>
-            <a:ext cx="1371600" cy="804672"/>
-          </a:xfrm>
-          <a:prstGeom prst="rect">
-            <a:avLst/>
-          </a:prstGeom>
-          <a:noFill/>
-          <a:ln/>
-        </p:spPr>
-        <p:txBody>
-          <a:bodyPr wrap="square" lIns="0" tIns="0" rIns="0" bIns="0" rtlCol="0" anchor="ctr"/>
-          <a:lstStyle/>
-          <a:p>
-            <a:pPr algn="ctr" indent="0" marL="0">
-              <a:buNone/>
-            </a:pPr>
-            <a:r>
-              <a:rPr lang="en-US" sz="1100" b="1" dirty="0">
-                <a:solidFill>
-                  <a:srgbClr val="475569"/>
-                </a:solidFill>
-                <a:latin typeface="Trebuchet MS" pitchFamily="34" charset="0"/>
-                <a:ea typeface="Trebuchet MS" pitchFamily="34" charset="-122"/>
-                <a:cs typeface="Trebuchet MS" pitchFamily="34" charset="-120"/>
-              </a:rPr>
-              <a:t>Phonemes</a:t>
-            </a:r>
-            <a:endParaRPr lang="en-US" sz="1100" dirty="0"/>
-          </a:p>
-        </p:txBody>
-      </p:sp>
-      <p:sp>
-        <p:nvSpPr>
-          <p:cNvPr id="39" name="Shape 37"/>
-          <p:cNvSpPr/>
-          <p:nvPr/>
-        </p:nvSpPr>
-        <p:spPr>
-          <a:xfrm>
-            <a:off x="1874520" y="4096512"/>
-            <a:ext cx="6903720" cy="804672"/>
-          </a:xfrm>
-          <a:prstGeom prst="rect">
-            <a:avLst>
-              <a:gd name="adj" fmla="val 6818"/>
-            </a:avLst>
-          </a:prstGeom>
-          <a:solidFill>
-            <a:srgbClr val="F8FAFC"/>
-          </a:solidFill>
-          <a:ln w="12700">
-            <a:solidFill>
-              <a:srgbClr val="E2E8F0"/>
-            </a:solidFill>
             <a:prstDash val="dash"/>
           </a:ln>
         </p:spPr>
       </p:sp>
       <p:sp>
         <p:nvSpPr>
-          <p:cNvPr id="40" name="Text 38"/>
+          <p:cNvPr id="37" name="Text 35"/>
           <p:cNvSpPr/>
           <p:nvPr/>
         </p:nvSpPr>
@@ -10072,7 +9967,7 @@
                 <a:ea typeface="Trebuchet MS" pitchFamily="34" charset="-122"/>
                 <a:cs typeface="Trebuchet MS" pitchFamily="34" charset="-120"/>
               </a:rPr>
-              <a:t>migratory</a:t>
+              <a:t>immigrate</a:t>
             </a:r>
             <a:endParaRPr lang="en-US" sz="2800" dirty="0"/>
           </a:p>
@@ -10161,11 +10056,11 @@
             </a:avLst>
           </a:prstGeom>
           <a:solidFill>
-            <a:srgbClr val="CCFBF1"/>
+            <a:srgbClr val="DDD6FE"/>
           </a:solidFill>
           <a:ln w="19050">
             <a:solidFill>
-              <a:srgbClr val="0D9488"/>
+              <a:srgbClr val="7C3AED"/>
             </a:solidFill>
             <a:prstDash val="solid"/>
           </a:ln>
@@ -10205,13 +10100,13 @@
             <a:r>
               <a:rPr lang="en-US" sz="1300" b="1" dirty="0">
                 <a:solidFill>
-                  <a:srgbClr val="0F766E"/>
+                  <a:srgbClr val="4C1D95"/>
                 </a:solidFill>
                 <a:latin typeface="Trebuchet MS" pitchFamily="34" charset="0"/>
                 <a:ea typeface="Trebuchet MS" pitchFamily="34" charset="-122"/>
                 <a:cs typeface="Trebuchet MS" pitchFamily="34" charset="-120"/>
               </a:rPr>
-              <a:t>migrate</a:t>
+              <a:t>im</a:t>
             </a:r>
             <a:endParaRPr lang="en-US" sz="1300" dirty="0"/>
           </a:p>
@@ -10250,7 +10145,7 @@
                 <a:ea typeface="Calibri" pitchFamily="34" charset="-122"/>
                 <a:cs typeface="Calibri" pitchFamily="34" charset="-120"/>
               </a:rPr>
-              <a:t>to move from one place</a:t>
+              <a:t>into</a:t>
             </a:r>
             <a:endParaRPr lang="en-US" sz="850" dirty="0"/>
           </a:p>
@@ -10289,7 +10184,7 @@
                 <a:ea typeface="Calibri" pitchFamily="34" charset="-122"/>
                 <a:cs typeface="Calibri" pitchFamily="34" charset="-120"/>
               </a:rPr>
-              <a:t>'e' dropped before vowel suffix</a:t>
+              <a:t>in → im before 'm'</a:t>
             </a:r>
             <a:endParaRPr lang="en-US" sz="700" dirty="0"/>
           </a:p>
@@ -10312,11 +10207,11 @@
             </a:avLst>
           </a:prstGeom>
           <a:solidFill>
-            <a:srgbClr val="FCE7F3"/>
+            <a:srgbClr val="CCFBF1"/>
           </a:solidFill>
           <a:ln w="19050">
             <a:solidFill>
-              <a:srgbClr val="DB2777"/>
+              <a:srgbClr val="0D9488"/>
             </a:solidFill>
             <a:prstDash val="solid"/>
           </a:ln>
@@ -10356,13 +10251,13 @@
             <a:r>
               <a:rPr lang="en-US" sz="1300" b="1" dirty="0">
                 <a:solidFill>
-                  <a:srgbClr val="9D174D"/>
+                  <a:srgbClr val="0F766E"/>
                 </a:solidFill>
                 <a:latin typeface="Trebuchet MS" pitchFamily="34" charset="0"/>
                 <a:ea typeface="Trebuchet MS" pitchFamily="34" charset="-122"/>
                 <a:cs typeface="Trebuchet MS" pitchFamily="34" charset="-120"/>
               </a:rPr>
-              <a:t>ory</a:t>
+              <a:t>migrate</a:t>
             </a:r>
             <a:endParaRPr lang="en-US" sz="1300" dirty="0"/>
           </a:p>
@@ -10401,7 +10296,7 @@
                 <a:ea typeface="Calibri" pitchFamily="34" charset="-122"/>
                 <a:cs typeface="Calibri" pitchFamily="34" charset="-120"/>
               </a:rPr>
-              <a:t>relating to or having the quality of</a:t>
+              <a:t>move from one place</a:t>
             </a:r>
             <a:endParaRPr lang="en-US" sz="850" dirty="0"/>
           </a:p>
@@ -10508,8 +10403,8 @@
         </p:nvSpPr>
         <p:spPr>
           <a:xfrm>
-            <a:off x="1975104" y="3364992"/>
-            <a:ext cx="1554480" cy="475488"/>
+            <a:off x="2313432" y="3364992"/>
+            <a:ext cx="1645920" cy="475488"/>
           </a:xfrm>
           <a:prstGeom prst="rect">
             <a:avLst>
@@ -10535,8 +10430,8 @@
         </p:nvSpPr>
         <p:spPr>
           <a:xfrm>
-            <a:off x="1975104" y="3364992"/>
-            <a:ext cx="1554480" cy="475488"/>
+            <a:off x="2313432" y="3364992"/>
+            <a:ext cx="1645920" cy="475488"/>
           </a:xfrm>
           <a:prstGeom prst="rect">
             <a:avLst/>
@@ -10560,7 +10455,7 @@
                 <a:ea typeface="Trebuchet MS" pitchFamily="34" charset="-122"/>
                 <a:cs typeface="Trebuchet MS" pitchFamily="34" charset="-120"/>
               </a:rPr>
-              <a:t>mi</a:t>
+              <a:t>im</a:t>
             </a:r>
             <a:endParaRPr lang="en-US" sz="1400" dirty="0"/>
           </a:p>
@@ -10574,8 +10469,8 @@
         </p:nvSpPr>
         <p:spPr>
           <a:xfrm>
-            <a:off x="3529584" y="3364992"/>
-            <a:ext cx="73152" cy="475488"/>
+            <a:off x="3959352" y="3364992"/>
+            <a:ext cx="411480" cy="475488"/>
           </a:xfrm>
           <a:prstGeom prst="rect">
             <a:avLst/>
@@ -10613,8 +10508,8 @@
         </p:nvSpPr>
         <p:spPr>
           <a:xfrm>
-            <a:off x="3602736" y="3364992"/>
-            <a:ext cx="1554480" cy="475488"/>
+            <a:off x="4370832" y="3364992"/>
+            <a:ext cx="1645920" cy="475488"/>
           </a:xfrm>
           <a:prstGeom prst="rect">
             <a:avLst>
@@ -10640,8 +10535,8 @@
         </p:nvSpPr>
         <p:spPr>
           <a:xfrm>
-            <a:off x="3602736" y="3364992"/>
-            <a:ext cx="1554480" cy="475488"/>
+            <a:off x="4370832" y="3364992"/>
+            <a:ext cx="1645920" cy="475488"/>
           </a:xfrm>
           <a:prstGeom prst="rect">
             <a:avLst/>
@@ -10665,7 +10560,7 @@
                 <a:ea typeface="Trebuchet MS" pitchFamily="34" charset="-122"/>
                 <a:cs typeface="Trebuchet MS" pitchFamily="34" charset="-120"/>
               </a:rPr>
-              <a:t>gra</a:t>
+              <a:t>mi</a:t>
             </a:r>
             <a:endParaRPr lang="en-US" sz="1400" dirty="0"/>
           </a:p>
@@ -10679,8 +10574,8 @@
         </p:nvSpPr>
         <p:spPr>
           <a:xfrm>
-            <a:off x="5157216" y="3364992"/>
-            <a:ext cx="73152" cy="475488"/>
+            <a:off x="6016752" y="3364992"/>
+            <a:ext cx="411480" cy="475488"/>
           </a:xfrm>
           <a:prstGeom prst="rect">
             <a:avLst/>
@@ -10718,8 +10613,8 @@
         </p:nvSpPr>
         <p:spPr>
           <a:xfrm>
-            <a:off x="5230368" y="3364992"/>
-            <a:ext cx="1554480" cy="475488"/>
+            <a:off x="6428232" y="3364992"/>
+            <a:ext cx="1645920" cy="475488"/>
           </a:xfrm>
           <a:prstGeom prst="rect">
             <a:avLst>
@@ -10745,8 +10640,8 @@
         </p:nvSpPr>
         <p:spPr>
           <a:xfrm>
-            <a:off x="5230368" y="3364992"/>
-            <a:ext cx="1554480" cy="475488"/>
+            <a:off x="6428232" y="3364992"/>
+            <a:ext cx="1645920" cy="475488"/>
           </a:xfrm>
           <a:prstGeom prst="rect">
             <a:avLst/>
@@ -10770,7 +10665,7 @@
                 <a:ea typeface="Trebuchet MS" pitchFamily="34" charset="-122"/>
                 <a:cs typeface="Trebuchet MS" pitchFamily="34" charset="-120"/>
               </a:rPr>
-              <a:t>to</a:t>
+              <a:t>grate</a:t>
             </a:r>
             <a:endParaRPr lang="en-US" sz="1400" dirty="0"/>
           </a:p>
@@ -10778,211 +10673,238 @@
       </p:sp>
       <p:sp>
         <p:nvSpPr>
-          <p:cNvPr id="34" name="Text 32"/>
-          <p:cNvSpPr/>
-          <p:nvPr/>
-        </p:nvSpPr>
-        <p:spPr>
-          <a:xfrm>
-            <a:off x="6784848" y="3364992"/>
-            <a:ext cx="73152" cy="475488"/>
-          </a:xfrm>
-          <a:prstGeom prst="rect">
-            <a:avLst/>
-          </a:prstGeom>
-          <a:noFill/>
-          <a:ln/>
-        </p:spPr>
-        <p:txBody>
-          <a:bodyPr wrap="square" lIns="0" tIns="0" rIns="0" bIns="0" rtlCol="0" anchor="ctr"/>
-          <a:lstStyle/>
-          <a:p>
-            <a:pPr algn="ctr" indent="0" marL="0">
-              <a:buNone/>
-            </a:pPr>
-            <a:r>
-              <a:rPr lang="en-US" sz="1600" b="1" dirty="0">
-                <a:solidFill>
-                  <a:srgbClr val="0D9488"/>
+          <p:cNvPr id="34" name="Shape 32"/>
+          <p:cNvSpPr/>
+          <p:nvPr/>
+        </p:nvSpPr>
+        <p:spPr>
+          <a:xfrm>
+            <a:off x="365760" y="4096512"/>
+            <a:ext cx="1371600" cy="804672"/>
+          </a:xfrm>
+          <a:prstGeom prst="rect">
+            <a:avLst>
+              <a:gd name="adj" fmla="val 6818"/>
+            </a:avLst>
+          </a:prstGeom>
+          <a:solidFill>
+            <a:srgbClr val="E2E8F0"/>
+          </a:solidFill>
+          <a:ln w="12700">
+            <a:solidFill>
+              <a:srgbClr val="E2E8F0"/>
+            </a:solidFill>
+            <a:prstDash val="solid"/>
+          </a:ln>
+        </p:spPr>
+      </p:sp>
+      <p:sp>
+        <p:nvSpPr>
+          <p:cNvPr id="35" name="Text 33"/>
+          <p:cNvSpPr/>
+          <p:nvPr/>
+        </p:nvSpPr>
+        <p:spPr>
+          <a:xfrm>
+            <a:off x="365760" y="4096512"/>
+            <a:ext cx="1371600" cy="804672"/>
+          </a:xfrm>
+          <a:prstGeom prst="rect">
+            <a:avLst/>
+          </a:prstGeom>
+          <a:noFill/>
+          <a:ln/>
+        </p:spPr>
+        <p:txBody>
+          <a:bodyPr wrap="square" lIns="0" tIns="0" rIns="0" bIns="0" rtlCol="0" anchor="ctr"/>
+          <a:lstStyle/>
+          <a:p>
+            <a:pPr algn="ctr" indent="0" marL="0">
+              <a:buNone/>
+            </a:pPr>
+            <a:r>
+              <a:rPr lang="en-US" sz="1100" b="1" dirty="0">
+                <a:solidFill>
+                  <a:srgbClr val="475569"/>
                 </a:solidFill>
                 <a:latin typeface="Trebuchet MS" pitchFamily="34" charset="0"/>
                 <a:ea typeface="Trebuchet MS" pitchFamily="34" charset="-122"/>
                 <a:cs typeface="Trebuchet MS" pitchFamily="34" charset="-120"/>
               </a:rPr>
-              <a:t>·</a:t>
-            </a:r>
-            <a:endParaRPr lang="en-US" sz="1600" dirty="0"/>
-          </a:p>
-        </p:txBody>
-      </p:sp>
-      <p:sp>
-        <p:nvSpPr>
-          <p:cNvPr id="35" name="Shape 33"/>
-          <p:cNvSpPr/>
-          <p:nvPr/>
-        </p:nvSpPr>
-        <p:spPr>
-          <a:xfrm>
-            <a:off x="6858000" y="3364992"/>
-            <a:ext cx="1554480" cy="475488"/>
+              <a:t>Phonemes</a:t>
+            </a:r>
+            <a:endParaRPr lang="en-US" sz="1100" dirty="0"/>
+          </a:p>
+        </p:txBody>
+      </p:sp>
+      <p:sp>
+        <p:nvSpPr>
+          <p:cNvPr id="36" name="Shape 34"/>
+          <p:cNvSpPr/>
+          <p:nvPr/>
+        </p:nvSpPr>
+        <p:spPr>
+          <a:xfrm>
+            <a:off x="1874520" y="4096512"/>
+            <a:ext cx="6903720" cy="658368"/>
           </a:xfrm>
           <a:prstGeom prst="rect">
             <a:avLst>
-              <a:gd name="adj" fmla="val 9615"/>
+              <a:gd name="adj" fmla="val 8333"/>
             </a:avLst>
           </a:prstGeom>
           <a:solidFill>
+            <a:srgbClr val="FCE7F3"/>
+          </a:solidFill>
+          <a:ln w="12700">
+            <a:solidFill>
+              <a:srgbClr val="DB2777"/>
+            </a:solidFill>
+            <a:prstDash val="solid"/>
+          </a:ln>
+        </p:spPr>
+      </p:sp>
+      <p:sp>
+        <p:nvSpPr>
+          <p:cNvPr id="37" name="Shape 35"/>
+          <p:cNvSpPr/>
+          <p:nvPr/>
+        </p:nvSpPr>
+        <p:spPr>
+          <a:xfrm>
+            <a:off x="2254649" y="4169664"/>
+            <a:ext cx="685800" cy="475488"/>
+          </a:xfrm>
+          <a:prstGeom prst="rect">
+            <a:avLst>
+              <a:gd name="adj" fmla="val 7692"/>
+            </a:avLst>
+          </a:prstGeom>
+          <a:solidFill>
             <a:srgbClr val="FFFFFF"/>
           </a:solidFill>
           <a:ln w="12700">
             <a:solidFill>
-              <a:srgbClr val="0D9488"/>
-            </a:solidFill>
-            <a:prstDash val="solid"/>
-          </a:ln>
-        </p:spPr>
-      </p:sp>
-      <p:sp>
-        <p:nvSpPr>
-          <p:cNvPr id="36" name="Text 34"/>
-          <p:cNvSpPr/>
-          <p:nvPr/>
-        </p:nvSpPr>
-        <p:spPr>
-          <a:xfrm>
-            <a:off x="6858000" y="3364992"/>
-            <a:ext cx="1554480" cy="475488"/>
-          </a:xfrm>
-          <a:prstGeom prst="rect">
-            <a:avLst/>
-          </a:prstGeom>
-          <a:noFill/>
-          <a:ln/>
-        </p:spPr>
-        <p:txBody>
-          <a:bodyPr wrap="square" lIns="0" tIns="0" rIns="0" bIns="0" rtlCol="0" anchor="ctr"/>
-          <a:lstStyle/>
-          <a:p>
-            <a:pPr algn="ctr" indent="0" marL="0">
-              <a:buNone/>
-            </a:pPr>
-            <a:r>
-              <a:rPr lang="en-US" sz="1400" b="1" dirty="0">
-                <a:solidFill>
-                  <a:srgbClr val="0D9488"/>
+              <a:srgbClr val="DB2777"/>
+            </a:solidFill>
+            <a:prstDash val="solid"/>
+          </a:ln>
+        </p:spPr>
+      </p:sp>
+      <p:sp>
+        <p:nvSpPr>
+          <p:cNvPr id="38" name="Text 36"/>
+          <p:cNvSpPr/>
+          <p:nvPr/>
+        </p:nvSpPr>
+        <p:spPr>
+          <a:xfrm>
+            <a:off x="2254649" y="4169664"/>
+            <a:ext cx="685800" cy="475488"/>
+          </a:xfrm>
+          <a:prstGeom prst="rect">
+            <a:avLst/>
+          </a:prstGeom>
+          <a:noFill/>
+          <a:ln/>
+        </p:spPr>
+        <p:txBody>
+          <a:bodyPr wrap="square" lIns="0" tIns="0" rIns="0" bIns="0" rtlCol="0" anchor="ctr"/>
+          <a:lstStyle/>
+          <a:p>
+            <a:pPr algn="ctr" indent="0" marL="0">
+              <a:buNone/>
+            </a:pPr>
+            <a:r>
+              <a:rPr lang="en-US" sz="900" b="1" dirty="0">
+                <a:solidFill>
+                  <a:srgbClr val="9D174D"/>
                 </a:solidFill>
                 <a:latin typeface="Trebuchet MS" pitchFamily="34" charset="0"/>
                 <a:ea typeface="Trebuchet MS" pitchFamily="34" charset="-122"/>
                 <a:cs typeface="Trebuchet MS" pitchFamily="34" charset="-120"/>
               </a:rPr>
-              <a:t>ry</a:t>
-            </a:r>
-            <a:endParaRPr lang="en-US" sz="1400" dirty="0"/>
-          </a:p>
-        </p:txBody>
-      </p:sp>
-      <p:sp>
-        <p:nvSpPr>
-          <p:cNvPr id="37" name="Shape 35"/>
-          <p:cNvSpPr/>
-          <p:nvPr/>
-        </p:nvSpPr>
-        <p:spPr>
-          <a:xfrm>
-            <a:off x="365760" y="4096512"/>
-            <a:ext cx="1371600" cy="804672"/>
+              <a:t>i</a:t>
+            </a:r>
+            <a:endParaRPr lang="en-US" sz="900" dirty="0"/>
+          </a:p>
+        </p:txBody>
+      </p:sp>
+      <p:sp>
+        <p:nvSpPr>
+          <p:cNvPr id="39" name="Shape 37"/>
+          <p:cNvSpPr/>
+          <p:nvPr/>
+        </p:nvSpPr>
+        <p:spPr>
+          <a:xfrm>
+            <a:off x="3293146" y="4169664"/>
+            <a:ext cx="685800" cy="475488"/>
           </a:xfrm>
           <a:prstGeom prst="rect">
             <a:avLst>
-              <a:gd name="adj" fmla="val 6818"/>
+              <a:gd name="adj" fmla="val 7692"/>
             </a:avLst>
           </a:prstGeom>
           <a:solidFill>
-            <a:srgbClr val="E2E8F0"/>
-          </a:solidFill>
-          <a:ln w="12700">
-            <a:solidFill>
-              <a:srgbClr val="E2E8F0"/>
-            </a:solidFill>
-            <a:prstDash val="solid"/>
-          </a:ln>
-        </p:spPr>
-      </p:sp>
-      <p:sp>
-        <p:nvSpPr>
-          <p:cNvPr id="38" name="Text 36"/>
-          <p:cNvSpPr/>
-          <p:nvPr/>
-        </p:nvSpPr>
-        <p:spPr>
-          <a:xfrm>
-            <a:off x="365760" y="4096512"/>
-            <a:ext cx="1371600" cy="804672"/>
-          </a:xfrm>
-          <a:prstGeom prst="rect">
-            <a:avLst/>
-          </a:prstGeom>
-          <a:noFill/>
-          <a:ln/>
-        </p:spPr>
-        <p:txBody>
-          <a:bodyPr wrap="square" lIns="0" tIns="0" rIns="0" bIns="0" rtlCol="0" anchor="ctr"/>
-          <a:lstStyle/>
-          <a:p>
-            <a:pPr algn="ctr" indent="0" marL="0">
-              <a:buNone/>
-            </a:pPr>
-            <a:r>
-              <a:rPr lang="en-US" sz="1100" b="1" dirty="0">
-                <a:solidFill>
-                  <a:srgbClr val="475569"/>
+            <a:srgbClr val="FFFFFF"/>
+          </a:solidFill>
+          <a:ln w="12700">
+            <a:solidFill>
+              <a:srgbClr val="DB2777"/>
+            </a:solidFill>
+            <a:prstDash val="solid"/>
+          </a:ln>
+        </p:spPr>
+      </p:sp>
+      <p:sp>
+        <p:nvSpPr>
+          <p:cNvPr id="40" name="Text 38"/>
+          <p:cNvSpPr/>
+          <p:nvPr/>
+        </p:nvSpPr>
+        <p:spPr>
+          <a:xfrm>
+            <a:off x="3293146" y="4169664"/>
+            <a:ext cx="685800" cy="475488"/>
+          </a:xfrm>
+          <a:prstGeom prst="rect">
+            <a:avLst/>
+          </a:prstGeom>
+          <a:noFill/>
+          <a:ln/>
+        </p:spPr>
+        <p:txBody>
+          <a:bodyPr wrap="square" lIns="0" tIns="0" rIns="0" bIns="0" rtlCol="0" anchor="ctr"/>
+          <a:lstStyle/>
+          <a:p>
+            <a:pPr algn="ctr" indent="0" marL="0">
+              <a:buNone/>
+            </a:pPr>
+            <a:r>
+              <a:rPr lang="en-US" sz="900" b="1" dirty="0">
+                <a:solidFill>
+                  <a:srgbClr val="9D174D"/>
                 </a:solidFill>
                 <a:latin typeface="Trebuchet MS" pitchFamily="34" charset="0"/>
                 <a:ea typeface="Trebuchet MS" pitchFamily="34" charset="-122"/>
                 <a:cs typeface="Trebuchet MS" pitchFamily="34" charset="-120"/>
               </a:rPr>
-              <a:t>Phonemes</a:t>
-            </a:r>
-            <a:endParaRPr lang="en-US" sz="1100" dirty="0"/>
-          </a:p>
-        </p:txBody>
-      </p:sp>
-      <p:sp>
-        <p:nvSpPr>
-          <p:cNvPr id="39" name="Shape 37"/>
-          <p:cNvSpPr/>
-          <p:nvPr/>
-        </p:nvSpPr>
-        <p:spPr>
-          <a:xfrm>
-            <a:off x="1874520" y="4096512"/>
-            <a:ext cx="6903720" cy="658368"/>
-          </a:xfrm>
-          <a:prstGeom prst="rect">
-            <a:avLst>
-              <a:gd name="adj" fmla="val 8333"/>
-            </a:avLst>
-          </a:prstGeom>
-          <a:solidFill>
-            <a:srgbClr val="FCE7F3"/>
-          </a:solidFill>
-          <a:ln w="12700">
-            <a:solidFill>
-              <a:srgbClr val="DB2777"/>
-            </a:solidFill>
-            <a:prstDash val="solid"/>
-          </a:ln>
-        </p:spPr>
-      </p:sp>
-      <p:sp>
-        <p:nvSpPr>
-          <p:cNvPr id="40" name="Shape 38"/>
-          <p:cNvSpPr/>
-          <p:nvPr/>
-        </p:nvSpPr>
-        <p:spPr>
-          <a:xfrm>
-            <a:off x="2023872" y="4169664"/>
+              <a:t>mm</a:t>
+            </a:r>
+            <a:endParaRPr lang="en-US" sz="900" dirty="0"/>
+          </a:p>
+        </p:txBody>
+      </p:sp>
+      <p:sp>
+        <p:nvSpPr>
+          <p:cNvPr id="41" name="Shape 39"/>
+          <p:cNvSpPr/>
+          <p:nvPr/>
+        </p:nvSpPr>
+        <p:spPr>
+          <a:xfrm>
+            <a:off x="4331643" y="4169664"/>
             <a:ext cx="685800" cy="475488"/>
           </a:xfrm>
           <a:prstGeom prst="rect">
@@ -11003,13 +10925,13 @@
       </p:sp>
       <p:sp>
         <p:nvSpPr>
-          <p:cNvPr id="41" name="Text 39"/>
-          <p:cNvSpPr/>
-          <p:nvPr/>
-        </p:nvSpPr>
-        <p:spPr>
-          <a:xfrm>
-            <a:off x="2023872" y="4169664"/>
+          <p:cNvPr id="42" name="Text 40"/>
+          <p:cNvSpPr/>
+          <p:nvPr/>
+        </p:nvSpPr>
+        <p:spPr>
+          <a:xfrm>
+            <a:off x="4331643" y="4169664"/>
             <a:ext cx="685800" cy="475488"/>
           </a:xfrm>
           <a:prstGeom prst="rect">
@@ -11034,7 +10956,7 @@
                 <a:ea typeface="Trebuchet MS" pitchFamily="34" charset="-122"/>
                 <a:cs typeface="Trebuchet MS" pitchFamily="34" charset="-120"/>
               </a:rPr>
-              <a:t>m</a:t>
+              <a:t>i</a:t>
             </a:r>
             <a:endParaRPr lang="en-US" sz="900" dirty="0"/>
           </a:p>
@@ -11042,13 +10964,13 @@
       </p:sp>
       <p:sp>
         <p:nvSpPr>
-          <p:cNvPr id="42" name="Shape 40"/>
-          <p:cNvSpPr/>
-          <p:nvPr/>
-        </p:nvSpPr>
-        <p:spPr>
-          <a:xfrm>
-            <a:off x="2831592" y="4169664"/>
+          <p:cNvPr id="43" name="Shape 41"/>
+          <p:cNvSpPr/>
+          <p:nvPr/>
+        </p:nvSpPr>
+        <p:spPr>
+          <a:xfrm>
+            <a:off x="5370141" y="4169664"/>
             <a:ext cx="685800" cy="475488"/>
           </a:xfrm>
           <a:prstGeom prst="rect">
@@ -11069,13 +10991,13 @@
       </p:sp>
       <p:sp>
         <p:nvSpPr>
-          <p:cNvPr id="43" name="Text 41"/>
-          <p:cNvSpPr/>
-          <p:nvPr/>
-        </p:nvSpPr>
-        <p:spPr>
-          <a:xfrm>
-            <a:off x="2831592" y="4169664"/>
+          <p:cNvPr id="44" name="Text 42"/>
+          <p:cNvSpPr/>
+          <p:nvPr/>
+        </p:nvSpPr>
+        <p:spPr>
+          <a:xfrm>
+            <a:off x="5370141" y="4169664"/>
             <a:ext cx="685800" cy="475488"/>
           </a:xfrm>
           <a:prstGeom prst="rect">
@@ -11100,7 +11022,7 @@
                 <a:ea typeface="Trebuchet MS" pitchFamily="34" charset="-122"/>
                 <a:cs typeface="Trebuchet MS" pitchFamily="34" charset="-120"/>
               </a:rPr>
-              <a:t>i</a:t>
+              <a:t>gr</a:t>
             </a:r>
             <a:endParaRPr lang="en-US" sz="900" dirty="0"/>
           </a:p>
@@ -11108,13 +11030,13 @@
       </p:sp>
       <p:sp>
         <p:nvSpPr>
-          <p:cNvPr id="44" name="Shape 42"/>
-          <p:cNvSpPr/>
-          <p:nvPr/>
-        </p:nvSpPr>
-        <p:spPr>
-          <a:xfrm>
-            <a:off x="3639312" y="4169664"/>
+          <p:cNvPr id="45" name="Shape 43"/>
+          <p:cNvSpPr/>
+          <p:nvPr/>
+        </p:nvSpPr>
+        <p:spPr>
+          <a:xfrm>
+            <a:off x="6408638" y="4169664"/>
             <a:ext cx="685800" cy="475488"/>
           </a:xfrm>
           <a:prstGeom prst="rect">
@@ -11135,13 +11057,13 @@
       </p:sp>
       <p:sp>
         <p:nvSpPr>
-          <p:cNvPr id="45" name="Text 43"/>
-          <p:cNvSpPr/>
-          <p:nvPr/>
-        </p:nvSpPr>
-        <p:spPr>
-          <a:xfrm>
-            <a:off x="3639312" y="4169664"/>
+          <p:cNvPr id="46" name="Text 44"/>
+          <p:cNvSpPr/>
+          <p:nvPr/>
+        </p:nvSpPr>
+        <p:spPr>
+          <a:xfrm>
+            <a:off x="6408638" y="4169664"/>
             <a:ext cx="685800" cy="475488"/>
           </a:xfrm>
           <a:prstGeom prst="rect">
@@ -11166,7 +11088,7 @@
                 <a:ea typeface="Trebuchet MS" pitchFamily="34" charset="-122"/>
                 <a:cs typeface="Trebuchet MS" pitchFamily="34" charset="-120"/>
               </a:rPr>
-              <a:t>g</a:t>
+              <a:t>a</a:t>
             </a:r>
             <a:endParaRPr lang="en-US" sz="900" dirty="0"/>
           </a:p>
@@ -11174,13 +11096,13 @@
       </p:sp>
       <p:sp>
         <p:nvSpPr>
-          <p:cNvPr id="46" name="Shape 44"/>
-          <p:cNvSpPr/>
-          <p:nvPr/>
-        </p:nvSpPr>
-        <p:spPr>
-          <a:xfrm>
-            <a:off x="4447032" y="4169664"/>
+          <p:cNvPr id="47" name="Shape 45"/>
+          <p:cNvSpPr/>
+          <p:nvPr/>
+        </p:nvSpPr>
+        <p:spPr>
+          <a:xfrm>
+            <a:off x="7447135" y="4169664"/>
             <a:ext cx="685800" cy="475488"/>
           </a:xfrm>
           <a:prstGeom prst="rect">
@@ -11201,13 +11123,13 @@
       </p:sp>
       <p:sp>
         <p:nvSpPr>
-          <p:cNvPr id="47" name="Text 45"/>
-          <p:cNvSpPr/>
-          <p:nvPr/>
-        </p:nvSpPr>
-        <p:spPr>
-          <a:xfrm>
-            <a:off x="4447032" y="4169664"/>
+          <p:cNvPr id="48" name="Text 46"/>
+          <p:cNvSpPr/>
+          <p:nvPr/>
+        </p:nvSpPr>
+        <p:spPr>
+          <a:xfrm>
+            <a:off x="7447135" y="4169664"/>
             <a:ext cx="685800" cy="475488"/>
           </a:xfrm>
           <a:prstGeom prst="rect">
@@ -11232,271 +11154,7 @@
                 <a:ea typeface="Trebuchet MS" pitchFamily="34" charset="-122"/>
                 <a:cs typeface="Trebuchet MS" pitchFamily="34" charset="-120"/>
               </a:rPr>
-              <a:t>r</a:t>
-            </a:r>
-            <a:endParaRPr lang="en-US" sz="900" dirty="0"/>
-          </a:p>
-        </p:txBody>
-      </p:sp>
-      <p:sp>
-        <p:nvSpPr>
-          <p:cNvPr id="48" name="Shape 46"/>
-          <p:cNvSpPr/>
-          <p:nvPr/>
-        </p:nvSpPr>
-        <p:spPr>
-          <a:xfrm>
-            <a:off x="5254752" y="4169664"/>
-            <a:ext cx="685800" cy="475488"/>
-          </a:xfrm>
-          <a:prstGeom prst="rect">
-            <a:avLst>
-              <a:gd name="adj" fmla="val 7692"/>
-            </a:avLst>
-          </a:prstGeom>
-          <a:solidFill>
-            <a:srgbClr val="FFFFFF"/>
-          </a:solidFill>
-          <a:ln w="12700">
-            <a:solidFill>
-              <a:srgbClr val="DB2777"/>
-            </a:solidFill>
-            <a:prstDash val="solid"/>
-          </a:ln>
-        </p:spPr>
-      </p:sp>
-      <p:sp>
-        <p:nvSpPr>
-          <p:cNvPr id="49" name="Text 47"/>
-          <p:cNvSpPr/>
-          <p:nvPr/>
-        </p:nvSpPr>
-        <p:spPr>
-          <a:xfrm>
-            <a:off x="5254752" y="4169664"/>
-            <a:ext cx="685800" cy="475488"/>
-          </a:xfrm>
-          <a:prstGeom prst="rect">
-            <a:avLst/>
-          </a:prstGeom>
-          <a:noFill/>
-          <a:ln/>
-        </p:spPr>
-        <p:txBody>
-          <a:bodyPr wrap="square" lIns="0" tIns="0" rIns="0" bIns="0" rtlCol="0" anchor="ctr"/>
-          <a:lstStyle/>
-          <a:p>
-            <a:pPr algn="ctr" indent="0" marL="0">
-              <a:buNone/>
-            </a:pPr>
-            <a:r>
-              <a:rPr lang="en-US" sz="900" b="1" dirty="0">
-                <a:solidFill>
-                  <a:srgbClr val="9D174D"/>
-                </a:solidFill>
-                <a:latin typeface="Trebuchet MS" pitchFamily="34" charset="0"/>
-                <a:ea typeface="Trebuchet MS" pitchFamily="34" charset="-122"/>
-                <a:cs typeface="Trebuchet MS" pitchFamily="34" charset="-120"/>
-              </a:rPr>
-              <a:t>a</a:t>
-            </a:r>
-            <a:endParaRPr lang="en-US" sz="900" dirty="0"/>
-          </a:p>
-        </p:txBody>
-      </p:sp>
-      <p:sp>
-        <p:nvSpPr>
-          <p:cNvPr id="50" name="Shape 48"/>
-          <p:cNvSpPr/>
-          <p:nvPr/>
-        </p:nvSpPr>
-        <p:spPr>
-          <a:xfrm>
-            <a:off x="6062472" y="4169664"/>
-            <a:ext cx="685800" cy="475488"/>
-          </a:xfrm>
-          <a:prstGeom prst="rect">
-            <a:avLst>
-              <a:gd name="adj" fmla="val 7692"/>
-            </a:avLst>
-          </a:prstGeom>
-          <a:solidFill>
-            <a:srgbClr val="FFFFFF"/>
-          </a:solidFill>
-          <a:ln w="12700">
-            <a:solidFill>
-              <a:srgbClr val="DB2777"/>
-            </a:solidFill>
-            <a:prstDash val="solid"/>
-          </a:ln>
-        </p:spPr>
-      </p:sp>
-      <p:sp>
-        <p:nvSpPr>
-          <p:cNvPr id="51" name="Text 49"/>
-          <p:cNvSpPr/>
-          <p:nvPr/>
-        </p:nvSpPr>
-        <p:spPr>
-          <a:xfrm>
-            <a:off x="6062472" y="4169664"/>
-            <a:ext cx="685800" cy="475488"/>
-          </a:xfrm>
-          <a:prstGeom prst="rect">
-            <a:avLst/>
-          </a:prstGeom>
-          <a:noFill/>
-          <a:ln/>
-        </p:spPr>
-        <p:txBody>
-          <a:bodyPr wrap="square" lIns="0" tIns="0" rIns="0" bIns="0" rtlCol="0" anchor="ctr"/>
-          <a:lstStyle/>
-          <a:p>
-            <a:pPr algn="ctr" indent="0" marL="0">
-              <a:buNone/>
-            </a:pPr>
-            <a:r>
-              <a:rPr lang="en-US" sz="900" b="1" dirty="0">
-                <a:solidFill>
-                  <a:srgbClr val="9D174D"/>
-                </a:solidFill>
-                <a:latin typeface="Trebuchet MS" pitchFamily="34" charset="0"/>
-                <a:ea typeface="Trebuchet MS" pitchFamily="34" charset="-122"/>
-                <a:cs typeface="Trebuchet MS" pitchFamily="34" charset="-120"/>
-              </a:rPr>
-              <a:t>t</a:t>
-            </a:r>
-            <a:endParaRPr lang="en-US" sz="900" dirty="0"/>
-          </a:p>
-        </p:txBody>
-      </p:sp>
-      <p:sp>
-        <p:nvSpPr>
-          <p:cNvPr id="52" name="Shape 50"/>
-          <p:cNvSpPr/>
-          <p:nvPr/>
-        </p:nvSpPr>
-        <p:spPr>
-          <a:xfrm>
-            <a:off x="6870192" y="4169664"/>
-            <a:ext cx="685800" cy="475488"/>
-          </a:xfrm>
-          <a:prstGeom prst="rect">
-            <a:avLst>
-              <a:gd name="adj" fmla="val 7692"/>
-            </a:avLst>
-          </a:prstGeom>
-          <a:solidFill>
-            <a:srgbClr val="FFFFFF"/>
-          </a:solidFill>
-          <a:ln w="12700">
-            <a:solidFill>
-              <a:srgbClr val="DB2777"/>
-            </a:solidFill>
-            <a:prstDash val="solid"/>
-          </a:ln>
-        </p:spPr>
-      </p:sp>
-      <p:sp>
-        <p:nvSpPr>
-          <p:cNvPr id="53" name="Text 51"/>
-          <p:cNvSpPr/>
-          <p:nvPr/>
-        </p:nvSpPr>
-        <p:spPr>
-          <a:xfrm>
-            <a:off x="6870192" y="4169664"/>
-            <a:ext cx="685800" cy="475488"/>
-          </a:xfrm>
-          <a:prstGeom prst="rect">
-            <a:avLst/>
-          </a:prstGeom>
-          <a:noFill/>
-          <a:ln/>
-        </p:spPr>
-        <p:txBody>
-          <a:bodyPr wrap="square" lIns="0" tIns="0" rIns="0" bIns="0" rtlCol="0" anchor="ctr"/>
-          <a:lstStyle/>
-          <a:p>
-            <a:pPr algn="ctr" indent="0" marL="0">
-              <a:buNone/>
-            </a:pPr>
-            <a:r>
-              <a:rPr lang="en-US" sz="900" b="1" dirty="0">
-                <a:solidFill>
-                  <a:srgbClr val="9D174D"/>
-                </a:solidFill>
-                <a:latin typeface="Trebuchet MS" pitchFamily="34" charset="0"/>
-                <a:ea typeface="Trebuchet MS" pitchFamily="34" charset="-122"/>
-                <a:cs typeface="Trebuchet MS" pitchFamily="34" charset="-120"/>
-              </a:rPr>
-              <a:t>or</a:t>
-            </a:r>
-            <a:endParaRPr lang="en-US" sz="900" dirty="0"/>
-          </a:p>
-        </p:txBody>
-      </p:sp>
-      <p:sp>
-        <p:nvSpPr>
-          <p:cNvPr id="54" name="Shape 52"/>
-          <p:cNvSpPr/>
-          <p:nvPr/>
-        </p:nvSpPr>
-        <p:spPr>
-          <a:xfrm>
-            <a:off x="7677912" y="4169664"/>
-            <a:ext cx="685800" cy="475488"/>
-          </a:xfrm>
-          <a:prstGeom prst="rect">
-            <a:avLst>
-              <a:gd name="adj" fmla="val 7692"/>
-            </a:avLst>
-          </a:prstGeom>
-          <a:solidFill>
-            <a:srgbClr val="FFFFFF"/>
-          </a:solidFill>
-          <a:ln w="12700">
-            <a:solidFill>
-              <a:srgbClr val="DB2777"/>
-            </a:solidFill>
-            <a:prstDash val="solid"/>
-          </a:ln>
-        </p:spPr>
-      </p:sp>
-      <p:sp>
-        <p:nvSpPr>
-          <p:cNvPr id="55" name="Text 53"/>
-          <p:cNvSpPr/>
-          <p:nvPr/>
-        </p:nvSpPr>
-        <p:spPr>
-          <a:xfrm>
-            <a:off x="7677912" y="4169664"/>
-            <a:ext cx="685800" cy="475488"/>
-          </a:xfrm>
-          <a:prstGeom prst="rect">
-            <a:avLst/>
-          </a:prstGeom>
-          <a:noFill/>
-          <a:ln/>
-        </p:spPr>
-        <p:txBody>
-          <a:bodyPr wrap="square" lIns="0" tIns="0" rIns="0" bIns="0" rtlCol="0" anchor="ctr"/>
-          <a:lstStyle/>
-          <a:p>
-            <a:pPr algn="ctr" indent="0" marL="0">
-              <a:buNone/>
-            </a:pPr>
-            <a:r>
-              <a:rPr lang="en-US" sz="900" b="1" dirty="0">
-                <a:solidFill>
-                  <a:srgbClr val="9D174D"/>
-                </a:solidFill>
-                <a:latin typeface="Trebuchet MS" pitchFamily="34" charset="0"/>
-                <a:ea typeface="Trebuchet MS" pitchFamily="34" charset="-122"/>
-                <a:cs typeface="Trebuchet MS" pitchFamily="34" charset="-120"/>
-              </a:rPr>
-              <a:t>y</a:t>
+              <a:t>te</a:t>
             </a:r>
             <a:endParaRPr lang="en-US" sz="900" dirty="0"/>
           </a:p>
@@ -12932,7 +12590,7 @@
                 <a:ea typeface="Calibri" pitchFamily="34" charset="-122"/>
                 <a:cs typeface="Calibri" pitchFamily="34" charset="-120"/>
               </a:rPr>
-              <a:t>to move from one place</a:t>
+              <a:t>move from one place</a:t>
             </a:r>
             <a:endParaRPr lang="en-US" sz="850" dirty="0"/>
           </a:p>
@@ -13083,7 +12741,7 @@
                 <a:ea typeface="Calibri" pitchFamily="34" charset="-122"/>
                 <a:cs typeface="Calibri" pitchFamily="34" charset="-120"/>
               </a:rPr>
-              <a:t>the act or process of</a:t>
+              <a:t>act or process of</a:t>
             </a:r>
             <a:endParaRPr lang="en-US" sz="850" dirty="0"/>
           </a:p>
@@ -13956,7 +13614,7 @@
                 <a:ea typeface="Calibri" pitchFamily="34" charset="-122"/>
                 <a:cs typeface="Calibri" pitchFamily="34" charset="-120"/>
               </a:rPr>
-              <a:t>to move from one place</a:t>
+              <a:t>move from one place</a:t>
             </a:r>
             <a:endParaRPr lang="en-US" sz="850" dirty="0"/>
           </a:p>
@@ -14107,7 +13765,7 @@
                 <a:ea typeface="Calibri" pitchFamily="34" charset="-122"/>
                 <a:cs typeface="Calibri" pitchFamily="34" charset="-120"/>
               </a:rPr>
-              <a:t>the act or process of</a:t>
+              <a:t>act or process of</a:t>
             </a:r>
             <a:endParaRPr lang="en-US" sz="850" dirty="0"/>
           </a:p>
@@ -15482,7 +15140,7 @@
                 <a:ea typeface="Calibri" pitchFamily="34" charset="-122"/>
                 <a:cs typeface="Calibri" pitchFamily="34" charset="-120"/>
               </a:rPr>
-              <a:t>to move from one place</a:t>
+              <a:t>move from one place</a:t>
             </a:r>
             <a:endParaRPr lang="en-US" sz="850" dirty="0"/>
           </a:p>
@@ -15633,7 +15291,7 @@
                 <a:ea typeface="Calibri" pitchFamily="34" charset="-122"/>
                 <a:cs typeface="Calibri" pitchFamily="34" charset="-120"/>
               </a:rPr>
-              <a:t>the act or process of</a:t>
+              <a:t>act or process of</a:t>
             </a:r>
             <a:endParaRPr lang="en-US" sz="850" dirty="0"/>
           </a:p>
@@ -16109,7 +15767,7 @@
         </p:nvSpPr>
         <p:spPr>
           <a:xfrm>
-            <a:off x="2023872" y="4169664"/>
+            <a:off x="2124837" y="4169664"/>
             <a:ext cx="685800" cy="384048"/>
           </a:xfrm>
           <a:prstGeom prst="rect">
@@ -16136,7 +15794,7 @@
         </p:nvSpPr>
         <p:spPr>
           <a:xfrm>
-            <a:off x="2023872" y="4169664"/>
+            <a:off x="2124837" y="4169664"/>
             <a:ext cx="685800" cy="384048"/>
           </a:xfrm>
           <a:prstGeom prst="rect">
@@ -16175,7 +15833,7 @@
         </p:nvSpPr>
         <p:spPr>
           <a:xfrm>
-            <a:off x="2831592" y="4169664"/>
+            <a:off x="3033522" y="4169664"/>
             <a:ext cx="685800" cy="384048"/>
           </a:xfrm>
           <a:prstGeom prst="rect">
@@ -16202,7 +15860,7 @@
         </p:nvSpPr>
         <p:spPr>
           <a:xfrm>
-            <a:off x="2831592" y="4169664"/>
+            <a:off x="3033522" y="4169664"/>
             <a:ext cx="685800" cy="384048"/>
           </a:xfrm>
           <a:prstGeom prst="rect">
@@ -16241,7 +15899,7 @@
         </p:nvSpPr>
         <p:spPr>
           <a:xfrm>
-            <a:off x="3639312" y="4169664"/>
+            <a:off x="3942207" y="4169664"/>
             <a:ext cx="685800" cy="384048"/>
           </a:xfrm>
           <a:prstGeom prst="rect">
@@ -16268,7 +15926,7 @@
         </p:nvSpPr>
         <p:spPr>
           <a:xfrm>
-            <a:off x="3639312" y="4169664"/>
+            <a:off x="3942207" y="4169664"/>
             <a:ext cx="685800" cy="384048"/>
           </a:xfrm>
           <a:prstGeom prst="rect">
@@ -16293,7 +15951,7 @@
                 <a:ea typeface="Trebuchet MS" pitchFamily="34" charset="-122"/>
                 <a:cs typeface="Trebuchet MS" pitchFamily="34" charset="-120"/>
               </a:rPr>
-              <a:t>g</a:t>
+              <a:t>gr</a:t>
             </a:r>
             <a:endParaRPr lang="en-US" sz="900" dirty="0"/>
           </a:p>
@@ -16307,7 +15965,7 @@
         </p:nvSpPr>
         <p:spPr>
           <a:xfrm>
-            <a:off x="4447032" y="4169664"/>
+            <a:off x="4850892" y="4169664"/>
             <a:ext cx="685800" cy="384048"/>
           </a:xfrm>
           <a:prstGeom prst="rect">
@@ -16334,7 +15992,7 @@
         </p:nvSpPr>
         <p:spPr>
           <a:xfrm>
-            <a:off x="4447032" y="4169664"/>
+            <a:off x="4850892" y="4169664"/>
             <a:ext cx="685800" cy="384048"/>
           </a:xfrm>
           <a:prstGeom prst="rect">
@@ -16359,7 +16017,7 @@
                 <a:ea typeface="Trebuchet MS" pitchFamily="34" charset="-122"/>
                 <a:cs typeface="Trebuchet MS" pitchFamily="34" charset="-120"/>
               </a:rPr>
-              <a:t>r</a:t>
+              <a:t>a</a:t>
             </a:r>
             <a:endParaRPr lang="en-US" sz="900" dirty="0"/>
           </a:p>
@@ -16373,7 +16031,7 @@
         </p:nvSpPr>
         <p:spPr>
           <a:xfrm>
-            <a:off x="5254752" y="4169664"/>
+            <a:off x="5759577" y="4169664"/>
             <a:ext cx="685800" cy="384048"/>
           </a:xfrm>
           <a:prstGeom prst="rect">
@@ -16400,7 +16058,7 @@
         </p:nvSpPr>
         <p:spPr>
           <a:xfrm>
-            <a:off x="5254752" y="4169664"/>
+            <a:off x="5759577" y="4169664"/>
             <a:ext cx="685800" cy="384048"/>
           </a:xfrm>
           <a:prstGeom prst="rect">
@@ -16425,7 +16083,7 @@
                 <a:ea typeface="Trebuchet MS" pitchFamily="34" charset="-122"/>
                 <a:cs typeface="Trebuchet MS" pitchFamily="34" charset="-120"/>
               </a:rPr>
-              <a:t>a</a:t>
+              <a:t>t</a:t>
             </a:r>
             <a:endParaRPr lang="en-US" sz="900" dirty="0"/>
           </a:p>
@@ -16433,13 +16091,52 @@
       </p:sp>
       <p:sp>
         <p:nvSpPr>
-          <p:cNvPr id="47" name="Shape 45"/>
-          <p:cNvSpPr/>
-          <p:nvPr/>
-        </p:nvSpPr>
-        <p:spPr>
-          <a:xfrm>
-            <a:off x="6062472" y="4169664"/>
+          <p:cNvPr id="47" name="Text 45"/>
+          <p:cNvSpPr/>
+          <p:nvPr/>
+        </p:nvSpPr>
+        <p:spPr>
+          <a:xfrm>
+            <a:off x="5759577" y="4572000"/>
+            <a:ext cx="685800" cy="219456"/>
+          </a:xfrm>
+          <a:prstGeom prst="rect">
+            <a:avLst/>
+          </a:prstGeom>
+          <a:noFill/>
+          <a:ln/>
+        </p:spPr>
+        <p:txBody>
+          <a:bodyPr wrap="square" lIns="0" tIns="0" rIns="0" bIns="0" rtlCol="0" anchor="t"/>
+          <a:lstStyle/>
+          <a:p>
+            <a:pPr algn="ctr" indent="0" marL="0">
+              <a:buNone/>
+            </a:pPr>
+            <a:r>
+              <a:rPr lang="en-US" sz="750" i="1" dirty="0">
+                <a:solidFill>
+                  <a:srgbClr val="94A3B8"/>
+                </a:solidFill>
+                <a:latin typeface="Calibri" pitchFamily="34" charset="0"/>
+                <a:ea typeface="Calibri" pitchFamily="34" charset="-122"/>
+                <a:cs typeface="Calibri" pitchFamily="34" charset="-120"/>
+              </a:rPr>
+              <a:t>/sh/</a:t>
+            </a:r>
+            <a:endParaRPr lang="en-US" sz="750" dirty="0"/>
+          </a:p>
+        </p:txBody>
+      </p:sp>
+      <p:sp>
+        <p:nvSpPr>
+          <p:cNvPr id="48" name="Shape 46"/>
+          <p:cNvSpPr/>
+          <p:nvPr/>
+        </p:nvSpPr>
+        <p:spPr>
+          <a:xfrm>
+            <a:off x="6668262" y="4169664"/>
             <a:ext cx="685800" cy="384048"/>
           </a:xfrm>
           <a:prstGeom prst="rect">
@@ -16460,13 +16157,13 @@
       </p:sp>
       <p:sp>
         <p:nvSpPr>
-          <p:cNvPr id="48" name="Text 46"/>
-          <p:cNvSpPr/>
-          <p:nvPr/>
-        </p:nvSpPr>
-        <p:spPr>
-          <a:xfrm>
-            <a:off x="6062472" y="4169664"/>
+          <p:cNvPr id="49" name="Text 47"/>
+          <p:cNvSpPr/>
+          <p:nvPr/>
+        </p:nvSpPr>
+        <p:spPr>
+          <a:xfrm>
+            <a:off x="6668262" y="4169664"/>
             <a:ext cx="685800" cy="384048"/>
           </a:xfrm>
           <a:prstGeom prst="rect">
@@ -16491,7 +16188,7 @@
                 <a:ea typeface="Trebuchet MS" pitchFamily="34" charset="-122"/>
                 <a:cs typeface="Trebuchet MS" pitchFamily="34" charset="-120"/>
               </a:rPr>
-              <a:t>t</a:t>
+              <a:t>io</a:t>
             </a:r>
             <a:endParaRPr lang="en-US" sz="900" dirty="0"/>
           </a:p>
@@ -16499,52 +16196,13 @@
       </p:sp>
       <p:sp>
         <p:nvSpPr>
-          <p:cNvPr id="49" name="Text 47"/>
-          <p:cNvSpPr/>
-          <p:nvPr/>
-        </p:nvSpPr>
-        <p:spPr>
-          <a:xfrm>
-            <a:off x="6062472" y="4572000"/>
-            <a:ext cx="685800" cy="219456"/>
-          </a:xfrm>
-          <a:prstGeom prst="rect">
-            <a:avLst/>
-          </a:prstGeom>
-          <a:noFill/>
-          <a:ln/>
-        </p:spPr>
-        <p:txBody>
-          <a:bodyPr wrap="square" lIns="0" tIns="0" rIns="0" bIns="0" rtlCol="0" anchor="t"/>
-          <a:lstStyle/>
-          <a:p>
-            <a:pPr algn="ctr" indent="0" marL="0">
-              <a:buNone/>
-            </a:pPr>
-            <a:r>
-              <a:rPr lang="en-US" sz="750" i="1" dirty="0">
-                <a:solidFill>
-                  <a:srgbClr val="94A3B8"/>
-                </a:solidFill>
-                <a:latin typeface="Calibri" pitchFamily="34" charset="0"/>
-                <a:ea typeface="Calibri" pitchFamily="34" charset="-122"/>
-                <a:cs typeface="Calibri" pitchFamily="34" charset="-120"/>
-              </a:rPr>
-              <a:t>/sh/</a:t>
-            </a:r>
-            <a:endParaRPr lang="en-US" sz="750" dirty="0"/>
-          </a:p>
-        </p:txBody>
-      </p:sp>
-      <p:sp>
-        <p:nvSpPr>
           <p:cNvPr id="50" name="Shape 48"/>
           <p:cNvSpPr/>
           <p:nvPr/>
         </p:nvSpPr>
         <p:spPr>
           <a:xfrm>
-            <a:off x="6870192" y="4169664"/>
+            <a:off x="7576947" y="4169664"/>
             <a:ext cx="685800" cy="384048"/>
           </a:xfrm>
           <a:prstGeom prst="rect">
@@ -16571,73 +16229,7 @@
         </p:nvSpPr>
         <p:spPr>
           <a:xfrm>
-            <a:off x="6870192" y="4169664"/>
-            <a:ext cx="685800" cy="384048"/>
-          </a:xfrm>
-          <a:prstGeom prst="rect">
-            <a:avLst/>
-          </a:prstGeom>
-          <a:noFill/>
-          <a:ln/>
-        </p:spPr>
-        <p:txBody>
-          <a:bodyPr wrap="square" lIns="0" tIns="0" rIns="0" bIns="0" rtlCol="0" anchor="ctr"/>
-          <a:lstStyle/>
-          <a:p>
-            <a:pPr algn="ctr" indent="0" marL="0">
-              <a:buNone/>
-            </a:pPr>
-            <a:r>
-              <a:rPr lang="en-US" sz="900" b="1" dirty="0">
-                <a:solidFill>
-                  <a:srgbClr val="9D174D"/>
-                </a:solidFill>
-                <a:latin typeface="Trebuchet MS" pitchFamily="34" charset="0"/>
-                <a:ea typeface="Trebuchet MS" pitchFamily="34" charset="-122"/>
-                <a:cs typeface="Trebuchet MS" pitchFamily="34" charset="-120"/>
-              </a:rPr>
-              <a:t>io</a:t>
-            </a:r>
-            <a:endParaRPr lang="en-US" sz="900" dirty="0"/>
-          </a:p>
-        </p:txBody>
-      </p:sp>
-      <p:sp>
-        <p:nvSpPr>
-          <p:cNvPr id="52" name="Shape 50"/>
-          <p:cNvSpPr/>
-          <p:nvPr/>
-        </p:nvSpPr>
-        <p:spPr>
-          <a:xfrm>
-            <a:off x="7677912" y="4169664"/>
-            <a:ext cx="685800" cy="384048"/>
-          </a:xfrm>
-          <a:prstGeom prst="rect">
-            <a:avLst>
-              <a:gd name="adj" fmla="val 9524"/>
-            </a:avLst>
-          </a:prstGeom>
-          <a:solidFill>
-            <a:srgbClr val="FFFFFF"/>
-          </a:solidFill>
-          <a:ln w="12700">
-            <a:solidFill>
-              <a:srgbClr val="DB2777"/>
-            </a:solidFill>
-            <a:prstDash val="solid"/>
-          </a:ln>
-        </p:spPr>
-      </p:sp>
-      <p:sp>
-        <p:nvSpPr>
-          <p:cNvPr id="53" name="Text 51"/>
-          <p:cNvSpPr/>
-          <p:nvPr/>
-        </p:nvSpPr>
-        <p:spPr>
-          <a:xfrm>
-            <a:off x="7677912" y="4169664"/>
+            <a:off x="7576947" y="4169664"/>
             <a:ext cx="685800" cy="384048"/>
           </a:xfrm>
           <a:prstGeom prst="rect">
@@ -17988,7 +17580,7 @@
                 <a:ea typeface="Calibri" pitchFamily="34" charset="-122"/>
                 <a:cs typeface="Calibri" pitchFamily="34" charset="-120"/>
               </a:rPr>
-              <a:t>When </a:t>
+              <a:t>A </a:t>
             </a:r>
             <a:pPr algn="l" indent="0" marL="0">
               <a:buNone/>
@@ -18005,7 +17597,7 @@
                 <a:ea typeface="Calibri" pitchFamily="34" charset="-122"/>
                 <a:cs typeface="Calibri" pitchFamily="34" charset="-120"/>
               </a:rPr>
-              <a:t>immigrants</a:t>
+              <a:t>migratory</a:t>
             </a:r>
             <a:pPr algn="l" indent="0" marL="0">
               <a:buNone/>
@@ -18019,7 +17611,7 @@
                 <a:ea typeface="Calibri" pitchFamily="34" charset="-122"/>
                 <a:cs typeface="Calibri" pitchFamily="34" charset="-120"/>
               </a:rPr>
-              <a:t> arrive, they often share stories of why they chose to </a:t>
+              <a:t> bird will </a:t>
             </a:r>
             <a:pPr algn="l" indent="0" marL="0">
               <a:buNone/>
@@ -18050,7 +17642,7 @@
                 <a:ea typeface="Calibri" pitchFamily="34" charset="-122"/>
                 <a:cs typeface="Calibri" pitchFamily="34" charset="-120"/>
               </a:rPr>
-              <a:t>, and their </a:t>
+              <a:t> from its cold home each year, and this </a:t>
             </a:r>
             <a:pPr algn="l" indent="0" marL="0">
               <a:buNone/>
@@ -18067,7 +17659,7 @@
                 <a:ea typeface="Calibri" pitchFamily="34" charset="-122"/>
                 <a:cs typeface="Calibri" pitchFamily="34" charset="-120"/>
               </a:rPr>
-              <a:t>migration</a:t>
+              <a:t>transmigration</a:t>
             </a:r>
             <a:pPr algn="l" indent="0" marL="0">
               <a:buNone/>
@@ -18081,7 +17673,7 @@
                 <a:ea typeface="Calibri" pitchFamily="34" charset="-122"/>
                 <a:cs typeface="Calibri" pitchFamily="34" charset="-120"/>
               </a:rPr>
-              <a:t> journey can be incredibly long.</a:t>
+              <a:t> can cover enormous distances!</a:t>
             </a:r>
             <a:endParaRPr lang="en-US" sz="1800" dirty="0"/>
           </a:p>
@@ -18236,7 +17828,7 @@
                 <a:ea typeface="Trebuchet MS" pitchFamily="34" charset="-122"/>
                 <a:cs typeface="Trebuchet MS" pitchFamily="34" charset="-120"/>
               </a:rPr>
-              <a:t>immigrants</a:t>
+              <a:t>migratory</a:t>
             </a:r>
             <a:endParaRPr lang="en-US" sz="1400" dirty="0"/>
           </a:p>
@@ -18492,7 +18084,7 @@
                 <a:ea typeface="Trebuchet MS" pitchFamily="34" charset="-122"/>
                 <a:cs typeface="Trebuchet MS" pitchFamily="34" charset="-120"/>
               </a:rPr>
-              <a:t>migration</a:t>
+              <a:t>transmigration</a:t>
             </a:r>
             <a:endParaRPr lang="en-US" sz="1400" dirty="0"/>
           </a:p>
@@ -18962,7 +18554,7 @@
                 <a:ea typeface="Trebuchet MS" pitchFamily="34" charset="-122"/>
                 <a:cs typeface="Trebuchet MS" pitchFamily="34" charset="-120"/>
               </a:rPr>
-              <a:t>immigrants</a:t>
+              <a:t>migratory</a:t>
             </a:r>
             <a:endParaRPr lang="en-US" sz="2800" dirty="0"/>
           </a:p>
@@ -19789,7 +19381,7 @@
                 <a:ea typeface="Trebuchet MS" pitchFamily="34" charset="-122"/>
                 <a:cs typeface="Trebuchet MS" pitchFamily="34" charset="-120"/>
               </a:rPr>
-              <a:t>immigrants</a:t>
+              <a:t>migratory</a:t>
             </a:r>
             <a:endParaRPr lang="en-US" sz="2800" dirty="0"/>
           </a:p>
@@ -19869,8 +19461,8 @@
         </p:nvSpPr>
         <p:spPr>
           <a:xfrm>
-            <a:off x="1989734" y="2258568"/>
-            <a:ext cx="1581912" cy="292608"/>
+            <a:off x="2938272" y="2258568"/>
+            <a:ext cx="1828800" cy="292608"/>
           </a:xfrm>
           <a:prstGeom prst="rect">
             <a:avLst>
@@ -19878,11 +19470,11 @@
             </a:avLst>
           </a:prstGeom>
           <a:solidFill>
-            <a:srgbClr val="DDD6FE"/>
+            <a:srgbClr val="CCFBF1"/>
           </a:solidFill>
           <a:ln w="19050">
             <a:solidFill>
-              <a:srgbClr val="7C3AED"/>
+              <a:srgbClr val="0D9488"/>
             </a:solidFill>
             <a:prstDash val="solid"/>
           </a:ln>
@@ -19903,8 +19495,8 @@
         </p:nvSpPr>
         <p:spPr>
           <a:xfrm>
-            <a:off x="1989734" y="2258568"/>
-            <a:ext cx="1581912" cy="292608"/>
+            <a:off x="2938272" y="2258568"/>
+            <a:ext cx="1828800" cy="292608"/>
           </a:xfrm>
           <a:prstGeom prst="rect">
             <a:avLst/>
@@ -19922,13 +19514,13 @@
             <a:r>
               <a:rPr lang="en-US" sz="1300" b="1" dirty="0">
                 <a:solidFill>
-                  <a:srgbClr val="4C1D95"/>
+                  <a:srgbClr val="0F766E"/>
                 </a:solidFill>
                 <a:latin typeface="Trebuchet MS" pitchFamily="34" charset="0"/>
                 <a:ea typeface="Trebuchet MS" pitchFamily="34" charset="-122"/>
                 <a:cs typeface="Trebuchet MS" pitchFamily="34" charset="-120"/>
               </a:rPr>
-              <a:t>im</a:t>
+              <a:t>migrate</a:t>
             </a:r>
             <a:endParaRPr lang="en-US" sz="1300" dirty="0"/>
           </a:p>
@@ -19942,8 +19534,8 @@
         </p:nvSpPr>
         <p:spPr>
           <a:xfrm>
-            <a:off x="1989734" y="2569464"/>
-            <a:ext cx="1581912" cy="201168"/>
+            <a:off x="2938272" y="2569464"/>
+            <a:ext cx="1828800" cy="201168"/>
           </a:xfrm>
           <a:prstGeom prst="rect">
             <a:avLst/>
@@ -19967,7 +19559,7 @@
                 <a:ea typeface="Calibri" pitchFamily="34" charset="-122"/>
                 <a:cs typeface="Calibri" pitchFamily="34" charset="-120"/>
               </a:rPr>
-              <a:t>into</a:t>
+              <a:t>move from one place</a:t>
             </a:r>
             <a:endParaRPr lang="en-US" sz="850" dirty="0"/>
           </a:p>
@@ -19981,8 +19573,8 @@
         </p:nvSpPr>
         <p:spPr>
           <a:xfrm>
-            <a:off x="1989734" y="2752344"/>
-            <a:ext cx="1581912" cy="182880"/>
+            <a:off x="2938272" y="2752344"/>
+            <a:ext cx="1828800" cy="182880"/>
           </a:xfrm>
           <a:prstGeom prst="rect">
             <a:avLst/>
@@ -20006,7 +19598,7 @@
                 <a:ea typeface="Calibri" pitchFamily="34" charset="-122"/>
                 <a:cs typeface="Calibri" pitchFamily="34" charset="-120"/>
               </a:rPr>
-              <a:t>in → im before 'm'</a:t>
+              <a:t>'e' dropped before vowel suffix</a:t>
             </a:r>
             <a:endParaRPr lang="en-US" sz="700" dirty="0"/>
           </a:p>
@@ -20020,8 +19612,8 @@
         </p:nvSpPr>
         <p:spPr>
           <a:xfrm>
-            <a:off x="3659429" y="2258568"/>
-            <a:ext cx="1581912" cy="292608"/>
+            <a:off x="5803392" y="2258568"/>
+            <a:ext cx="1828800" cy="292608"/>
           </a:xfrm>
           <a:prstGeom prst="rect">
             <a:avLst>
@@ -20029,11 +19621,11 @@
             </a:avLst>
           </a:prstGeom>
           <a:solidFill>
-            <a:srgbClr val="CCFBF1"/>
+            <a:srgbClr val="FCE7F3"/>
           </a:solidFill>
           <a:ln w="19050">
             <a:solidFill>
-              <a:srgbClr val="0D9488"/>
+              <a:srgbClr val="DB2777"/>
             </a:solidFill>
             <a:prstDash val="solid"/>
           </a:ln>
@@ -20054,8 +19646,8 @@
         </p:nvSpPr>
         <p:spPr>
           <a:xfrm>
-            <a:off x="3659429" y="2258568"/>
-            <a:ext cx="1581912" cy="292608"/>
+            <a:off x="5803392" y="2258568"/>
+            <a:ext cx="1828800" cy="292608"/>
           </a:xfrm>
           <a:prstGeom prst="rect">
             <a:avLst/>
@@ -20073,13 +19665,13 @@
             <a:r>
               <a:rPr lang="en-US" sz="1300" b="1" dirty="0">
                 <a:solidFill>
-                  <a:srgbClr val="0F766E"/>
+                  <a:srgbClr val="9D174D"/>
                 </a:solidFill>
                 <a:latin typeface="Trebuchet MS" pitchFamily="34" charset="0"/>
                 <a:ea typeface="Trebuchet MS" pitchFamily="34" charset="-122"/>
                 <a:cs typeface="Trebuchet MS" pitchFamily="34" charset="-120"/>
               </a:rPr>
-              <a:t>migrate</a:t>
+              <a:t>ory</a:t>
             </a:r>
             <a:endParaRPr lang="en-US" sz="1300" dirty="0"/>
           </a:p>
@@ -20093,8 +19685,8 @@
         </p:nvSpPr>
         <p:spPr>
           <a:xfrm>
-            <a:off x="3659429" y="2569464"/>
-            <a:ext cx="1581912" cy="201168"/>
+            <a:off x="5803392" y="2569464"/>
+            <a:ext cx="1828800" cy="201168"/>
           </a:xfrm>
           <a:prstGeom prst="rect">
             <a:avLst/>
@@ -20118,7 +19710,7 @@
                 <a:ea typeface="Calibri" pitchFamily="34" charset="-122"/>
                 <a:cs typeface="Calibri" pitchFamily="34" charset="-120"/>
               </a:rPr>
-              <a:t>to move from one place</a:t>
+              <a:t>relating to or having the quality of</a:t>
             </a:r>
             <a:endParaRPr lang="en-US" sz="850" dirty="0"/>
           </a:p>
@@ -20126,328 +19718,197 @@
       </p:sp>
       <p:sp>
         <p:nvSpPr>
-          <p:cNvPr id="23" name="Text 21"/>
-          <p:cNvSpPr/>
-          <p:nvPr/>
-        </p:nvSpPr>
-        <p:spPr>
-          <a:xfrm>
-            <a:off x="3659429" y="2752344"/>
-            <a:ext cx="1581912" cy="182880"/>
-          </a:xfrm>
-          <a:prstGeom prst="rect">
-            <a:avLst/>
-          </a:prstGeom>
-          <a:noFill/>
-          <a:ln/>
-        </p:spPr>
-        <p:txBody>
-          <a:bodyPr wrap="square" lIns="0" tIns="0" rIns="0" bIns="0" rtlCol="0" anchor="t"/>
-          <a:lstStyle/>
-          <a:p>
-            <a:pPr algn="ctr" indent="0" marL="0">
-              <a:buNone/>
-            </a:pPr>
-            <a:r>
-              <a:rPr lang="en-US" sz="700" i="1" dirty="0">
-                <a:solidFill>
-                  <a:srgbClr val="94A3B8"/>
+          <p:cNvPr id="23" name="Shape 21"/>
+          <p:cNvSpPr/>
+          <p:nvPr/>
+        </p:nvSpPr>
+        <p:spPr>
+          <a:xfrm>
+            <a:off x="365760" y="3273552"/>
+            <a:ext cx="1371600" cy="658368"/>
+          </a:xfrm>
+          <a:prstGeom prst="rect">
+            <a:avLst>
+              <a:gd name="adj" fmla="val 8333"/>
+            </a:avLst>
+          </a:prstGeom>
+          <a:solidFill>
+            <a:srgbClr val="E2E8F0"/>
+          </a:solidFill>
+          <a:ln w="12700">
+            <a:solidFill>
+              <a:srgbClr val="E2E8F0"/>
+            </a:solidFill>
+            <a:prstDash val="solid"/>
+          </a:ln>
+        </p:spPr>
+      </p:sp>
+      <p:sp>
+        <p:nvSpPr>
+          <p:cNvPr id="24" name="Text 22"/>
+          <p:cNvSpPr/>
+          <p:nvPr/>
+        </p:nvSpPr>
+        <p:spPr>
+          <a:xfrm>
+            <a:off x="365760" y="3273552"/>
+            <a:ext cx="1371600" cy="658368"/>
+          </a:xfrm>
+          <a:prstGeom prst="rect">
+            <a:avLst/>
+          </a:prstGeom>
+          <a:noFill/>
+          <a:ln/>
+        </p:spPr>
+        <p:txBody>
+          <a:bodyPr wrap="square" lIns="0" tIns="0" rIns="0" bIns="0" rtlCol="0" anchor="ctr"/>
+          <a:lstStyle/>
+          <a:p>
+            <a:pPr algn="ctr" indent="0" marL="0">
+              <a:buNone/>
+            </a:pPr>
+            <a:r>
+              <a:rPr lang="en-US" sz="1100" b="1" dirty="0">
+                <a:solidFill>
+                  <a:srgbClr val="475569"/>
+                </a:solidFill>
+                <a:latin typeface="Trebuchet MS" pitchFamily="34" charset="0"/>
+                <a:ea typeface="Trebuchet MS" pitchFamily="34" charset="-122"/>
+                <a:cs typeface="Trebuchet MS" pitchFamily="34" charset="-120"/>
+              </a:rPr>
+              <a:t>Syllables</a:t>
+            </a:r>
+            <a:endParaRPr lang="en-US" sz="1100" dirty="0"/>
+          </a:p>
+        </p:txBody>
+      </p:sp>
+      <p:sp>
+        <p:nvSpPr>
+          <p:cNvPr id="25" name="Shape 23"/>
+          <p:cNvSpPr/>
+          <p:nvPr/>
+        </p:nvSpPr>
+        <p:spPr>
+          <a:xfrm>
+            <a:off x="1874520" y="3273552"/>
+            <a:ext cx="6903720" cy="658368"/>
+          </a:xfrm>
+          <a:prstGeom prst="rect">
+            <a:avLst>
+              <a:gd name="adj" fmla="val 8333"/>
+            </a:avLst>
+          </a:prstGeom>
+          <a:solidFill>
+            <a:srgbClr val="F8FAFC"/>
+          </a:solidFill>
+          <a:ln w="12700">
+            <a:solidFill>
+              <a:srgbClr val="E2E8F0"/>
+            </a:solidFill>
+            <a:prstDash val="dash"/>
+          </a:ln>
+        </p:spPr>
+      </p:sp>
+      <p:sp>
+        <p:nvSpPr>
+          <p:cNvPr id="26" name="Text 24"/>
+          <p:cNvSpPr/>
+          <p:nvPr/>
+        </p:nvSpPr>
+        <p:spPr>
+          <a:xfrm>
+            <a:off x="1874520" y="3273552"/>
+            <a:ext cx="6903720" cy="658368"/>
+          </a:xfrm>
+          <a:prstGeom prst="rect">
+            <a:avLst/>
+          </a:prstGeom>
+          <a:noFill/>
+          <a:ln/>
+        </p:spPr>
+        <p:txBody>
+          <a:bodyPr wrap="square" rtlCol="0" anchor="ctr"/>
+          <a:lstStyle/>
+          <a:p>
+            <a:pPr algn="ctr" indent="0" marL="0">
+              <a:buNone/>
+            </a:pPr>
+            <a:r>
+              <a:rPr lang="en-US" sz="1100" i="1" dirty="0">
+                <a:solidFill>
+                  <a:srgbClr val="CBD5E1"/>
                 </a:solidFill>
                 <a:latin typeface="Calibri" pitchFamily="34" charset="0"/>
                 <a:ea typeface="Calibri" pitchFamily="34" charset="-122"/>
                 <a:cs typeface="Calibri" pitchFamily="34" charset="-120"/>
               </a:rPr>
-              <a:t>'e' dropped before vowel suffix</a:t>
-            </a:r>
-            <a:endParaRPr lang="en-US" sz="700" dirty="0"/>
-          </a:p>
-        </p:txBody>
-      </p:sp>
-      <p:sp>
-        <p:nvSpPr>
-          <p:cNvPr id="24" name="Shape 22"/>
-          <p:cNvSpPr/>
-          <p:nvPr/>
-        </p:nvSpPr>
-        <p:spPr>
-          <a:xfrm>
-            <a:off x="5329123" y="2258568"/>
-            <a:ext cx="1581912" cy="292608"/>
+              <a:t>Write here...</a:t>
+            </a:r>
+            <a:endParaRPr lang="en-US" sz="1100" dirty="0"/>
+          </a:p>
+        </p:txBody>
+      </p:sp>
+      <p:sp>
+        <p:nvSpPr>
+          <p:cNvPr id="27" name="Shape 25"/>
+          <p:cNvSpPr/>
+          <p:nvPr/>
+        </p:nvSpPr>
+        <p:spPr>
+          <a:xfrm>
+            <a:off x="365760" y="4096512"/>
+            <a:ext cx="1371600" cy="804672"/>
           </a:xfrm>
           <a:prstGeom prst="rect">
             <a:avLst>
-              <a:gd name="adj" fmla="val 25000"/>
+              <a:gd name="adj" fmla="val 6818"/>
             </a:avLst>
           </a:prstGeom>
           <a:solidFill>
-            <a:srgbClr val="FCE7F3"/>
-          </a:solidFill>
-          <a:ln w="19050">
-            <a:solidFill>
-              <a:srgbClr val="DB2777"/>
-            </a:solidFill>
-            <a:prstDash val="solid"/>
-          </a:ln>
-          <a:effectLst>
-            <a:outerShdw sx="100000" sy="100000" kx="0" ky="0" algn="bl" rotWithShape="0" blurRad="101600" dist="38100" dir="8100000">
-              <a:srgbClr val="000000">
-                <a:alpha val="12000"/>
-              </a:srgbClr>
-            </a:outerShdw>
-          </a:effectLst>
-        </p:spPr>
-      </p:sp>
-      <p:sp>
-        <p:nvSpPr>
-          <p:cNvPr id="25" name="Text 23"/>
-          <p:cNvSpPr/>
-          <p:nvPr/>
-        </p:nvSpPr>
-        <p:spPr>
-          <a:xfrm>
-            <a:off x="5329123" y="2258568"/>
-            <a:ext cx="1581912" cy="292608"/>
-          </a:xfrm>
-          <a:prstGeom prst="rect">
-            <a:avLst/>
-          </a:prstGeom>
-          <a:noFill/>
-          <a:ln/>
-        </p:spPr>
-        <p:txBody>
-          <a:bodyPr wrap="square" lIns="0" tIns="0" rIns="0" bIns="0" rtlCol="0" anchor="ctr"/>
-          <a:lstStyle/>
-          <a:p>
-            <a:pPr algn="ctr" indent="0" marL="0">
-              <a:buNone/>
-            </a:pPr>
-            <a:r>
-              <a:rPr lang="en-US" sz="1300" b="1" dirty="0">
-                <a:solidFill>
-                  <a:srgbClr val="9D174D"/>
+            <a:srgbClr val="E2E8F0"/>
+          </a:solidFill>
+          <a:ln w="12700">
+            <a:solidFill>
+              <a:srgbClr val="E2E8F0"/>
+            </a:solidFill>
+            <a:prstDash val="solid"/>
+          </a:ln>
+        </p:spPr>
+      </p:sp>
+      <p:sp>
+        <p:nvSpPr>
+          <p:cNvPr id="28" name="Text 26"/>
+          <p:cNvSpPr/>
+          <p:nvPr/>
+        </p:nvSpPr>
+        <p:spPr>
+          <a:xfrm>
+            <a:off x="365760" y="4096512"/>
+            <a:ext cx="1371600" cy="804672"/>
+          </a:xfrm>
+          <a:prstGeom prst="rect">
+            <a:avLst/>
+          </a:prstGeom>
+          <a:noFill/>
+          <a:ln/>
+        </p:spPr>
+        <p:txBody>
+          <a:bodyPr wrap="square" lIns="0" tIns="0" rIns="0" bIns="0" rtlCol="0" anchor="ctr"/>
+          <a:lstStyle/>
+          <a:p>
+            <a:pPr algn="ctr" indent="0" marL="0">
+              <a:buNone/>
+            </a:pPr>
+            <a:r>
+              <a:rPr lang="en-US" sz="1100" b="1" dirty="0">
+                <a:solidFill>
+                  <a:srgbClr val="475569"/>
                 </a:solidFill>
                 <a:latin typeface="Trebuchet MS" pitchFamily="34" charset="0"/>
                 <a:ea typeface="Trebuchet MS" pitchFamily="34" charset="-122"/>
                 <a:cs typeface="Trebuchet MS" pitchFamily="34" charset="-120"/>
               </a:rPr>
-              <a:t>ant</a:t>
-            </a:r>
-            <a:endParaRPr lang="en-US" sz="1300" dirty="0"/>
-          </a:p>
-        </p:txBody>
-      </p:sp>
-      <p:sp>
-        <p:nvSpPr>
-          <p:cNvPr id="26" name="Text 24"/>
-          <p:cNvSpPr/>
-          <p:nvPr/>
-        </p:nvSpPr>
-        <p:spPr>
-          <a:xfrm>
-            <a:off x="5329123" y="2569464"/>
-            <a:ext cx="1581912" cy="201168"/>
-          </a:xfrm>
-          <a:prstGeom prst="rect">
-            <a:avLst/>
-          </a:prstGeom>
-          <a:noFill/>
-          <a:ln/>
-        </p:spPr>
-        <p:txBody>
-          <a:bodyPr wrap="square" lIns="0" tIns="0" rIns="0" bIns="0" rtlCol="0" anchor="t"/>
-          <a:lstStyle/>
-          <a:p>
-            <a:pPr algn="ctr" indent="0" marL="0">
-              <a:buNone/>
-            </a:pPr>
-            <a:r>
-              <a:rPr lang="en-US" sz="850" dirty="0">
-                <a:solidFill>
-                  <a:srgbClr val="475569"/>
-                </a:solidFill>
-                <a:latin typeface="Calibri" pitchFamily="34" charset="0"/>
-                <a:ea typeface="Calibri" pitchFamily="34" charset="-122"/>
-                <a:cs typeface="Calibri" pitchFamily="34" charset="-120"/>
-              </a:rPr>
-              <a:t>a person who does something</a:t>
-            </a:r>
-            <a:endParaRPr lang="en-US" sz="850" dirty="0"/>
-          </a:p>
-        </p:txBody>
-      </p:sp>
-      <p:sp>
-        <p:nvSpPr>
-          <p:cNvPr id="27" name="Shape 25"/>
-          <p:cNvSpPr/>
-          <p:nvPr/>
-        </p:nvSpPr>
-        <p:spPr>
-          <a:xfrm>
-            <a:off x="6998818" y="2258568"/>
-            <a:ext cx="1581912" cy="292608"/>
-          </a:xfrm>
-          <a:prstGeom prst="rect">
-            <a:avLst>
-              <a:gd name="adj" fmla="val 25000"/>
-            </a:avLst>
-          </a:prstGeom>
-          <a:solidFill>
-            <a:srgbClr val="FCE7F3"/>
-          </a:solidFill>
-          <a:ln w="19050">
-            <a:solidFill>
-              <a:srgbClr val="DB2777"/>
-            </a:solidFill>
-            <a:prstDash val="solid"/>
-          </a:ln>
-          <a:effectLst>
-            <a:outerShdw sx="100000" sy="100000" kx="0" ky="0" algn="bl" rotWithShape="0" blurRad="101600" dist="38100" dir="8100000">
-              <a:srgbClr val="000000">
-                <a:alpha val="12000"/>
-              </a:srgbClr>
-            </a:outerShdw>
-          </a:effectLst>
-        </p:spPr>
-      </p:sp>
-      <p:sp>
-        <p:nvSpPr>
-          <p:cNvPr id="28" name="Text 26"/>
-          <p:cNvSpPr/>
-          <p:nvPr/>
-        </p:nvSpPr>
-        <p:spPr>
-          <a:xfrm>
-            <a:off x="6998818" y="2258568"/>
-            <a:ext cx="1581912" cy="292608"/>
-          </a:xfrm>
-          <a:prstGeom prst="rect">
-            <a:avLst/>
-          </a:prstGeom>
-          <a:noFill/>
-          <a:ln/>
-        </p:spPr>
-        <p:txBody>
-          <a:bodyPr wrap="square" lIns="0" tIns="0" rIns="0" bIns="0" rtlCol="0" anchor="ctr"/>
-          <a:lstStyle/>
-          <a:p>
-            <a:pPr algn="ctr" indent="0" marL="0">
-              <a:buNone/>
-            </a:pPr>
-            <a:r>
-              <a:rPr lang="en-US" sz="1300" b="1" dirty="0">
-                <a:solidFill>
-                  <a:srgbClr val="9D174D"/>
-                </a:solidFill>
-                <a:latin typeface="Trebuchet MS" pitchFamily="34" charset="0"/>
-                <a:ea typeface="Trebuchet MS" pitchFamily="34" charset="-122"/>
-                <a:cs typeface="Trebuchet MS" pitchFamily="34" charset="-120"/>
-              </a:rPr>
-              <a:t>s</a:t>
-            </a:r>
-            <a:endParaRPr lang="en-US" sz="1300" dirty="0"/>
-          </a:p>
-        </p:txBody>
-      </p:sp>
-      <p:sp>
-        <p:nvSpPr>
-          <p:cNvPr id="29" name="Text 27"/>
-          <p:cNvSpPr/>
-          <p:nvPr/>
-        </p:nvSpPr>
-        <p:spPr>
-          <a:xfrm>
-            <a:off x="6998818" y="2569464"/>
-            <a:ext cx="1581912" cy="201168"/>
-          </a:xfrm>
-          <a:prstGeom prst="rect">
-            <a:avLst/>
-          </a:prstGeom>
-          <a:noFill/>
-          <a:ln/>
-        </p:spPr>
-        <p:txBody>
-          <a:bodyPr wrap="square" lIns="0" tIns="0" rIns="0" bIns="0" rtlCol="0" anchor="t"/>
-          <a:lstStyle/>
-          <a:p>
-            <a:pPr algn="ctr" indent="0" marL="0">
-              <a:buNone/>
-            </a:pPr>
-            <a:r>
-              <a:rPr lang="en-US" sz="850" dirty="0">
-                <a:solidFill>
-                  <a:srgbClr val="475569"/>
-                </a:solidFill>
-                <a:latin typeface="Calibri" pitchFamily="34" charset="0"/>
-                <a:ea typeface="Calibri" pitchFamily="34" charset="-122"/>
-                <a:cs typeface="Calibri" pitchFamily="34" charset="-120"/>
-              </a:rPr>
-              <a:t>more than one</a:t>
-            </a:r>
-            <a:endParaRPr lang="en-US" sz="850" dirty="0"/>
-          </a:p>
-        </p:txBody>
-      </p:sp>
-      <p:sp>
-        <p:nvSpPr>
-          <p:cNvPr id="30" name="Shape 28"/>
-          <p:cNvSpPr/>
-          <p:nvPr/>
-        </p:nvSpPr>
-        <p:spPr>
-          <a:xfrm>
-            <a:off x="365760" y="3273552"/>
-            <a:ext cx="1371600" cy="658368"/>
-          </a:xfrm>
-          <a:prstGeom prst="rect">
-            <a:avLst>
-              <a:gd name="adj" fmla="val 8333"/>
-            </a:avLst>
-          </a:prstGeom>
-          <a:solidFill>
-            <a:srgbClr val="E2E8F0"/>
-          </a:solidFill>
-          <a:ln w="12700">
-            <a:solidFill>
-              <a:srgbClr val="E2E8F0"/>
-            </a:solidFill>
-            <a:prstDash val="solid"/>
-          </a:ln>
-        </p:spPr>
-      </p:sp>
-      <p:sp>
-        <p:nvSpPr>
-          <p:cNvPr id="31" name="Text 29"/>
-          <p:cNvSpPr/>
-          <p:nvPr/>
-        </p:nvSpPr>
-        <p:spPr>
-          <a:xfrm>
-            <a:off x="365760" y="3273552"/>
-            <a:ext cx="1371600" cy="658368"/>
-          </a:xfrm>
-          <a:prstGeom prst="rect">
-            <a:avLst/>
-          </a:prstGeom>
-          <a:noFill/>
-          <a:ln/>
-        </p:spPr>
-        <p:txBody>
-          <a:bodyPr wrap="square" lIns="0" tIns="0" rIns="0" bIns="0" rtlCol="0" anchor="ctr"/>
-          <a:lstStyle/>
-          <a:p>
-            <a:pPr algn="ctr" indent="0" marL="0">
-              <a:buNone/>
-            </a:pPr>
-            <a:r>
-              <a:rPr lang="en-US" sz="1100" b="1" dirty="0">
-                <a:solidFill>
-                  <a:srgbClr val="475569"/>
-                </a:solidFill>
-                <a:latin typeface="Trebuchet MS" pitchFamily="34" charset="0"/>
-                <a:ea typeface="Trebuchet MS" pitchFamily="34" charset="-122"/>
-                <a:cs typeface="Trebuchet MS" pitchFamily="34" charset="-120"/>
-              </a:rPr>
-              <a:t>Syllables</a:t>
+              <a:t>Phonemes</a:t>
             </a:r>
             <a:endParaRPr lang="en-US" sz="1100" dirty="0"/>
           </a:p>
@@ -20455,80 +19916,14 @@
       </p:sp>
       <p:sp>
         <p:nvSpPr>
-          <p:cNvPr id="32" name="Shape 30"/>
-          <p:cNvSpPr/>
-          <p:nvPr/>
-        </p:nvSpPr>
-        <p:spPr>
-          <a:xfrm>
-            <a:off x="1874520" y="3273552"/>
-            <a:ext cx="6903720" cy="658368"/>
-          </a:xfrm>
-          <a:prstGeom prst="rect">
-            <a:avLst>
-              <a:gd name="adj" fmla="val 8333"/>
-            </a:avLst>
-          </a:prstGeom>
-          <a:solidFill>
-            <a:srgbClr val="F8FAFC"/>
-          </a:solidFill>
-          <a:ln w="12700">
-            <a:solidFill>
-              <a:srgbClr val="E2E8F0"/>
-            </a:solidFill>
-            <a:prstDash val="dash"/>
-          </a:ln>
-        </p:spPr>
-      </p:sp>
-      <p:sp>
-        <p:nvSpPr>
-          <p:cNvPr id="33" name="Text 31"/>
-          <p:cNvSpPr/>
-          <p:nvPr/>
-        </p:nvSpPr>
-        <p:spPr>
-          <a:xfrm>
-            <a:off x="1874520" y="3273552"/>
-            <a:ext cx="6903720" cy="658368"/>
-          </a:xfrm>
-          <a:prstGeom prst="rect">
-            <a:avLst/>
-          </a:prstGeom>
-          <a:noFill/>
-          <a:ln/>
-        </p:spPr>
-        <p:txBody>
-          <a:bodyPr wrap="square" rtlCol="0" anchor="ctr"/>
-          <a:lstStyle/>
-          <a:p>
-            <a:pPr algn="ctr" indent="0" marL="0">
-              <a:buNone/>
-            </a:pPr>
-            <a:r>
-              <a:rPr lang="en-US" sz="1100" i="1" dirty="0">
-                <a:solidFill>
-                  <a:srgbClr val="CBD5E1"/>
-                </a:solidFill>
-                <a:latin typeface="Calibri" pitchFamily="34" charset="0"/>
-                <a:ea typeface="Calibri" pitchFamily="34" charset="-122"/>
-                <a:cs typeface="Calibri" pitchFamily="34" charset="-120"/>
-              </a:rPr>
-              <a:t>Write here...</a:t>
-            </a:r>
-            <a:endParaRPr lang="en-US" sz="1100" dirty="0"/>
-          </a:p>
-        </p:txBody>
-      </p:sp>
-      <p:sp>
-        <p:nvSpPr>
-          <p:cNvPr id="34" name="Shape 32"/>
-          <p:cNvSpPr/>
-          <p:nvPr/>
-        </p:nvSpPr>
-        <p:spPr>
-          <a:xfrm>
-            <a:off x="365760" y="4096512"/>
-            <a:ext cx="1371600" cy="804672"/>
+          <p:cNvPr id="29" name="Shape 27"/>
+          <p:cNvSpPr/>
+          <p:nvPr/>
+        </p:nvSpPr>
+        <p:spPr>
+          <a:xfrm>
+            <a:off x="1874520" y="4096512"/>
+            <a:ext cx="6903720" cy="804672"/>
           </a:xfrm>
           <a:prstGeom prst="rect">
             <a:avLst>
@@ -20536,85 +19931,19 @@
             </a:avLst>
           </a:prstGeom>
           <a:solidFill>
-            <a:srgbClr val="E2E8F0"/>
+            <a:srgbClr val="F8FAFC"/>
           </a:solidFill>
           <a:ln w="12700">
             <a:solidFill>
               <a:srgbClr val="E2E8F0"/>
             </a:solidFill>
-            <a:prstDash val="solid"/>
-          </a:ln>
-        </p:spPr>
-      </p:sp>
-      <p:sp>
-        <p:nvSpPr>
-          <p:cNvPr id="35" name="Text 33"/>
-          <p:cNvSpPr/>
-          <p:nvPr/>
-        </p:nvSpPr>
-        <p:spPr>
-          <a:xfrm>
-            <a:off x="365760" y="4096512"/>
-            <a:ext cx="1371600" cy="804672"/>
-          </a:xfrm>
-          <a:prstGeom prst="rect">
-            <a:avLst/>
-          </a:prstGeom>
-          <a:noFill/>
-          <a:ln/>
-        </p:spPr>
-        <p:txBody>
-          <a:bodyPr wrap="square" lIns="0" tIns="0" rIns="0" bIns="0" rtlCol="0" anchor="ctr"/>
-          <a:lstStyle/>
-          <a:p>
-            <a:pPr algn="ctr" indent="0" marL="0">
-              <a:buNone/>
-            </a:pPr>
-            <a:r>
-              <a:rPr lang="en-US" sz="1100" b="1" dirty="0">
-                <a:solidFill>
-                  <a:srgbClr val="475569"/>
-                </a:solidFill>
-                <a:latin typeface="Trebuchet MS" pitchFamily="34" charset="0"/>
-                <a:ea typeface="Trebuchet MS" pitchFamily="34" charset="-122"/>
-                <a:cs typeface="Trebuchet MS" pitchFamily="34" charset="-120"/>
-              </a:rPr>
-              <a:t>Phonemes</a:t>
-            </a:r>
-            <a:endParaRPr lang="en-US" sz="1100" dirty="0"/>
-          </a:p>
-        </p:txBody>
-      </p:sp>
-      <p:sp>
-        <p:nvSpPr>
-          <p:cNvPr id="36" name="Shape 34"/>
-          <p:cNvSpPr/>
-          <p:nvPr/>
-        </p:nvSpPr>
-        <p:spPr>
-          <a:xfrm>
-            <a:off x="1874520" y="4096512"/>
-            <a:ext cx="6903720" cy="804672"/>
-          </a:xfrm>
-          <a:prstGeom prst="rect">
-            <a:avLst>
-              <a:gd name="adj" fmla="val 6818"/>
-            </a:avLst>
-          </a:prstGeom>
-          <a:solidFill>
-            <a:srgbClr val="F8FAFC"/>
-          </a:solidFill>
-          <a:ln w="12700">
-            <a:solidFill>
-              <a:srgbClr val="E2E8F0"/>
-            </a:solidFill>
             <a:prstDash val="dash"/>
           </a:ln>
         </p:spPr>
       </p:sp>
       <p:sp>
         <p:nvSpPr>
-          <p:cNvPr id="37" name="Text 35"/>
+          <p:cNvPr id="30" name="Text 28"/>
           <p:cNvSpPr/>
           <p:nvPr/>
         </p:nvSpPr>
@@ -21076,7 +20405,7 @@
                 <a:ea typeface="Trebuchet MS" pitchFamily="34" charset="-122"/>
                 <a:cs typeface="Trebuchet MS" pitchFamily="34" charset="-120"/>
               </a:rPr>
-              <a:t>immigrants</a:t>
+              <a:t>migratory</a:t>
             </a:r>
             <a:endParaRPr lang="en-US" sz="2800" dirty="0"/>
           </a:p>
@@ -21156,8 +20485,8 @@
         </p:nvSpPr>
         <p:spPr>
           <a:xfrm>
-            <a:off x="1989734" y="2258568"/>
-            <a:ext cx="1581912" cy="292608"/>
+            <a:off x="2938272" y="2258568"/>
+            <a:ext cx="1828800" cy="292608"/>
           </a:xfrm>
           <a:prstGeom prst="rect">
             <a:avLst>
@@ -21165,11 +20494,11 @@
             </a:avLst>
           </a:prstGeom>
           <a:solidFill>
-            <a:srgbClr val="DDD6FE"/>
+            <a:srgbClr val="CCFBF1"/>
           </a:solidFill>
           <a:ln w="19050">
             <a:solidFill>
-              <a:srgbClr val="7C3AED"/>
+              <a:srgbClr val="0D9488"/>
             </a:solidFill>
             <a:prstDash val="solid"/>
           </a:ln>
@@ -21190,8 +20519,8 @@
         </p:nvSpPr>
         <p:spPr>
           <a:xfrm>
-            <a:off x="1989734" y="2258568"/>
-            <a:ext cx="1581912" cy="292608"/>
+            <a:off x="2938272" y="2258568"/>
+            <a:ext cx="1828800" cy="292608"/>
           </a:xfrm>
           <a:prstGeom prst="rect">
             <a:avLst/>
@@ -21209,13 +20538,13 @@
             <a:r>
               <a:rPr lang="en-US" sz="1300" b="1" dirty="0">
                 <a:solidFill>
-                  <a:srgbClr val="4C1D95"/>
+                  <a:srgbClr val="0F766E"/>
                 </a:solidFill>
                 <a:latin typeface="Trebuchet MS" pitchFamily="34" charset="0"/>
                 <a:ea typeface="Trebuchet MS" pitchFamily="34" charset="-122"/>
                 <a:cs typeface="Trebuchet MS" pitchFamily="34" charset="-120"/>
               </a:rPr>
-              <a:t>im</a:t>
+              <a:t>migrate</a:t>
             </a:r>
             <a:endParaRPr lang="en-US" sz="1300" dirty="0"/>
           </a:p>
@@ -21229,8 +20558,8 @@
         </p:nvSpPr>
         <p:spPr>
           <a:xfrm>
-            <a:off x="1989734" y="2569464"/>
-            <a:ext cx="1581912" cy="201168"/>
+            <a:off x="2938272" y="2569464"/>
+            <a:ext cx="1828800" cy="201168"/>
           </a:xfrm>
           <a:prstGeom prst="rect">
             <a:avLst/>
@@ -21254,7 +20583,7 @@
                 <a:ea typeface="Calibri" pitchFamily="34" charset="-122"/>
                 <a:cs typeface="Calibri" pitchFamily="34" charset="-120"/>
               </a:rPr>
-              <a:t>into</a:t>
+              <a:t>move from one place</a:t>
             </a:r>
             <a:endParaRPr lang="en-US" sz="850" dirty="0"/>
           </a:p>
@@ -21268,8 +20597,8 @@
         </p:nvSpPr>
         <p:spPr>
           <a:xfrm>
-            <a:off x="1989734" y="2752344"/>
-            <a:ext cx="1581912" cy="182880"/>
+            <a:off x="2938272" y="2752344"/>
+            <a:ext cx="1828800" cy="182880"/>
           </a:xfrm>
           <a:prstGeom prst="rect">
             <a:avLst/>
@@ -21293,7 +20622,7 @@
                 <a:ea typeface="Calibri" pitchFamily="34" charset="-122"/>
                 <a:cs typeface="Calibri" pitchFamily="34" charset="-120"/>
               </a:rPr>
-              <a:t>in → im before 'm'</a:t>
+              <a:t>'e' dropped before vowel suffix</a:t>
             </a:r>
             <a:endParaRPr lang="en-US" sz="700" dirty="0"/>
           </a:p>
@@ -21307,8 +20636,8 @@
         </p:nvSpPr>
         <p:spPr>
           <a:xfrm>
-            <a:off x="3659429" y="2258568"/>
-            <a:ext cx="1581912" cy="292608"/>
+            <a:off x="5803392" y="2258568"/>
+            <a:ext cx="1828800" cy="292608"/>
           </a:xfrm>
           <a:prstGeom prst="rect">
             <a:avLst>
@@ -21316,11 +20645,11 @@
             </a:avLst>
           </a:prstGeom>
           <a:solidFill>
-            <a:srgbClr val="CCFBF1"/>
+            <a:srgbClr val="FCE7F3"/>
           </a:solidFill>
           <a:ln w="19050">
             <a:solidFill>
-              <a:srgbClr val="0D9488"/>
+              <a:srgbClr val="DB2777"/>
             </a:solidFill>
             <a:prstDash val="solid"/>
           </a:ln>
@@ -21341,8 +20670,8 @@
         </p:nvSpPr>
         <p:spPr>
           <a:xfrm>
-            <a:off x="3659429" y="2258568"/>
-            <a:ext cx="1581912" cy="292608"/>
+            <a:off x="5803392" y="2258568"/>
+            <a:ext cx="1828800" cy="292608"/>
           </a:xfrm>
           <a:prstGeom prst="rect">
             <a:avLst/>
@@ -21360,13 +20689,13 @@
             <a:r>
               <a:rPr lang="en-US" sz="1300" b="1" dirty="0">
                 <a:solidFill>
-                  <a:srgbClr val="0F766E"/>
+                  <a:srgbClr val="9D174D"/>
                 </a:solidFill>
                 <a:latin typeface="Trebuchet MS" pitchFamily="34" charset="0"/>
                 <a:ea typeface="Trebuchet MS" pitchFamily="34" charset="-122"/>
                 <a:cs typeface="Trebuchet MS" pitchFamily="34" charset="-120"/>
               </a:rPr>
-              <a:t>migrate</a:t>
+              <a:t>ory</a:t>
             </a:r>
             <a:endParaRPr lang="en-US" sz="1300" dirty="0"/>
           </a:p>
@@ -21380,8 +20709,8 @@
         </p:nvSpPr>
         <p:spPr>
           <a:xfrm>
-            <a:off x="3659429" y="2569464"/>
-            <a:ext cx="1581912" cy="201168"/>
+            <a:off x="5803392" y="2569464"/>
+            <a:ext cx="1828800" cy="201168"/>
           </a:xfrm>
           <a:prstGeom prst="rect">
             <a:avLst/>
@@ -21405,7 +20734,7 @@
                 <a:ea typeface="Calibri" pitchFamily="34" charset="-122"/>
                 <a:cs typeface="Calibri" pitchFamily="34" charset="-120"/>
               </a:rPr>
-              <a:t>to move from one place</a:t>
+              <a:t>relating to or having the quality of</a:t>
             </a:r>
             <a:endParaRPr lang="en-US" sz="850" dirty="0"/>
           </a:p>
@@ -21413,370 +20742,212 @@
       </p:sp>
       <p:sp>
         <p:nvSpPr>
-          <p:cNvPr id="23" name="Text 21"/>
-          <p:cNvSpPr/>
-          <p:nvPr/>
-        </p:nvSpPr>
-        <p:spPr>
-          <a:xfrm>
-            <a:off x="3659429" y="2752344"/>
-            <a:ext cx="1581912" cy="182880"/>
-          </a:xfrm>
-          <a:prstGeom prst="rect">
-            <a:avLst/>
-          </a:prstGeom>
-          <a:noFill/>
-          <a:ln/>
-        </p:spPr>
-        <p:txBody>
-          <a:bodyPr wrap="square" lIns="0" tIns="0" rIns="0" bIns="0" rtlCol="0" anchor="t"/>
-          <a:lstStyle/>
-          <a:p>
-            <a:pPr algn="ctr" indent="0" marL="0">
-              <a:buNone/>
-            </a:pPr>
-            <a:r>
-              <a:rPr lang="en-US" sz="700" i="1" dirty="0">
-                <a:solidFill>
-                  <a:srgbClr val="94A3B8"/>
-                </a:solidFill>
-                <a:latin typeface="Calibri" pitchFamily="34" charset="0"/>
-                <a:ea typeface="Calibri" pitchFamily="34" charset="-122"/>
-                <a:cs typeface="Calibri" pitchFamily="34" charset="-120"/>
-              </a:rPr>
-              <a:t>'e' dropped before vowel suffix</a:t>
-            </a:r>
-            <a:endParaRPr lang="en-US" sz="700" dirty="0"/>
-          </a:p>
-        </p:txBody>
-      </p:sp>
-      <p:sp>
-        <p:nvSpPr>
-          <p:cNvPr id="24" name="Shape 22"/>
-          <p:cNvSpPr/>
-          <p:nvPr/>
-        </p:nvSpPr>
-        <p:spPr>
-          <a:xfrm>
-            <a:off x="5329123" y="2258568"/>
-            <a:ext cx="1581912" cy="292608"/>
+          <p:cNvPr id="23" name="Shape 21"/>
+          <p:cNvSpPr/>
+          <p:nvPr/>
+        </p:nvSpPr>
+        <p:spPr>
+          <a:xfrm>
+            <a:off x="365760" y="3273552"/>
+            <a:ext cx="1371600" cy="658368"/>
           </a:xfrm>
           <a:prstGeom prst="rect">
             <a:avLst>
-              <a:gd name="adj" fmla="val 25000"/>
+              <a:gd name="adj" fmla="val 8333"/>
             </a:avLst>
           </a:prstGeom>
           <a:solidFill>
-            <a:srgbClr val="FCE7F3"/>
-          </a:solidFill>
-          <a:ln w="19050">
-            <a:solidFill>
-              <a:srgbClr val="DB2777"/>
-            </a:solidFill>
-            <a:prstDash val="solid"/>
-          </a:ln>
-          <a:effectLst>
-            <a:outerShdw sx="100000" sy="100000" kx="0" ky="0" algn="bl" rotWithShape="0" blurRad="101600" dist="38100" dir="8100000">
-              <a:srgbClr val="000000">
-                <a:alpha val="12000"/>
-              </a:srgbClr>
-            </a:outerShdw>
-          </a:effectLst>
-        </p:spPr>
-      </p:sp>
-      <p:sp>
-        <p:nvSpPr>
-          <p:cNvPr id="25" name="Text 23"/>
-          <p:cNvSpPr/>
-          <p:nvPr/>
-        </p:nvSpPr>
-        <p:spPr>
-          <a:xfrm>
-            <a:off x="5329123" y="2258568"/>
-            <a:ext cx="1581912" cy="292608"/>
-          </a:xfrm>
-          <a:prstGeom prst="rect">
-            <a:avLst/>
-          </a:prstGeom>
-          <a:noFill/>
-          <a:ln/>
-        </p:spPr>
-        <p:txBody>
-          <a:bodyPr wrap="square" lIns="0" tIns="0" rIns="0" bIns="0" rtlCol="0" anchor="ctr"/>
-          <a:lstStyle/>
-          <a:p>
-            <a:pPr algn="ctr" indent="0" marL="0">
-              <a:buNone/>
-            </a:pPr>
-            <a:r>
-              <a:rPr lang="en-US" sz="1300" b="1" dirty="0">
-                <a:solidFill>
-                  <a:srgbClr val="9D174D"/>
+            <a:srgbClr val="E2E8F0"/>
+          </a:solidFill>
+          <a:ln w="12700">
+            <a:solidFill>
+              <a:srgbClr val="E2E8F0"/>
+            </a:solidFill>
+            <a:prstDash val="solid"/>
+          </a:ln>
+        </p:spPr>
+      </p:sp>
+      <p:sp>
+        <p:nvSpPr>
+          <p:cNvPr id="24" name="Text 22"/>
+          <p:cNvSpPr/>
+          <p:nvPr/>
+        </p:nvSpPr>
+        <p:spPr>
+          <a:xfrm>
+            <a:off x="365760" y="3273552"/>
+            <a:ext cx="1371600" cy="658368"/>
+          </a:xfrm>
+          <a:prstGeom prst="rect">
+            <a:avLst/>
+          </a:prstGeom>
+          <a:noFill/>
+          <a:ln/>
+        </p:spPr>
+        <p:txBody>
+          <a:bodyPr wrap="square" lIns="0" tIns="0" rIns="0" bIns="0" rtlCol="0" anchor="ctr"/>
+          <a:lstStyle/>
+          <a:p>
+            <a:pPr algn="ctr" indent="0" marL="0">
+              <a:buNone/>
+            </a:pPr>
+            <a:r>
+              <a:rPr lang="en-US" sz="1100" b="1" dirty="0">
+                <a:solidFill>
+                  <a:srgbClr val="475569"/>
                 </a:solidFill>
                 <a:latin typeface="Trebuchet MS" pitchFamily="34" charset="0"/>
                 <a:ea typeface="Trebuchet MS" pitchFamily="34" charset="-122"/>
                 <a:cs typeface="Trebuchet MS" pitchFamily="34" charset="-120"/>
               </a:rPr>
-              <a:t>ant</a:t>
-            </a:r>
-            <a:endParaRPr lang="en-US" sz="1300" dirty="0"/>
-          </a:p>
-        </p:txBody>
-      </p:sp>
-      <p:sp>
-        <p:nvSpPr>
-          <p:cNvPr id="26" name="Text 24"/>
-          <p:cNvSpPr/>
-          <p:nvPr/>
-        </p:nvSpPr>
-        <p:spPr>
-          <a:xfrm>
-            <a:off x="5329123" y="2569464"/>
-            <a:ext cx="1581912" cy="201168"/>
-          </a:xfrm>
-          <a:prstGeom prst="rect">
-            <a:avLst/>
-          </a:prstGeom>
-          <a:noFill/>
-          <a:ln/>
-        </p:spPr>
-        <p:txBody>
-          <a:bodyPr wrap="square" lIns="0" tIns="0" rIns="0" bIns="0" rtlCol="0" anchor="t"/>
-          <a:lstStyle/>
-          <a:p>
-            <a:pPr algn="ctr" indent="0" marL="0">
-              <a:buNone/>
-            </a:pPr>
-            <a:r>
-              <a:rPr lang="en-US" sz="850" dirty="0">
-                <a:solidFill>
-                  <a:srgbClr val="475569"/>
-                </a:solidFill>
-                <a:latin typeface="Calibri" pitchFamily="34" charset="0"/>
-                <a:ea typeface="Calibri" pitchFamily="34" charset="-122"/>
-                <a:cs typeface="Calibri" pitchFamily="34" charset="-120"/>
-              </a:rPr>
-              <a:t>a person who does something</a:t>
-            </a:r>
-            <a:endParaRPr lang="en-US" sz="850" dirty="0"/>
-          </a:p>
-        </p:txBody>
-      </p:sp>
-      <p:sp>
-        <p:nvSpPr>
-          <p:cNvPr id="27" name="Shape 25"/>
-          <p:cNvSpPr/>
-          <p:nvPr/>
-        </p:nvSpPr>
-        <p:spPr>
-          <a:xfrm>
-            <a:off x="6998818" y="2258568"/>
-            <a:ext cx="1581912" cy="292608"/>
+              <a:t>Syllables</a:t>
+            </a:r>
+            <a:endParaRPr lang="en-US" sz="1100" dirty="0"/>
+          </a:p>
+        </p:txBody>
+      </p:sp>
+      <p:sp>
+        <p:nvSpPr>
+          <p:cNvPr id="25" name="Shape 23"/>
+          <p:cNvSpPr/>
+          <p:nvPr/>
+        </p:nvSpPr>
+        <p:spPr>
+          <a:xfrm>
+            <a:off x="1874520" y="3273552"/>
+            <a:ext cx="6903720" cy="658368"/>
           </a:xfrm>
           <a:prstGeom prst="rect">
             <a:avLst>
-              <a:gd name="adj" fmla="val 25000"/>
+              <a:gd name="adj" fmla="val 8333"/>
             </a:avLst>
           </a:prstGeom>
           <a:solidFill>
-            <a:srgbClr val="FCE7F3"/>
-          </a:solidFill>
-          <a:ln w="19050">
-            <a:solidFill>
-              <a:srgbClr val="DB2777"/>
-            </a:solidFill>
-            <a:prstDash val="solid"/>
-          </a:ln>
-          <a:effectLst>
-            <a:outerShdw sx="100000" sy="100000" kx="0" ky="0" algn="bl" rotWithShape="0" blurRad="101600" dist="38100" dir="8100000">
-              <a:srgbClr val="000000">
-                <a:alpha val="12000"/>
-              </a:srgbClr>
-            </a:outerShdw>
-          </a:effectLst>
-        </p:spPr>
-      </p:sp>
-      <p:sp>
-        <p:nvSpPr>
-          <p:cNvPr id="28" name="Text 26"/>
-          <p:cNvSpPr/>
-          <p:nvPr/>
-        </p:nvSpPr>
-        <p:spPr>
-          <a:xfrm>
-            <a:off x="6998818" y="2258568"/>
-            <a:ext cx="1581912" cy="292608"/>
-          </a:xfrm>
-          <a:prstGeom prst="rect">
-            <a:avLst/>
-          </a:prstGeom>
-          <a:noFill/>
-          <a:ln/>
-        </p:spPr>
-        <p:txBody>
-          <a:bodyPr wrap="square" lIns="0" tIns="0" rIns="0" bIns="0" rtlCol="0" anchor="ctr"/>
-          <a:lstStyle/>
-          <a:p>
-            <a:pPr algn="ctr" indent="0" marL="0">
-              <a:buNone/>
-            </a:pPr>
-            <a:r>
-              <a:rPr lang="en-US" sz="1300" b="1" dirty="0">
-                <a:solidFill>
-                  <a:srgbClr val="9D174D"/>
+            <a:srgbClr val="CCFBF1"/>
+          </a:solidFill>
+          <a:ln w="12700">
+            <a:solidFill>
+              <a:srgbClr val="0D9488"/>
+            </a:solidFill>
+            <a:prstDash val="solid"/>
+          </a:ln>
+        </p:spPr>
+      </p:sp>
+      <p:sp>
+        <p:nvSpPr>
+          <p:cNvPr id="26" name="Shape 24"/>
+          <p:cNvSpPr/>
+          <p:nvPr/>
+        </p:nvSpPr>
+        <p:spPr>
+          <a:xfrm>
+            <a:off x="1975104" y="3364992"/>
+            <a:ext cx="1554480" cy="475488"/>
+          </a:xfrm>
+          <a:prstGeom prst="rect">
+            <a:avLst>
+              <a:gd name="adj" fmla="val 9615"/>
+            </a:avLst>
+          </a:prstGeom>
+          <a:solidFill>
+            <a:srgbClr val="FFFFFF"/>
+          </a:solidFill>
+          <a:ln w="12700">
+            <a:solidFill>
+              <a:srgbClr val="0D9488"/>
+            </a:solidFill>
+            <a:prstDash val="solid"/>
+          </a:ln>
+        </p:spPr>
+      </p:sp>
+      <p:sp>
+        <p:nvSpPr>
+          <p:cNvPr id="27" name="Text 25"/>
+          <p:cNvSpPr/>
+          <p:nvPr/>
+        </p:nvSpPr>
+        <p:spPr>
+          <a:xfrm>
+            <a:off x="1975104" y="3364992"/>
+            <a:ext cx="1554480" cy="475488"/>
+          </a:xfrm>
+          <a:prstGeom prst="rect">
+            <a:avLst/>
+          </a:prstGeom>
+          <a:noFill/>
+          <a:ln/>
+        </p:spPr>
+        <p:txBody>
+          <a:bodyPr wrap="square" lIns="0" tIns="0" rIns="0" bIns="0" rtlCol="0" anchor="ctr"/>
+          <a:lstStyle/>
+          <a:p>
+            <a:pPr algn="ctr" indent="0" marL="0">
+              <a:buNone/>
+            </a:pPr>
+            <a:r>
+              <a:rPr lang="en-US" sz="1400" b="1" dirty="0">
+                <a:solidFill>
+                  <a:srgbClr val="0D9488"/>
                 </a:solidFill>
                 <a:latin typeface="Trebuchet MS" pitchFamily="34" charset="0"/>
                 <a:ea typeface="Trebuchet MS" pitchFamily="34" charset="-122"/>
                 <a:cs typeface="Trebuchet MS" pitchFamily="34" charset="-120"/>
               </a:rPr>
-              <a:t>s</a:t>
-            </a:r>
-            <a:endParaRPr lang="en-US" sz="1300" dirty="0"/>
-          </a:p>
-        </p:txBody>
-      </p:sp>
-      <p:sp>
-        <p:nvSpPr>
-          <p:cNvPr id="29" name="Text 27"/>
-          <p:cNvSpPr/>
-          <p:nvPr/>
-        </p:nvSpPr>
-        <p:spPr>
-          <a:xfrm>
-            <a:off x="6998818" y="2569464"/>
-            <a:ext cx="1581912" cy="201168"/>
-          </a:xfrm>
-          <a:prstGeom prst="rect">
-            <a:avLst/>
-          </a:prstGeom>
-          <a:noFill/>
-          <a:ln/>
-        </p:spPr>
-        <p:txBody>
-          <a:bodyPr wrap="square" lIns="0" tIns="0" rIns="0" bIns="0" rtlCol="0" anchor="t"/>
-          <a:lstStyle/>
-          <a:p>
-            <a:pPr algn="ctr" indent="0" marL="0">
-              <a:buNone/>
-            </a:pPr>
-            <a:r>
-              <a:rPr lang="en-US" sz="850" dirty="0">
-                <a:solidFill>
-                  <a:srgbClr val="475569"/>
-                </a:solidFill>
-                <a:latin typeface="Calibri" pitchFamily="34" charset="0"/>
-                <a:ea typeface="Calibri" pitchFamily="34" charset="-122"/>
-                <a:cs typeface="Calibri" pitchFamily="34" charset="-120"/>
-              </a:rPr>
-              <a:t>more than one</a:t>
-            </a:r>
-            <a:endParaRPr lang="en-US" sz="850" dirty="0"/>
-          </a:p>
-        </p:txBody>
-      </p:sp>
-      <p:sp>
-        <p:nvSpPr>
-          <p:cNvPr id="30" name="Shape 28"/>
-          <p:cNvSpPr/>
-          <p:nvPr/>
-        </p:nvSpPr>
-        <p:spPr>
-          <a:xfrm>
-            <a:off x="365760" y="3273552"/>
-            <a:ext cx="1371600" cy="658368"/>
-          </a:xfrm>
-          <a:prstGeom prst="rect">
-            <a:avLst>
-              <a:gd name="adj" fmla="val 8333"/>
-            </a:avLst>
-          </a:prstGeom>
-          <a:solidFill>
-            <a:srgbClr val="E2E8F0"/>
-          </a:solidFill>
-          <a:ln w="12700">
-            <a:solidFill>
-              <a:srgbClr val="E2E8F0"/>
-            </a:solidFill>
-            <a:prstDash val="solid"/>
-          </a:ln>
-        </p:spPr>
-      </p:sp>
-      <p:sp>
-        <p:nvSpPr>
-          <p:cNvPr id="31" name="Text 29"/>
-          <p:cNvSpPr/>
-          <p:nvPr/>
-        </p:nvSpPr>
-        <p:spPr>
-          <a:xfrm>
-            <a:off x="365760" y="3273552"/>
-            <a:ext cx="1371600" cy="658368"/>
-          </a:xfrm>
-          <a:prstGeom prst="rect">
-            <a:avLst/>
-          </a:prstGeom>
-          <a:noFill/>
-          <a:ln/>
-        </p:spPr>
-        <p:txBody>
-          <a:bodyPr wrap="square" lIns="0" tIns="0" rIns="0" bIns="0" rtlCol="0" anchor="ctr"/>
-          <a:lstStyle/>
-          <a:p>
-            <a:pPr algn="ctr" indent="0" marL="0">
-              <a:buNone/>
-            </a:pPr>
-            <a:r>
-              <a:rPr lang="en-US" sz="1100" b="1" dirty="0">
-                <a:solidFill>
-                  <a:srgbClr val="475569"/>
+              <a:t>mi</a:t>
+            </a:r>
+            <a:endParaRPr lang="en-US" sz="1400" dirty="0"/>
+          </a:p>
+        </p:txBody>
+      </p:sp>
+      <p:sp>
+        <p:nvSpPr>
+          <p:cNvPr id="28" name="Text 26"/>
+          <p:cNvSpPr/>
+          <p:nvPr/>
+        </p:nvSpPr>
+        <p:spPr>
+          <a:xfrm>
+            <a:off x="3529584" y="3364992"/>
+            <a:ext cx="73152" cy="475488"/>
+          </a:xfrm>
+          <a:prstGeom prst="rect">
+            <a:avLst/>
+          </a:prstGeom>
+          <a:noFill/>
+          <a:ln/>
+        </p:spPr>
+        <p:txBody>
+          <a:bodyPr wrap="square" lIns="0" tIns="0" rIns="0" bIns="0" rtlCol="0" anchor="ctr"/>
+          <a:lstStyle/>
+          <a:p>
+            <a:pPr algn="ctr" indent="0" marL="0">
+              <a:buNone/>
+            </a:pPr>
+            <a:r>
+              <a:rPr lang="en-US" sz="1600" b="1" dirty="0">
+                <a:solidFill>
+                  <a:srgbClr val="0D9488"/>
                 </a:solidFill>
                 <a:latin typeface="Trebuchet MS" pitchFamily="34" charset="0"/>
                 <a:ea typeface="Trebuchet MS" pitchFamily="34" charset="-122"/>
                 <a:cs typeface="Trebuchet MS" pitchFamily="34" charset="-120"/>
               </a:rPr>
-              <a:t>Syllables</a:t>
-            </a:r>
-            <a:endParaRPr lang="en-US" sz="1100" dirty="0"/>
-          </a:p>
-        </p:txBody>
-      </p:sp>
-      <p:sp>
-        <p:nvSpPr>
-          <p:cNvPr id="32" name="Shape 30"/>
-          <p:cNvSpPr/>
-          <p:nvPr/>
-        </p:nvSpPr>
-        <p:spPr>
-          <a:xfrm>
-            <a:off x="1874520" y="3273552"/>
-            <a:ext cx="6903720" cy="658368"/>
-          </a:xfrm>
-          <a:prstGeom prst="rect">
-            <a:avLst>
-              <a:gd name="adj" fmla="val 8333"/>
-            </a:avLst>
-          </a:prstGeom>
-          <a:solidFill>
-            <a:srgbClr val="CCFBF1"/>
-          </a:solidFill>
-          <a:ln w="12700">
-            <a:solidFill>
-              <a:srgbClr val="0D9488"/>
-            </a:solidFill>
-            <a:prstDash val="solid"/>
-          </a:ln>
-        </p:spPr>
-      </p:sp>
-      <p:sp>
-        <p:nvSpPr>
-          <p:cNvPr id="33" name="Shape 31"/>
-          <p:cNvSpPr/>
-          <p:nvPr/>
-        </p:nvSpPr>
-        <p:spPr>
-          <a:xfrm>
-            <a:off x="2313432" y="3364992"/>
-            <a:ext cx="1645920" cy="475488"/>
+              <a:t>·</a:t>
+            </a:r>
+            <a:endParaRPr lang="en-US" sz="1600" dirty="0"/>
+          </a:p>
+        </p:txBody>
+      </p:sp>
+      <p:sp>
+        <p:nvSpPr>
+          <p:cNvPr id="29" name="Shape 27"/>
+          <p:cNvSpPr/>
+          <p:nvPr/>
+        </p:nvSpPr>
+        <p:spPr>
+          <a:xfrm>
+            <a:off x="3602736" y="3364992"/>
+            <a:ext cx="1554480" cy="475488"/>
           </a:xfrm>
           <a:prstGeom prst="rect">
             <a:avLst>
@@ -21796,14 +20967,14 @@
       </p:sp>
       <p:sp>
         <p:nvSpPr>
-          <p:cNvPr id="34" name="Text 32"/>
-          <p:cNvSpPr/>
-          <p:nvPr/>
-        </p:nvSpPr>
-        <p:spPr>
-          <a:xfrm>
-            <a:off x="2313432" y="3364992"/>
-            <a:ext cx="1645920" cy="475488"/>
+          <p:cNvPr id="30" name="Text 28"/>
+          <p:cNvSpPr/>
+          <p:nvPr/>
+        </p:nvSpPr>
+        <p:spPr>
+          <a:xfrm>
+            <a:off x="3602736" y="3364992"/>
+            <a:ext cx="1554480" cy="475488"/>
           </a:xfrm>
           <a:prstGeom prst="rect">
             <a:avLst/>
@@ -21827,7 +20998,7 @@
                 <a:ea typeface="Trebuchet MS" pitchFamily="34" charset="-122"/>
                 <a:cs typeface="Trebuchet MS" pitchFamily="34" charset="-120"/>
               </a:rPr>
-              <a:t>im</a:t>
+              <a:t>gra</a:t>
             </a:r>
             <a:endParaRPr lang="en-US" sz="1400" dirty="0"/>
           </a:p>
@@ -21835,14 +21006,14 @@
       </p:sp>
       <p:sp>
         <p:nvSpPr>
-          <p:cNvPr id="35" name="Text 33"/>
-          <p:cNvSpPr/>
-          <p:nvPr/>
-        </p:nvSpPr>
-        <p:spPr>
-          <a:xfrm>
-            <a:off x="3959352" y="3364992"/>
-            <a:ext cx="411480" cy="475488"/>
+          <p:cNvPr id="31" name="Text 29"/>
+          <p:cNvSpPr/>
+          <p:nvPr/>
+        </p:nvSpPr>
+        <p:spPr>
+          <a:xfrm>
+            <a:off x="5157216" y="3364992"/>
+            <a:ext cx="73152" cy="475488"/>
           </a:xfrm>
           <a:prstGeom prst="rect">
             <a:avLst/>
@@ -21874,14 +21045,14 @@
       </p:sp>
       <p:sp>
         <p:nvSpPr>
-          <p:cNvPr id="36" name="Shape 34"/>
-          <p:cNvSpPr/>
-          <p:nvPr/>
-        </p:nvSpPr>
-        <p:spPr>
-          <a:xfrm>
-            <a:off x="4370832" y="3364992"/>
-            <a:ext cx="1645920" cy="475488"/>
+          <p:cNvPr id="32" name="Shape 30"/>
+          <p:cNvSpPr/>
+          <p:nvPr/>
+        </p:nvSpPr>
+        <p:spPr>
+          <a:xfrm>
+            <a:off x="5230368" y="3364992"/>
+            <a:ext cx="1554480" cy="475488"/>
           </a:xfrm>
           <a:prstGeom prst="rect">
             <a:avLst>
@@ -21901,14 +21072,14 @@
       </p:sp>
       <p:sp>
         <p:nvSpPr>
-          <p:cNvPr id="37" name="Text 35"/>
-          <p:cNvSpPr/>
-          <p:nvPr/>
-        </p:nvSpPr>
-        <p:spPr>
-          <a:xfrm>
-            <a:off x="4370832" y="3364992"/>
-            <a:ext cx="1645920" cy="475488"/>
+          <p:cNvPr id="33" name="Text 31"/>
+          <p:cNvSpPr/>
+          <p:nvPr/>
+        </p:nvSpPr>
+        <p:spPr>
+          <a:xfrm>
+            <a:off x="5230368" y="3364992"/>
+            <a:ext cx="1554480" cy="475488"/>
           </a:xfrm>
           <a:prstGeom prst="rect">
             <a:avLst/>
@@ -21932,7 +21103,7 @@
                 <a:ea typeface="Trebuchet MS" pitchFamily="34" charset="-122"/>
                 <a:cs typeface="Trebuchet MS" pitchFamily="34" charset="-120"/>
               </a:rPr>
-              <a:t>mi</a:t>
+              <a:t>to</a:t>
             </a:r>
             <a:endParaRPr lang="en-US" sz="1400" dirty="0"/>
           </a:p>
@@ -21940,14 +21111,14 @@
       </p:sp>
       <p:sp>
         <p:nvSpPr>
-          <p:cNvPr id="38" name="Text 36"/>
-          <p:cNvSpPr/>
-          <p:nvPr/>
-        </p:nvSpPr>
-        <p:spPr>
-          <a:xfrm>
-            <a:off x="6016752" y="3364992"/>
-            <a:ext cx="411480" cy="475488"/>
+          <p:cNvPr id="34" name="Text 32"/>
+          <p:cNvSpPr/>
+          <p:nvPr/>
+        </p:nvSpPr>
+        <p:spPr>
+          <a:xfrm>
+            <a:off x="6784848" y="3364992"/>
+            <a:ext cx="73152" cy="475488"/>
           </a:xfrm>
           <a:prstGeom prst="rect">
             <a:avLst/>
@@ -21979,14 +21150,14 @@
       </p:sp>
       <p:sp>
         <p:nvSpPr>
-          <p:cNvPr id="39" name="Shape 37"/>
-          <p:cNvSpPr/>
-          <p:nvPr/>
-        </p:nvSpPr>
-        <p:spPr>
-          <a:xfrm>
-            <a:off x="6428232" y="3364992"/>
-            <a:ext cx="1645920" cy="475488"/>
+          <p:cNvPr id="35" name="Shape 33"/>
+          <p:cNvSpPr/>
+          <p:nvPr/>
+        </p:nvSpPr>
+        <p:spPr>
+          <a:xfrm>
+            <a:off x="6858000" y="3364992"/>
+            <a:ext cx="1554480" cy="475488"/>
           </a:xfrm>
           <a:prstGeom prst="rect">
             <a:avLst>
@@ -22006,14 +21177,14 @@
       </p:sp>
       <p:sp>
         <p:nvSpPr>
-          <p:cNvPr id="40" name="Text 38"/>
-          <p:cNvSpPr/>
-          <p:nvPr/>
-        </p:nvSpPr>
-        <p:spPr>
-          <a:xfrm>
-            <a:off x="6428232" y="3364992"/>
-            <a:ext cx="1645920" cy="475488"/>
+          <p:cNvPr id="36" name="Text 34"/>
+          <p:cNvSpPr/>
+          <p:nvPr/>
+        </p:nvSpPr>
+        <p:spPr>
+          <a:xfrm>
+            <a:off x="6858000" y="3364992"/>
+            <a:ext cx="1554480" cy="475488"/>
           </a:xfrm>
           <a:prstGeom prst="rect">
             <a:avLst/>
@@ -22037,7 +21208,7 @@
                 <a:ea typeface="Trebuchet MS" pitchFamily="34" charset="-122"/>
                 <a:cs typeface="Trebuchet MS" pitchFamily="34" charset="-120"/>
               </a:rPr>
-              <a:t>grants</a:t>
+              <a:t>ry</a:t>
             </a:r>
             <a:endParaRPr lang="en-US" sz="1400" dirty="0"/>
           </a:p>
@@ -22045,7 +21216,7 @@
       </p:sp>
       <p:sp>
         <p:nvSpPr>
-          <p:cNvPr id="41" name="Shape 39"/>
+          <p:cNvPr id="37" name="Shape 35"/>
           <p:cNvSpPr/>
           <p:nvPr/>
         </p:nvSpPr>
@@ -22072,7 +21243,7 @@
       </p:sp>
       <p:sp>
         <p:nvSpPr>
-          <p:cNvPr id="42" name="Text 40"/>
+          <p:cNvPr id="38" name="Text 36"/>
           <p:cNvSpPr/>
           <p:nvPr/>
         </p:nvSpPr>
@@ -22111,7 +21282,7 @@
       </p:sp>
       <p:sp>
         <p:nvSpPr>
-          <p:cNvPr id="43" name="Shape 41"/>
+          <p:cNvPr id="39" name="Shape 37"/>
           <p:cNvSpPr/>
           <p:nvPr/>
         </p:nvSpPr>
@@ -22138,7 +21309,7 @@
       </p:sp>
       <p:sp>
         <p:nvSpPr>
-          <p:cNvPr id="44" name="Text 42"/>
+          <p:cNvPr id="40" name="Text 38"/>
           <p:cNvSpPr/>
           <p:nvPr/>
         </p:nvSpPr>
@@ -22600,7 +21771,7 @@
                 <a:ea typeface="Trebuchet MS" pitchFamily="34" charset="-122"/>
                 <a:cs typeface="Trebuchet MS" pitchFamily="34" charset="-120"/>
               </a:rPr>
-              <a:t>immigrants</a:t>
+              <a:t>migratory</a:t>
             </a:r>
             <a:endParaRPr lang="en-US" sz="2800" dirty="0"/>
           </a:p>
@@ -22680,8 +21851,8 @@
         </p:nvSpPr>
         <p:spPr>
           <a:xfrm>
-            <a:off x="1989734" y="2258568"/>
-            <a:ext cx="1581912" cy="292608"/>
+            <a:off x="2938272" y="2258568"/>
+            <a:ext cx="1828800" cy="292608"/>
           </a:xfrm>
           <a:prstGeom prst="rect">
             <a:avLst>
@@ -22689,11 +21860,11 @@
             </a:avLst>
           </a:prstGeom>
           <a:solidFill>
-            <a:srgbClr val="DDD6FE"/>
+            <a:srgbClr val="CCFBF1"/>
           </a:solidFill>
           <a:ln w="19050">
             <a:solidFill>
-              <a:srgbClr val="7C3AED"/>
+              <a:srgbClr val="0D9488"/>
             </a:solidFill>
             <a:prstDash val="solid"/>
           </a:ln>
@@ -22714,8 +21885,8 @@
         </p:nvSpPr>
         <p:spPr>
           <a:xfrm>
-            <a:off x="1989734" y="2258568"/>
-            <a:ext cx="1581912" cy="292608"/>
+            <a:off x="2938272" y="2258568"/>
+            <a:ext cx="1828800" cy="292608"/>
           </a:xfrm>
           <a:prstGeom prst="rect">
             <a:avLst/>
@@ -22733,13 +21904,13 @@
             <a:r>
               <a:rPr lang="en-US" sz="1300" b="1" dirty="0">
                 <a:solidFill>
-                  <a:srgbClr val="4C1D95"/>
+                  <a:srgbClr val="0F766E"/>
                 </a:solidFill>
                 <a:latin typeface="Trebuchet MS" pitchFamily="34" charset="0"/>
                 <a:ea typeface="Trebuchet MS" pitchFamily="34" charset="-122"/>
                 <a:cs typeface="Trebuchet MS" pitchFamily="34" charset="-120"/>
               </a:rPr>
-              <a:t>im</a:t>
+              <a:t>migrate</a:t>
             </a:r>
             <a:endParaRPr lang="en-US" sz="1300" dirty="0"/>
           </a:p>
@@ -22753,8 +21924,8 @@
         </p:nvSpPr>
         <p:spPr>
           <a:xfrm>
-            <a:off x="1989734" y="2569464"/>
-            <a:ext cx="1581912" cy="201168"/>
+            <a:off x="2938272" y="2569464"/>
+            <a:ext cx="1828800" cy="201168"/>
           </a:xfrm>
           <a:prstGeom prst="rect">
             <a:avLst/>
@@ -22778,7 +21949,7 @@
                 <a:ea typeface="Calibri" pitchFamily="34" charset="-122"/>
                 <a:cs typeface="Calibri" pitchFamily="34" charset="-120"/>
               </a:rPr>
-              <a:t>into</a:t>
+              <a:t>move from one place</a:t>
             </a:r>
             <a:endParaRPr lang="en-US" sz="850" dirty="0"/>
           </a:p>
@@ -22792,8 +21963,8 @@
         </p:nvSpPr>
         <p:spPr>
           <a:xfrm>
-            <a:off x="1989734" y="2752344"/>
-            <a:ext cx="1581912" cy="182880"/>
+            <a:off x="2938272" y="2752344"/>
+            <a:ext cx="1828800" cy="182880"/>
           </a:xfrm>
           <a:prstGeom prst="rect">
             <a:avLst/>
@@ -22817,7 +21988,7 @@
                 <a:ea typeface="Calibri" pitchFamily="34" charset="-122"/>
                 <a:cs typeface="Calibri" pitchFamily="34" charset="-120"/>
               </a:rPr>
-              <a:t>in → im before 'm'</a:t>
+              <a:t>'e' dropped before vowel suffix</a:t>
             </a:r>
             <a:endParaRPr lang="en-US" sz="700" dirty="0"/>
           </a:p>
@@ -22831,8 +22002,8 @@
         </p:nvSpPr>
         <p:spPr>
           <a:xfrm>
-            <a:off x="3659429" y="2258568"/>
-            <a:ext cx="1581912" cy="292608"/>
+            <a:off x="5803392" y="2258568"/>
+            <a:ext cx="1828800" cy="292608"/>
           </a:xfrm>
           <a:prstGeom prst="rect">
             <a:avLst>
@@ -22840,11 +22011,11 @@
             </a:avLst>
           </a:prstGeom>
           <a:solidFill>
-            <a:srgbClr val="CCFBF1"/>
+            <a:srgbClr val="FCE7F3"/>
           </a:solidFill>
           <a:ln w="19050">
             <a:solidFill>
-              <a:srgbClr val="0D9488"/>
+              <a:srgbClr val="DB2777"/>
             </a:solidFill>
             <a:prstDash val="solid"/>
           </a:ln>
@@ -22865,8 +22036,8 @@
         </p:nvSpPr>
         <p:spPr>
           <a:xfrm>
-            <a:off x="3659429" y="2258568"/>
-            <a:ext cx="1581912" cy="292608"/>
+            <a:off x="5803392" y="2258568"/>
+            <a:ext cx="1828800" cy="292608"/>
           </a:xfrm>
           <a:prstGeom prst="rect">
             <a:avLst/>
@@ -22884,13 +22055,13 @@
             <a:r>
               <a:rPr lang="en-US" sz="1300" b="1" dirty="0">
                 <a:solidFill>
-                  <a:srgbClr val="0F766E"/>
+                  <a:srgbClr val="9D174D"/>
                 </a:solidFill>
                 <a:latin typeface="Trebuchet MS" pitchFamily="34" charset="0"/>
                 <a:ea typeface="Trebuchet MS" pitchFamily="34" charset="-122"/>
                 <a:cs typeface="Trebuchet MS" pitchFamily="34" charset="-120"/>
               </a:rPr>
-              <a:t>migrate</a:t>
+              <a:t>ory</a:t>
             </a:r>
             <a:endParaRPr lang="en-US" sz="1300" dirty="0"/>
           </a:p>
@@ -22904,8 +22075,8 @@
         </p:nvSpPr>
         <p:spPr>
           <a:xfrm>
-            <a:off x="3659429" y="2569464"/>
-            <a:ext cx="1581912" cy="201168"/>
+            <a:off x="5803392" y="2569464"/>
+            <a:ext cx="1828800" cy="201168"/>
           </a:xfrm>
           <a:prstGeom prst="rect">
             <a:avLst/>
@@ -22929,7 +22100,7 @@
                 <a:ea typeface="Calibri" pitchFamily="34" charset="-122"/>
                 <a:cs typeface="Calibri" pitchFamily="34" charset="-120"/>
               </a:rPr>
-              <a:t>to move from one place</a:t>
+              <a:t>relating to or having the quality of</a:t>
             </a:r>
             <a:endParaRPr lang="en-US" sz="850" dirty="0"/>
           </a:p>
@@ -22937,277 +22108,554 @@
       </p:sp>
       <p:sp>
         <p:nvSpPr>
-          <p:cNvPr id="23" name="Text 21"/>
-          <p:cNvSpPr/>
-          <p:nvPr/>
-        </p:nvSpPr>
-        <p:spPr>
-          <a:xfrm>
-            <a:off x="3659429" y="2752344"/>
-            <a:ext cx="1581912" cy="182880"/>
-          </a:xfrm>
-          <a:prstGeom prst="rect">
-            <a:avLst/>
-          </a:prstGeom>
-          <a:noFill/>
-          <a:ln/>
-        </p:spPr>
-        <p:txBody>
-          <a:bodyPr wrap="square" lIns="0" tIns="0" rIns="0" bIns="0" rtlCol="0" anchor="t"/>
-          <a:lstStyle/>
-          <a:p>
-            <a:pPr algn="ctr" indent="0" marL="0">
-              <a:buNone/>
-            </a:pPr>
-            <a:r>
-              <a:rPr lang="en-US" sz="700" i="1" dirty="0">
-                <a:solidFill>
-                  <a:srgbClr val="94A3B8"/>
-                </a:solidFill>
-                <a:latin typeface="Calibri" pitchFamily="34" charset="0"/>
-                <a:ea typeface="Calibri" pitchFamily="34" charset="-122"/>
-                <a:cs typeface="Calibri" pitchFamily="34" charset="-120"/>
-              </a:rPr>
-              <a:t>'e' dropped before vowel suffix</a:t>
-            </a:r>
-            <a:endParaRPr lang="en-US" sz="700" dirty="0"/>
-          </a:p>
-        </p:txBody>
-      </p:sp>
-      <p:sp>
-        <p:nvSpPr>
-          <p:cNvPr id="24" name="Shape 22"/>
-          <p:cNvSpPr/>
-          <p:nvPr/>
-        </p:nvSpPr>
-        <p:spPr>
-          <a:xfrm>
-            <a:off x="5329123" y="2258568"/>
-            <a:ext cx="1581912" cy="292608"/>
+          <p:cNvPr id="23" name="Shape 21"/>
+          <p:cNvSpPr/>
+          <p:nvPr/>
+        </p:nvSpPr>
+        <p:spPr>
+          <a:xfrm>
+            <a:off x="365760" y="3273552"/>
+            <a:ext cx="1371600" cy="658368"/>
           </a:xfrm>
           <a:prstGeom prst="rect">
             <a:avLst>
-              <a:gd name="adj" fmla="val 25000"/>
+              <a:gd name="adj" fmla="val 8333"/>
             </a:avLst>
           </a:prstGeom>
           <a:solidFill>
-            <a:srgbClr val="FCE7F3"/>
-          </a:solidFill>
-          <a:ln w="19050">
-            <a:solidFill>
-              <a:srgbClr val="DB2777"/>
-            </a:solidFill>
-            <a:prstDash val="solid"/>
-          </a:ln>
-          <a:effectLst>
-            <a:outerShdw sx="100000" sy="100000" kx="0" ky="0" algn="bl" rotWithShape="0" blurRad="101600" dist="38100" dir="8100000">
-              <a:srgbClr val="000000">
-                <a:alpha val="12000"/>
-              </a:srgbClr>
-            </a:outerShdw>
-          </a:effectLst>
-        </p:spPr>
-      </p:sp>
-      <p:sp>
-        <p:nvSpPr>
-          <p:cNvPr id="25" name="Text 23"/>
-          <p:cNvSpPr/>
-          <p:nvPr/>
-        </p:nvSpPr>
-        <p:spPr>
-          <a:xfrm>
-            <a:off x="5329123" y="2258568"/>
-            <a:ext cx="1581912" cy="292608"/>
-          </a:xfrm>
-          <a:prstGeom prst="rect">
-            <a:avLst/>
-          </a:prstGeom>
-          <a:noFill/>
-          <a:ln/>
-        </p:spPr>
-        <p:txBody>
-          <a:bodyPr wrap="square" lIns="0" tIns="0" rIns="0" bIns="0" rtlCol="0" anchor="ctr"/>
-          <a:lstStyle/>
-          <a:p>
-            <a:pPr algn="ctr" indent="0" marL="0">
-              <a:buNone/>
-            </a:pPr>
-            <a:r>
-              <a:rPr lang="en-US" sz="1300" b="1" dirty="0">
-                <a:solidFill>
-                  <a:srgbClr val="9D174D"/>
+            <a:srgbClr val="E2E8F0"/>
+          </a:solidFill>
+          <a:ln w="12700">
+            <a:solidFill>
+              <a:srgbClr val="E2E8F0"/>
+            </a:solidFill>
+            <a:prstDash val="solid"/>
+          </a:ln>
+        </p:spPr>
+      </p:sp>
+      <p:sp>
+        <p:nvSpPr>
+          <p:cNvPr id="24" name="Text 22"/>
+          <p:cNvSpPr/>
+          <p:nvPr/>
+        </p:nvSpPr>
+        <p:spPr>
+          <a:xfrm>
+            <a:off x="365760" y="3273552"/>
+            <a:ext cx="1371600" cy="658368"/>
+          </a:xfrm>
+          <a:prstGeom prst="rect">
+            <a:avLst/>
+          </a:prstGeom>
+          <a:noFill/>
+          <a:ln/>
+        </p:spPr>
+        <p:txBody>
+          <a:bodyPr wrap="square" lIns="0" tIns="0" rIns="0" bIns="0" rtlCol="0" anchor="ctr"/>
+          <a:lstStyle/>
+          <a:p>
+            <a:pPr algn="ctr" indent="0" marL="0">
+              <a:buNone/>
+            </a:pPr>
+            <a:r>
+              <a:rPr lang="en-US" sz="1100" b="1" dirty="0">
+                <a:solidFill>
+                  <a:srgbClr val="475569"/>
                 </a:solidFill>
                 <a:latin typeface="Trebuchet MS" pitchFamily="34" charset="0"/>
                 <a:ea typeface="Trebuchet MS" pitchFamily="34" charset="-122"/>
                 <a:cs typeface="Trebuchet MS" pitchFamily="34" charset="-120"/>
               </a:rPr>
-              <a:t>ant</a:t>
-            </a:r>
-            <a:endParaRPr lang="en-US" sz="1300" dirty="0"/>
-          </a:p>
-        </p:txBody>
-      </p:sp>
-      <p:sp>
-        <p:nvSpPr>
-          <p:cNvPr id="26" name="Text 24"/>
-          <p:cNvSpPr/>
-          <p:nvPr/>
-        </p:nvSpPr>
-        <p:spPr>
-          <a:xfrm>
-            <a:off x="5329123" y="2569464"/>
-            <a:ext cx="1581912" cy="201168"/>
-          </a:xfrm>
-          <a:prstGeom prst="rect">
-            <a:avLst/>
-          </a:prstGeom>
-          <a:noFill/>
-          <a:ln/>
-        </p:spPr>
-        <p:txBody>
-          <a:bodyPr wrap="square" lIns="0" tIns="0" rIns="0" bIns="0" rtlCol="0" anchor="t"/>
-          <a:lstStyle/>
-          <a:p>
-            <a:pPr algn="ctr" indent="0" marL="0">
-              <a:buNone/>
-            </a:pPr>
-            <a:r>
-              <a:rPr lang="en-US" sz="850" dirty="0">
-                <a:solidFill>
-                  <a:srgbClr val="475569"/>
-                </a:solidFill>
-                <a:latin typeface="Calibri" pitchFamily="34" charset="0"/>
-                <a:ea typeface="Calibri" pitchFamily="34" charset="-122"/>
-                <a:cs typeface="Calibri" pitchFamily="34" charset="-120"/>
-              </a:rPr>
-              <a:t>a person who does something</a:t>
-            </a:r>
-            <a:endParaRPr lang="en-US" sz="850" dirty="0"/>
-          </a:p>
-        </p:txBody>
-      </p:sp>
-      <p:sp>
-        <p:nvSpPr>
-          <p:cNvPr id="27" name="Shape 25"/>
-          <p:cNvSpPr/>
-          <p:nvPr/>
-        </p:nvSpPr>
-        <p:spPr>
-          <a:xfrm>
-            <a:off x="6998818" y="2258568"/>
-            <a:ext cx="1581912" cy="292608"/>
+              <a:t>Syllables</a:t>
+            </a:r>
+            <a:endParaRPr lang="en-US" sz="1100" dirty="0"/>
+          </a:p>
+        </p:txBody>
+      </p:sp>
+      <p:sp>
+        <p:nvSpPr>
+          <p:cNvPr id="25" name="Shape 23"/>
+          <p:cNvSpPr/>
+          <p:nvPr/>
+        </p:nvSpPr>
+        <p:spPr>
+          <a:xfrm>
+            <a:off x="1874520" y="3273552"/>
+            <a:ext cx="6903720" cy="658368"/>
           </a:xfrm>
           <a:prstGeom prst="rect">
             <a:avLst>
-              <a:gd name="adj" fmla="val 25000"/>
+              <a:gd name="adj" fmla="val 8333"/>
             </a:avLst>
           </a:prstGeom>
           <a:solidFill>
-            <a:srgbClr val="FCE7F3"/>
-          </a:solidFill>
-          <a:ln w="19050">
-            <a:solidFill>
-              <a:srgbClr val="DB2777"/>
-            </a:solidFill>
-            <a:prstDash val="solid"/>
-          </a:ln>
-          <a:effectLst>
-            <a:outerShdw sx="100000" sy="100000" kx="0" ky="0" algn="bl" rotWithShape="0" blurRad="101600" dist="38100" dir="8100000">
-              <a:srgbClr val="000000">
-                <a:alpha val="12000"/>
-              </a:srgbClr>
-            </a:outerShdw>
-          </a:effectLst>
-        </p:spPr>
-      </p:sp>
-      <p:sp>
-        <p:nvSpPr>
-          <p:cNvPr id="28" name="Text 26"/>
-          <p:cNvSpPr/>
-          <p:nvPr/>
-        </p:nvSpPr>
-        <p:spPr>
-          <a:xfrm>
-            <a:off x="6998818" y="2258568"/>
-            <a:ext cx="1581912" cy="292608"/>
-          </a:xfrm>
-          <a:prstGeom prst="rect">
-            <a:avLst/>
-          </a:prstGeom>
-          <a:noFill/>
-          <a:ln/>
-        </p:spPr>
-        <p:txBody>
-          <a:bodyPr wrap="square" lIns="0" tIns="0" rIns="0" bIns="0" rtlCol="0" anchor="ctr"/>
-          <a:lstStyle/>
-          <a:p>
-            <a:pPr algn="ctr" indent="0" marL="0">
-              <a:buNone/>
-            </a:pPr>
-            <a:r>
-              <a:rPr lang="en-US" sz="1300" b="1" dirty="0">
-                <a:solidFill>
-                  <a:srgbClr val="9D174D"/>
+            <a:srgbClr val="CCFBF1"/>
+          </a:solidFill>
+          <a:ln w="12700">
+            <a:solidFill>
+              <a:srgbClr val="0D9488"/>
+            </a:solidFill>
+            <a:prstDash val="solid"/>
+          </a:ln>
+        </p:spPr>
+      </p:sp>
+      <p:sp>
+        <p:nvSpPr>
+          <p:cNvPr id="26" name="Shape 24"/>
+          <p:cNvSpPr/>
+          <p:nvPr/>
+        </p:nvSpPr>
+        <p:spPr>
+          <a:xfrm>
+            <a:off x="1975104" y="3364992"/>
+            <a:ext cx="1554480" cy="475488"/>
+          </a:xfrm>
+          <a:prstGeom prst="rect">
+            <a:avLst>
+              <a:gd name="adj" fmla="val 9615"/>
+            </a:avLst>
+          </a:prstGeom>
+          <a:solidFill>
+            <a:srgbClr val="FFFFFF"/>
+          </a:solidFill>
+          <a:ln w="12700">
+            <a:solidFill>
+              <a:srgbClr val="0D9488"/>
+            </a:solidFill>
+            <a:prstDash val="solid"/>
+          </a:ln>
+        </p:spPr>
+      </p:sp>
+      <p:sp>
+        <p:nvSpPr>
+          <p:cNvPr id="27" name="Text 25"/>
+          <p:cNvSpPr/>
+          <p:nvPr/>
+        </p:nvSpPr>
+        <p:spPr>
+          <a:xfrm>
+            <a:off x="1975104" y="3364992"/>
+            <a:ext cx="1554480" cy="475488"/>
+          </a:xfrm>
+          <a:prstGeom prst="rect">
+            <a:avLst/>
+          </a:prstGeom>
+          <a:noFill/>
+          <a:ln/>
+        </p:spPr>
+        <p:txBody>
+          <a:bodyPr wrap="square" lIns="0" tIns="0" rIns="0" bIns="0" rtlCol="0" anchor="ctr"/>
+          <a:lstStyle/>
+          <a:p>
+            <a:pPr algn="ctr" indent="0" marL="0">
+              <a:buNone/>
+            </a:pPr>
+            <a:r>
+              <a:rPr lang="en-US" sz="1400" b="1" dirty="0">
+                <a:solidFill>
+                  <a:srgbClr val="0D9488"/>
                 </a:solidFill>
                 <a:latin typeface="Trebuchet MS" pitchFamily="34" charset="0"/>
                 <a:ea typeface="Trebuchet MS" pitchFamily="34" charset="-122"/>
                 <a:cs typeface="Trebuchet MS" pitchFamily="34" charset="-120"/>
               </a:rPr>
-              <a:t>s</a:t>
-            </a:r>
-            <a:endParaRPr lang="en-US" sz="1300" dirty="0"/>
-          </a:p>
-        </p:txBody>
-      </p:sp>
-      <p:sp>
-        <p:nvSpPr>
-          <p:cNvPr id="29" name="Text 27"/>
-          <p:cNvSpPr/>
-          <p:nvPr/>
-        </p:nvSpPr>
-        <p:spPr>
-          <a:xfrm>
-            <a:off x="6998818" y="2569464"/>
-            <a:ext cx="1581912" cy="201168"/>
-          </a:xfrm>
-          <a:prstGeom prst="rect">
-            <a:avLst/>
-          </a:prstGeom>
-          <a:noFill/>
-          <a:ln/>
-        </p:spPr>
-        <p:txBody>
-          <a:bodyPr wrap="square" lIns="0" tIns="0" rIns="0" bIns="0" rtlCol="0" anchor="t"/>
-          <a:lstStyle/>
-          <a:p>
-            <a:pPr algn="ctr" indent="0" marL="0">
-              <a:buNone/>
-            </a:pPr>
-            <a:r>
-              <a:rPr lang="en-US" sz="850" dirty="0">
+              <a:t>mi</a:t>
+            </a:r>
+            <a:endParaRPr lang="en-US" sz="1400" dirty="0"/>
+          </a:p>
+        </p:txBody>
+      </p:sp>
+      <p:sp>
+        <p:nvSpPr>
+          <p:cNvPr id="28" name="Text 26"/>
+          <p:cNvSpPr/>
+          <p:nvPr/>
+        </p:nvSpPr>
+        <p:spPr>
+          <a:xfrm>
+            <a:off x="3529584" y="3364992"/>
+            <a:ext cx="73152" cy="475488"/>
+          </a:xfrm>
+          <a:prstGeom prst="rect">
+            <a:avLst/>
+          </a:prstGeom>
+          <a:noFill/>
+          <a:ln/>
+        </p:spPr>
+        <p:txBody>
+          <a:bodyPr wrap="square" lIns="0" tIns="0" rIns="0" bIns="0" rtlCol="0" anchor="ctr"/>
+          <a:lstStyle/>
+          <a:p>
+            <a:pPr algn="ctr" indent="0" marL="0">
+              <a:buNone/>
+            </a:pPr>
+            <a:r>
+              <a:rPr lang="en-US" sz="1600" b="1" dirty="0">
+                <a:solidFill>
+                  <a:srgbClr val="0D9488"/>
+                </a:solidFill>
+                <a:latin typeface="Trebuchet MS" pitchFamily="34" charset="0"/>
+                <a:ea typeface="Trebuchet MS" pitchFamily="34" charset="-122"/>
+                <a:cs typeface="Trebuchet MS" pitchFamily="34" charset="-120"/>
+              </a:rPr>
+              <a:t>·</a:t>
+            </a:r>
+            <a:endParaRPr lang="en-US" sz="1600" dirty="0"/>
+          </a:p>
+        </p:txBody>
+      </p:sp>
+      <p:sp>
+        <p:nvSpPr>
+          <p:cNvPr id="29" name="Shape 27"/>
+          <p:cNvSpPr/>
+          <p:nvPr/>
+        </p:nvSpPr>
+        <p:spPr>
+          <a:xfrm>
+            <a:off x="3602736" y="3364992"/>
+            <a:ext cx="1554480" cy="475488"/>
+          </a:xfrm>
+          <a:prstGeom prst="rect">
+            <a:avLst>
+              <a:gd name="adj" fmla="val 9615"/>
+            </a:avLst>
+          </a:prstGeom>
+          <a:solidFill>
+            <a:srgbClr val="FFFFFF"/>
+          </a:solidFill>
+          <a:ln w="12700">
+            <a:solidFill>
+              <a:srgbClr val="0D9488"/>
+            </a:solidFill>
+            <a:prstDash val="solid"/>
+          </a:ln>
+        </p:spPr>
+      </p:sp>
+      <p:sp>
+        <p:nvSpPr>
+          <p:cNvPr id="30" name="Text 28"/>
+          <p:cNvSpPr/>
+          <p:nvPr/>
+        </p:nvSpPr>
+        <p:spPr>
+          <a:xfrm>
+            <a:off x="3602736" y="3364992"/>
+            <a:ext cx="1554480" cy="475488"/>
+          </a:xfrm>
+          <a:prstGeom prst="rect">
+            <a:avLst/>
+          </a:prstGeom>
+          <a:noFill/>
+          <a:ln/>
+        </p:spPr>
+        <p:txBody>
+          <a:bodyPr wrap="square" lIns="0" tIns="0" rIns="0" bIns="0" rtlCol="0" anchor="ctr"/>
+          <a:lstStyle/>
+          <a:p>
+            <a:pPr algn="ctr" indent="0" marL="0">
+              <a:buNone/>
+            </a:pPr>
+            <a:r>
+              <a:rPr lang="en-US" sz="1400" b="1" dirty="0">
+                <a:solidFill>
+                  <a:srgbClr val="0D9488"/>
+                </a:solidFill>
+                <a:latin typeface="Trebuchet MS" pitchFamily="34" charset="0"/>
+                <a:ea typeface="Trebuchet MS" pitchFamily="34" charset="-122"/>
+                <a:cs typeface="Trebuchet MS" pitchFamily="34" charset="-120"/>
+              </a:rPr>
+              <a:t>gra</a:t>
+            </a:r>
+            <a:endParaRPr lang="en-US" sz="1400" dirty="0"/>
+          </a:p>
+        </p:txBody>
+      </p:sp>
+      <p:sp>
+        <p:nvSpPr>
+          <p:cNvPr id="31" name="Text 29"/>
+          <p:cNvSpPr/>
+          <p:nvPr/>
+        </p:nvSpPr>
+        <p:spPr>
+          <a:xfrm>
+            <a:off x="5157216" y="3364992"/>
+            <a:ext cx="73152" cy="475488"/>
+          </a:xfrm>
+          <a:prstGeom prst="rect">
+            <a:avLst/>
+          </a:prstGeom>
+          <a:noFill/>
+          <a:ln/>
+        </p:spPr>
+        <p:txBody>
+          <a:bodyPr wrap="square" lIns="0" tIns="0" rIns="0" bIns="0" rtlCol="0" anchor="ctr"/>
+          <a:lstStyle/>
+          <a:p>
+            <a:pPr algn="ctr" indent="0" marL="0">
+              <a:buNone/>
+            </a:pPr>
+            <a:r>
+              <a:rPr lang="en-US" sz="1600" b="1" dirty="0">
+                <a:solidFill>
+                  <a:srgbClr val="0D9488"/>
+                </a:solidFill>
+                <a:latin typeface="Trebuchet MS" pitchFamily="34" charset="0"/>
+                <a:ea typeface="Trebuchet MS" pitchFamily="34" charset="-122"/>
+                <a:cs typeface="Trebuchet MS" pitchFamily="34" charset="-120"/>
+              </a:rPr>
+              <a:t>·</a:t>
+            </a:r>
+            <a:endParaRPr lang="en-US" sz="1600" dirty="0"/>
+          </a:p>
+        </p:txBody>
+      </p:sp>
+      <p:sp>
+        <p:nvSpPr>
+          <p:cNvPr id="32" name="Shape 30"/>
+          <p:cNvSpPr/>
+          <p:nvPr/>
+        </p:nvSpPr>
+        <p:spPr>
+          <a:xfrm>
+            <a:off x="5230368" y="3364992"/>
+            <a:ext cx="1554480" cy="475488"/>
+          </a:xfrm>
+          <a:prstGeom prst="rect">
+            <a:avLst>
+              <a:gd name="adj" fmla="val 9615"/>
+            </a:avLst>
+          </a:prstGeom>
+          <a:solidFill>
+            <a:srgbClr val="FFFFFF"/>
+          </a:solidFill>
+          <a:ln w="12700">
+            <a:solidFill>
+              <a:srgbClr val="0D9488"/>
+            </a:solidFill>
+            <a:prstDash val="solid"/>
+          </a:ln>
+        </p:spPr>
+      </p:sp>
+      <p:sp>
+        <p:nvSpPr>
+          <p:cNvPr id="33" name="Text 31"/>
+          <p:cNvSpPr/>
+          <p:nvPr/>
+        </p:nvSpPr>
+        <p:spPr>
+          <a:xfrm>
+            <a:off x="5230368" y="3364992"/>
+            <a:ext cx="1554480" cy="475488"/>
+          </a:xfrm>
+          <a:prstGeom prst="rect">
+            <a:avLst/>
+          </a:prstGeom>
+          <a:noFill/>
+          <a:ln/>
+        </p:spPr>
+        <p:txBody>
+          <a:bodyPr wrap="square" lIns="0" tIns="0" rIns="0" bIns="0" rtlCol="0" anchor="ctr"/>
+          <a:lstStyle/>
+          <a:p>
+            <a:pPr algn="ctr" indent="0" marL="0">
+              <a:buNone/>
+            </a:pPr>
+            <a:r>
+              <a:rPr lang="en-US" sz="1400" b="1" dirty="0">
+                <a:solidFill>
+                  <a:srgbClr val="0D9488"/>
+                </a:solidFill>
+                <a:latin typeface="Trebuchet MS" pitchFamily="34" charset="0"/>
+                <a:ea typeface="Trebuchet MS" pitchFamily="34" charset="-122"/>
+                <a:cs typeface="Trebuchet MS" pitchFamily="34" charset="-120"/>
+              </a:rPr>
+              <a:t>to</a:t>
+            </a:r>
+            <a:endParaRPr lang="en-US" sz="1400" dirty="0"/>
+          </a:p>
+        </p:txBody>
+      </p:sp>
+      <p:sp>
+        <p:nvSpPr>
+          <p:cNvPr id="34" name="Text 32"/>
+          <p:cNvSpPr/>
+          <p:nvPr/>
+        </p:nvSpPr>
+        <p:spPr>
+          <a:xfrm>
+            <a:off x="6784848" y="3364992"/>
+            <a:ext cx="73152" cy="475488"/>
+          </a:xfrm>
+          <a:prstGeom prst="rect">
+            <a:avLst/>
+          </a:prstGeom>
+          <a:noFill/>
+          <a:ln/>
+        </p:spPr>
+        <p:txBody>
+          <a:bodyPr wrap="square" lIns="0" tIns="0" rIns="0" bIns="0" rtlCol="0" anchor="ctr"/>
+          <a:lstStyle/>
+          <a:p>
+            <a:pPr algn="ctr" indent="0" marL="0">
+              <a:buNone/>
+            </a:pPr>
+            <a:r>
+              <a:rPr lang="en-US" sz="1600" b="1" dirty="0">
+                <a:solidFill>
+                  <a:srgbClr val="0D9488"/>
+                </a:solidFill>
+                <a:latin typeface="Trebuchet MS" pitchFamily="34" charset="0"/>
+                <a:ea typeface="Trebuchet MS" pitchFamily="34" charset="-122"/>
+                <a:cs typeface="Trebuchet MS" pitchFamily="34" charset="-120"/>
+              </a:rPr>
+              <a:t>·</a:t>
+            </a:r>
+            <a:endParaRPr lang="en-US" sz="1600" dirty="0"/>
+          </a:p>
+        </p:txBody>
+      </p:sp>
+      <p:sp>
+        <p:nvSpPr>
+          <p:cNvPr id="35" name="Shape 33"/>
+          <p:cNvSpPr/>
+          <p:nvPr/>
+        </p:nvSpPr>
+        <p:spPr>
+          <a:xfrm>
+            <a:off x="6858000" y="3364992"/>
+            <a:ext cx="1554480" cy="475488"/>
+          </a:xfrm>
+          <a:prstGeom prst="rect">
+            <a:avLst>
+              <a:gd name="adj" fmla="val 9615"/>
+            </a:avLst>
+          </a:prstGeom>
+          <a:solidFill>
+            <a:srgbClr val="FFFFFF"/>
+          </a:solidFill>
+          <a:ln w="12700">
+            <a:solidFill>
+              <a:srgbClr val="0D9488"/>
+            </a:solidFill>
+            <a:prstDash val="solid"/>
+          </a:ln>
+        </p:spPr>
+      </p:sp>
+      <p:sp>
+        <p:nvSpPr>
+          <p:cNvPr id="36" name="Text 34"/>
+          <p:cNvSpPr/>
+          <p:nvPr/>
+        </p:nvSpPr>
+        <p:spPr>
+          <a:xfrm>
+            <a:off x="6858000" y="3364992"/>
+            <a:ext cx="1554480" cy="475488"/>
+          </a:xfrm>
+          <a:prstGeom prst="rect">
+            <a:avLst/>
+          </a:prstGeom>
+          <a:noFill/>
+          <a:ln/>
+        </p:spPr>
+        <p:txBody>
+          <a:bodyPr wrap="square" lIns="0" tIns="0" rIns="0" bIns="0" rtlCol="0" anchor="ctr"/>
+          <a:lstStyle/>
+          <a:p>
+            <a:pPr algn="ctr" indent="0" marL="0">
+              <a:buNone/>
+            </a:pPr>
+            <a:r>
+              <a:rPr lang="en-US" sz="1400" b="1" dirty="0">
+                <a:solidFill>
+                  <a:srgbClr val="0D9488"/>
+                </a:solidFill>
+                <a:latin typeface="Trebuchet MS" pitchFamily="34" charset="0"/>
+                <a:ea typeface="Trebuchet MS" pitchFamily="34" charset="-122"/>
+                <a:cs typeface="Trebuchet MS" pitchFamily="34" charset="-120"/>
+              </a:rPr>
+              <a:t>ry</a:t>
+            </a:r>
+            <a:endParaRPr lang="en-US" sz="1400" dirty="0"/>
+          </a:p>
+        </p:txBody>
+      </p:sp>
+      <p:sp>
+        <p:nvSpPr>
+          <p:cNvPr id="37" name="Shape 35"/>
+          <p:cNvSpPr/>
+          <p:nvPr/>
+        </p:nvSpPr>
+        <p:spPr>
+          <a:xfrm>
+            <a:off x="365760" y="4096512"/>
+            <a:ext cx="1371600" cy="804672"/>
+          </a:xfrm>
+          <a:prstGeom prst="rect">
+            <a:avLst>
+              <a:gd name="adj" fmla="val 6818"/>
+            </a:avLst>
+          </a:prstGeom>
+          <a:solidFill>
+            <a:srgbClr val="E2E8F0"/>
+          </a:solidFill>
+          <a:ln w="12700">
+            <a:solidFill>
+              <a:srgbClr val="E2E8F0"/>
+            </a:solidFill>
+            <a:prstDash val="solid"/>
+          </a:ln>
+        </p:spPr>
+      </p:sp>
+      <p:sp>
+        <p:nvSpPr>
+          <p:cNvPr id="38" name="Text 36"/>
+          <p:cNvSpPr/>
+          <p:nvPr/>
+        </p:nvSpPr>
+        <p:spPr>
+          <a:xfrm>
+            <a:off x="365760" y="4096512"/>
+            <a:ext cx="1371600" cy="804672"/>
+          </a:xfrm>
+          <a:prstGeom prst="rect">
+            <a:avLst/>
+          </a:prstGeom>
+          <a:noFill/>
+          <a:ln/>
+        </p:spPr>
+        <p:txBody>
+          <a:bodyPr wrap="square" lIns="0" tIns="0" rIns="0" bIns="0" rtlCol="0" anchor="ctr"/>
+          <a:lstStyle/>
+          <a:p>
+            <a:pPr algn="ctr" indent="0" marL="0">
+              <a:buNone/>
+            </a:pPr>
+            <a:r>
+              <a:rPr lang="en-US" sz="1100" b="1" dirty="0">
                 <a:solidFill>
                   <a:srgbClr val="475569"/>
                 </a:solidFill>
-                <a:latin typeface="Calibri" pitchFamily="34" charset="0"/>
-                <a:ea typeface="Calibri" pitchFamily="34" charset="-122"/>
-                <a:cs typeface="Calibri" pitchFamily="34" charset="-120"/>
-              </a:rPr>
-              <a:t>more than one</a:t>
-            </a:r>
-            <a:endParaRPr lang="en-US" sz="850" dirty="0"/>
-          </a:p>
-        </p:txBody>
-      </p:sp>
-      <p:sp>
-        <p:nvSpPr>
-          <p:cNvPr id="30" name="Shape 28"/>
-          <p:cNvSpPr/>
-          <p:nvPr/>
-        </p:nvSpPr>
-        <p:spPr>
-          <a:xfrm>
-            <a:off x="365760" y="3273552"/>
-            <a:ext cx="1371600" cy="658368"/>
+                <a:latin typeface="Trebuchet MS" pitchFamily="34" charset="0"/>
+                <a:ea typeface="Trebuchet MS" pitchFamily="34" charset="-122"/>
+                <a:cs typeface="Trebuchet MS" pitchFamily="34" charset="-120"/>
+              </a:rPr>
+              <a:t>Phonemes</a:t>
+            </a:r>
+            <a:endParaRPr lang="en-US" sz="1100" dirty="0"/>
+          </a:p>
+        </p:txBody>
+      </p:sp>
+      <p:sp>
+        <p:nvSpPr>
+          <p:cNvPr id="39" name="Shape 37"/>
+          <p:cNvSpPr/>
+          <p:nvPr/>
+        </p:nvSpPr>
+        <p:spPr>
+          <a:xfrm>
+            <a:off x="1874520" y="4096512"/>
+            <a:ext cx="6903720" cy="658368"/>
           </a:xfrm>
           <a:prstGeom prst="rect">
             <a:avLst>
@@ -23215,201 +22663,228 @@
             </a:avLst>
           </a:prstGeom>
           <a:solidFill>
-            <a:srgbClr val="E2E8F0"/>
-          </a:solidFill>
-          <a:ln w="12700">
-            <a:solidFill>
-              <a:srgbClr val="E2E8F0"/>
-            </a:solidFill>
-            <a:prstDash val="solid"/>
-          </a:ln>
-        </p:spPr>
-      </p:sp>
-      <p:sp>
-        <p:nvSpPr>
-          <p:cNvPr id="31" name="Text 29"/>
-          <p:cNvSpPr/>
-          <p:nvPr/>
-        </p:nvSpPr>
-        <p:spPr>
-          <a:xfrm>
-            <a:off x="365760" y="3273552"/>
-            <a:ext cx="1371600" cy="658368"/>
-          </a:xfrm>
-          <a:prstGeom prst="rect">
-            <a:avLst/>
-          </a:prstGeom>
-          <a:noFill/>
-          <a:ln/>
-        </p:spPr>
-        <p:txBody>
-          <a:bodyPr wrap="square" lIns="0" tIns="0" rIns="0" bIns="0" rtlCol="0" anchor="ctr"/>
-          <a:lstStyle/>
-          <a:p>
-            <a:pPr algn="ctr" indent="0" marL="0">
-              <a:buNone/>
-            </a:pPr>
-            <a:r>
-              <a:rPr lang="en-US" sz="1100" b="1" dirty="0">
-                <a:solidFill>
-                  <a:srgbClr val="475569"/>
+            <a:srgbClr val="FCE7F3"/>
+          </a:solidFill>
+          <a:ln w="12700">
+            <a:solidFill>
+              <a:srgbClr val="DB2777"/>
+            </a:solidFill>
+            <a:prstDash val="solid"/>
+          </a:ln>
+        </p:spPr>
+      </p:sp>
+      <p:sp>
+        <p:nvSpPr>
+          <p:cNvPr id="40" name="Shape 38"/>
+          <p:cNvSpPr/>
+          <p:nvPr/>
+        </p:nvSpPr>
+        <p:spPr>
+          <a:xfrm>
+            <a:off x="2023872" y="4169664"/>
+            <a:ext cx="685800" cy="475488"/>
+          </a:xfrm>
+          <a:prstGeom prst="rect">
+            <a:avLst>
+              <a:gd name="adj" fmla="val 7692"/>
+            </a:avLst>
+          </a:prstGeom>
+          <a:solidFill>
+            <a:srgbClr val="FFFFFF"/>
+          </a:solidFill>
+          <a:ln w="12700">
+            <a:solidFill>
+              <a:srgbClr val="DB2777"/>
+            </a:solidFill>
+            <a:prstDash val="solid"/>
+          </a:ln>
+        </p:spPr>
+      </p:sp>
+      <p:sp>
+        <p:nvSpPr>
+          <p:cNvPr id="41" name="Text 39"/>
+          <p:cNvSpPr/>
+          <p:nvPr/>
+        </p:nvSpPr>
+        <p:spPr>
+          <a:xfrm>
+            <a:off x="2023872" y="4169664"/>
+            <a:ext cx="685800" cy="475488"/>
+          </a:xfrm>
+          <a:prstGeom prst="rect">
+            <a:avLst/>
+          </a:prstGeom>
+          <a:noFill/>
+          <a:ln/>
+        </p:spPr>
+        <p:txBody>
+          <a:bodyPr wrap="square" lIns="0" tIns="0" rIns="0" bIns="0" rtlCol="0" anchor="ctr"/>
+          <a:lstStyle/>
+          <a:p>
+            <a:pPr algn="ctr" indent="0" marL="0">
+              <a:buNone/>
+            </a:pPr>
+            <a:r>
+              <a:rPr lang="en-US" sz="900" b="1" dirty="0">
+                <a:solidFill>
+                  <a:srgbClr val="9D174D"/>
                 </a:solidFill>
                 <a:latin typeface="Trebuchet MS" pitchFamily="34" charset="0"/>
                 <a:ea typeface="Trebuchet MS" pitchFamily="34" charset="-122"/>
                 <a:cs typeface="Trebuchet MS" pitchFamily="34" charset="-120"/>
               </a:rPr>
-              <a:t>Syllables</a:t>
-            </a:r>
-            <a:endParaRPr lang="en-US" sz="1100" dirty="0"/>
-          </a:p>
-        </p:txBody>
-      </p:sp>
-      <p:sp>
-        <p:nvSpPr>
-          <p:cNvPr id="32" name="Shape 30"/>
-          <p:cNvSpPr/>
-          <p:nvPr/>
-        </p:nvSpPr>
-        <p:spPr>
-          <a:xfrm>
-            <a:off x="1874520" y="3273552"/>
-            <a:ext cx="6903720" cy="658368"/>
+              <a:t>m</a:t>
+            </a:r>
+            <a:endParaRPr lang="en-US" sz="900" dirty="0"/>
+          </a:p>
+        </p:txBody>
+      </p:sp>
+      <p:sp>
+        <p:nvSpPr>
+          <p:cNvPr id="42" name="Shape 40"/>
+          <p:cNvSpPr/>
+          <p:nvPr/>
+        </p:nvSpPr>
+        <p:spPr>
+          <a:xfrm>
+            <a:off x="2831592" y="4169664"/>
+            <a:ext cx="685800" cy="475488"/>
           </a:xfrm>
           <a:prstGeom prst="rect">
             <a:avLst>
-              <a:gd name="adj" fmla="val 8333"/>
+              <a:gd name="adj" fmla="val 7692"/>
             </a:avLst>
           </a:prstGeom>
           <a:solidFill>
-            <a:srgbClr val="CCFBF1"/>
-          </a:solidFill>
-          <a:ln w="12700">
-            <a:solidFill>
-              <a:srgbClr val="0D9488"/>
-            </a:solidFill>
-            <a:prstDash val="solid"/>
-          </a:ln>
-        </p:spPr>
-      </p:sp>
-      <p:sp>
-        <p:nvSpPr>
-          <p:cNvPr id="33" name="Shape 31"/>
-          <p:cNvSpPr/>
-          <p:nvPr/>
-        </p:nvSpPr>
-        <p:spPr>
-          <a:xfrm>
-            <a:off x="2313432" y="3364992"/>
-            <a:ext cx="1645920" cy="475488"/>
-          </a:xfrm>
-          <a:prstGeom prst="rect">
-            <a:avLst>
-              <a:gd name="adj" fmla="val 9615"/>
-            </a:avLst>
-          </a:prstGeom>
-          <a:solidFill>
             <a:srgbClr val="FFFFFF"/>
           </a:solidFill>
           <a:ln w="12700">
             <a:solidFill>
-              <a:srgbClr val="0D9488"/>
-            </a:solidFill>
-            <a:prstDash val="solid"/>
-          </a:ln>
-        </p:spPr>
-      </p:sp>
-      <p:sp>
-        <p:nvSpPr>
-          <p:cNvPr id="34" name="Text 32"/>
-          <p:cNvSpPr/>
-          <p:nvPr/>
-        </p:nvSpPr>
-        <p:spPr>
-          <a:xfrm>
-            <a:off x="2313432" y="3364992"/>
-            <a:ext cx="1645920" cy="475488"/>
-          </a:xfrm>
-          <a:prstGeom prst="rect">
-            <a:avLst/>
-          </a:prstGeom>
-          <a:noFill/>
-          <a:ln/>
-        </p:spPr>
-        <p:txBody>
-          <a:bodyPr wrap="square" lIns="0" tIns="0" rIns="0" bIns="0" rtlCol="0" anchor="ctr"/>
-          <a:lstStyle/>
-          <a:p>
-            <a:pPr algn="ctr" indent="0" marL="0">
-              <a:buNone/>
-            </a:pPr>
-            <a:r>
-              <a:rPr lang="en-US" sz="1400" b="1" dirty="0">
-                <a:solidFill>
-                  <a:srgbClr val="0D9488"/>
+              <a:srgbClr val="DB2777"/>
+            </a:solidFill>
+            <a:prstDash val="solid"/>
+          </a:ln>
+        </p:spPr>
+      </p:sp>
+      <p:sp>
+        <p:nvSpPr>
+          <p:cNvPr id="43" name="Text 41"/>
+          <p:cNvSpPr/>
+          <p:nvPr/>
+        </p:nvSpPr>
+        <p:spPr>
+          <a:xfrm>
+            <a:off x="2831592" y="4169664"/>
+            <a:ext cx="685800" cy="475488"/>
+          </a:xfrm>
+          <a:prstGeom prst="rect">
+            <a:avLst/>
+          </a:prstGeom>
+          <a:noFill/>
+          <a:ln/>
+        </p:spPr>
+        <p:txBody>
+          <a:bodyPr wrap="square" lIns="0" tIns="0" rIns="0" bIns="0" rtlCol="0" anchor="ctr"/>
+          <a:lstStyle/>
+          <a:p>
+            <a:pPr algn="ctr" indent="0" marL="0">
+              <a:buNone/>
+            </a:pPr>
+            <a:r>
+              <a:rPr lang="en-US" sz="900" b="1" dirty="0">
+                <a:solidFill>
+                  <a:srgbClr val="9D174D"/>
                 </a:solidFill>
                 <a:latin typeface="Trebuchet MS" pitchFamily="34" charset="0"/>
                 <a:ea typeface="Trebuchet MS" pitchFamily="34" charset="-122"/>
                 <a:cs typeface="Trebuchet MS" pitchFamily="34" charset="-120"/>
               </a:rPr>
-              <a:t>im</a:t>
-            </a:r>
-            <a:endParaRPr lang="en-US" sz="1400" dirty="0"/>
-          </a:p>
-        </p:txBody>
-      </p:sp>
-      <p:sp>
-        <p:nvSpPr>
-          <p:cNvPr id="35" name="Text 33"/>
-          <p:cNvSpPr/>
-          <p:nvPr/>
-        </p:nvSpPr>
-        <p:spPr>
-          <a:xfrm>
-            <a:off x="3959352" y="3364992"/>
-            <a:ext cx="411480" cy="475488"/>
-          </a:xfrm>
-          <a:prstGeom prst="rect">
-            <a:avLst/>
-          </a:prstGeom>
-          <a:noFill/>
-          <a:ln/>
-        </p:spPr>
-        <p:txBody>
-          <a:bodyPr wrap="square" lIns="0" tIns="0" rIns="0" bIns="0" rtlCol="0" anchor="ctr"/>
-          <a:lstStyle/>
-          <a:p>
-            <a:pPr algn="ctr" indent="0" marL="0">
-              <a:buNone/>
-            </a:pPr>
-            <a:r>
-              <a:rPr lang="en-US" sz="1600" b="1" dirty="0">
-                <a:solidFill>
-                  <a:srgbClr val="0D9488"/>
+              <a:t>i</a:t>
+            </a:r>
+            <a:endParaRPr lang="en-US" sz="900" dirty="0"/>
+          </a:p>
+        </p:txBody>
+      </p:sp>
+      <p:sp>
+        <p:nvSpPr>
+          <p:cNvPr id="44" name="Shape 42"/>
+          <p:cNvSpPr/>
+          <p:nvPr/>
+        </p:nvSpPr>
+        <p:spPr>
+          <a:xfrm>
+            <a:off x="3639312" y="4169664"/>
+            <a:ext cx="685800" cy="475488"/>
+          </a:xfrm>
+          <a:prstGeom prst="rect">
+            <a:avLst>
+              <a:gd name="adj" fmla="val 7692"/>
+            </a:avLst>
+          </a:prstGeom>
+          <a:solidFill>
+            <a:srgbClr val="FFFFFF"/>
+          </a:solidFill>
+          <a:ln w="12700">
+            <a:solidFill>
+              <a:srgbClr val="DB2777"/>
+            </a:solidFill>
+            <a:prstDash val="solid"/>
+          </a:ln>
+        </p:spPr>
+      </p:sp>
+      <p:sp>
+        <p:nvSpPr>
+          <p:cNvPr id="45" name="Text 43"/>
+          <p:cNvSpPr/>
+          <p:nvPr/>
+        </p:nvSpPr>
+        <p:spPr>
+          <a:xfrm>
+            <a:off x="3639312" y="4169664"/>
+            <a:ext cx="685800" cy="475488"/>
+          </a:xfrm>
+          <a:prstGeom prst="rect">
+            <a:avLst/>
+          </a:prstGeom>
+          <a:noFill/>
+          <a:ln/>
+        </p:spPr>
+        <p:txBody>
+          <a:bodyPr wrap="square" lIns="0" tIns="0" rIns="0" bIns="0" rtlCol="0" anchor="ctr"/>
+          <a:lstStyle/>
+          <a:p>
+            <a:pPr algn="ctr" indent="0" marL="0">
+              <a:buNone/>
+            </a:pPr>
+            <a:r>
+              <a:rPr lang="en-US" sz="900" b="1" dirty="0">
+                <a:solidFill>
+                  <a:srgbClr val="9D174D"/>
                 </a:solidFill>
                 <a:latin typeface="Trebuchet MS" pitchFamily="34" charset="0"/>
                 <a:ea typeface="Trebuchet MS" pitchFamily="34" charset="-122"/>
                 <a:cs typeface="Trebuchet MS" pitchFamily="34" charset="-120"/>
               </a:rPr>
-              <a:t>·</a:t>
-            </a:r>
-            <a:endParaRPr lang="en-US" sz="1600" dirty="0"/>
-          </a:p>
-        </p:txBody>
-      </p:sp>
-      <p:sp>
-        <p:nvSpPr>
-          <p:cNvPr id="36" name="Shape 34"/>
-          <p:cNvSpPr/>
-          <p:nvPr/>
-        </p:nvSpPr>
-        <p:spPr>
-          <a:xfrm>
-            <a:off x="4370832" y="3364992"/>
-            <a:ext cx="1645920" cy="475488"/>
+              <a:t>gr</a:t>
+            </a:r>
+            <a:endParaRPr lang="en-US" sz="900" dirty="0"/>
+          </a:p>
+        </p:txBody>
+      </p:sp>
+      <p:sp>
+        <p:nvSpPr>
+          <p:cNvPr id="46" name="Shape 44"/>
+          <p:cNvSpPr/>
+          <p:nvPr/>
+        </p:nvSpPr>
+        <p:spPr>
+          <a:xfrm>
+            <a:off x="4447032" y="4169664"/>
+            <a:ext cx="685800" cy="475488"/>
           </a:xfrm>
           <a:prstGeom prst="rect">
             <a:avLst>
-              <a:gd name="adj" fmla="val 9615"/>
+              <a:gd name="adj" fmla="val 7692"/>
             </a:avLst>
           </a:prstGeom>
           <a:solidFill>
@@ -23417,104 +22892,131 @@
           </a:solidFill>
           <a:ln w="12700">
             <a:solidFill>
-              <a:srgbClr val="0D9488"/>
-            </a:solidFill>
-            <a:prstDash val="solid"/>
-          </a:ln>
-        </p:spPr>
-      </p:sp>
-      <p:sp>
-        <p:nvSpPr>
-          <p:cNvPr id="37" name="Text 35"/>
-          <p:cNvSpPr/>
-          <p:nvPr/>
-        </p:nvSpPr>
-        <p:spPr>
-          <a:xfrm>
-            <a:off x="4370832" y="3364992"/>
-            <a:ext cx="1645920" cy="475488"/>
-          </a:xfrm>
-          <a:prstGeom prst="rect">
-            <a:avLst/>
-          </a:prstGeom>
-          <a:noFill/>
-          <a:ln/>
-        </p:spPr>
-        <p:txBody>
-          <a:bodyPr wrap="square" lIns="0" tIns="0" rIns="0" bIns="0" rtlCol="0" anchor="ctr"/>
-          <a:lstStyle/>
-          <a:p>
-            <a:pPr algn="ctr" indent="0" marL="0">
-              <a:buNone/>
-            </a:pPr>
-            <a:r>
-              <a:rPr lang="en-US" sz="1400" b="1" dirty="0">
-                <a:solidFill>
-                  <a:srgbClr val="0D9488"/>
+              <a:srgbClr val="DB2777"/>
+            </a:solidFill>
+            <a:prstDash val="solid"/>
+          </a:ln>
+        </p:spPr>
+      </p:sp>
+      <p:sp>
+        <p:nvSpPr>
+          <p:cNvPr id="47" name="Text 45"/>
+          <p:cNvSpPr/>
+          <p:nvPr/>
+        </p:nvSpPr>
+        <p:spPr>
+          <a:xfrm>
+            <a:off x="4447032" y="4169664"/>
+            <a:ext cx="685800" cy="475488"/>
+          </a:xfrm>
+          <a:prstGeom prst="rect">
+            <a:avLst/>
+          </a:prstGeom>
+          <a:noFill/>
+          <a:ln/>
+        </p:spPr>
+        <p:txBody>
+          <a:bodyPr wrap="square" lIns="0" tIns="0" rIns="0" bIns="0" rtlCol="0" anchor="ctr"/>
+          <a:lstStyle/>
+          <a:p>
+            <a:pPr algn="ctr" indent="0" marL="0">
+              <a:buNone/>
+            </a:pPr>
+            <a:r>
+              <a:rPr lang="en-US" sz="900" b="1" dirty="0">
+                <a:solidFill>
+                  <a:srgbClr val="9D174D"/>
                 </a:solidFill>
                 <a:latin typeface="Trebuchet MS" pitchFamily="34" charset="0"/>
                 <a:ea typeface="Trebuchet MS" pitchFamily="34" charset="-122"/>
                 <a:cs typeface="Trebuchet MS" pitchFamily="34" charset="-120"/>
               </a:rPr>
-              <a:t>mi</a:t>
-            </a:r>
-            <a:endParaRPr lang="en-US" sz="1400" dirty="0"/>
-          </a:p>
-        </p:txBody>
-      </p:sp>
-      <p:sp>
-        <p:nvSpPr>
-          <p:cNvPr id="38" name="Text 36"/>
-          <p:cNvSpPr/>
-          <p:nvPr/>
-        </p:nvSpPr>
-        <p:spPr>
-          <a:xfrm>
-            <a:off x="6016752" y="3364992"/>
-            <a:ext cx="411480" cy="475488"/>
-          </a:xfrm>
-          <a:prstGeom prst="rect">
-            <a:avLst/>
-          </a:prstGeom>
-          <a:noFill/>
-          <a:ln/>
-        </p:spPr>
-        <p:txBody>
-          <a:bodyPr wrap="square" lIns="0" tIns="0" rIns="0" bIns="0" rtlCol="0" anchor="ctr"/>
-          <a:lstStyle/>
-          <a:p>
-            <a:pPr algn="ctr" indent="0" marL="0">
-              <a:buNone/>
-            </a:pPr>
-            <a:r>
-              <a:rPr lang="en-US" sz="1600" b="1" dirty="0">
-                <a:solidFill>
-                  <a:srgbClr val="0D9488"/>
+              <a:t>a</a:t>
+            </a:r>
+            <a:endParaRPr lang="en-US" sz="900" dirty="0"/>
+          </a:p>
+        </p:txBody>
+      </p:sp>
+      <p:sp>
+        <p:nvSpPr>
+          <p:cNvPr id="48" name="Shape 46"/>
+          <p:cNvSpPr/>
+          <p:nvPr/>
+        </p:nvSpPr>
+        <p:spPr>
+          <a:xfrm>
+            <a:off x="5254752" y="4169664"/>
+            <a:ext cx="685800" cy="475488"/>
+          </a:xfrm>
+          <a:prstGeom prst="rect">
+            <a:avLst>
+              <a:gd name="adj" fmla="val 7692"/>
+            </a:avLst>
+          </a:prstGeom>
+          <a:solidFill>
+            <a:srgbClr val="FFFFFF"/>
+          </a:solidFill>
+          <a:ln w="12700">
+            <a:solidFill>
+              <a:srgbClr val="DB2777"/>
+            </a:solidFill>
+            <a:prstDash val="solid"/>
+          </a:ln>
+        </p:spPr>
+      </p:sp>
+      <p:sp>
+        <p:nvSpPr>
+          <p:cNvPr id="49" name="Text 47"/>
+          <p:cNvSpPr/>
+          <p:nvPr/>
+        </p:nvSpPr>
+        <p:spPr>
+          <a:xfrm>
+            <a:off x="5254752" y="4169664"/>
+            <a:ext cx="685800" cy="475488"/>
+          </a:xfrm>
+          <a:prstGeom prst="rect">
+            <a:avLst/>
+          </a:prstGeom>
+          <a:noFill/>
+          <a:ln/>
+        </p:spPr>
+        <p:txBody>
+          <a:bodyPr wrap="square" lIns="0" tIns="0" rIns="0" bIns="0" rtlCol="0" anchor="ctr"/>
+          <a:lstStyle/>
+          <a:p>
+            <a:pPr algn="ctr" indent="0" marL="0">
+              <a:buNone/>
+            </a:pPr>
+            <a:r>
+              <a:rPr lang="en-US" sz="900" b="1" dirty="0">
+                <a:solidFill>
+                  <a:srgbClr val="9D174D"/>
                 </a:solidFill>
                 <a:latin typeface="Trebuchet MS" pitchFamily="34" charset="0"/>
                 <a:ea typeface="Trebuchet MS" pitchFamily="34" charset="-122"/>
                 <a:cs typeface="Trebuchet MS" pitchFamily="34" charset="-120"/>
               </a:rPr>
-              <a:t>·</a:t>
-            </a:r>
-            <a:endParaRPr lang="en-US" sz="1600" dirty="0"/>
-          </a:p>
-        </p:txBody>
-      </p:sp>
-      <p:sp>
-        <p:nvSpPr>
-          <p:cNvPr id="39" name="Shape 37"/>
-          <p:cNvSpPr/>
-          <p:nvPr/>
-        </p:nvSpPr>
-        <p:spPr>
-          <a:xfrm>
-            <a:off x="6428232" y="3364992"/>
-            <a:ext cx="1645920" cy="475488"/>
+              <a:t>t</a:t>
+            </a:r>
+            <a:endParaRPr lang="en-US" sz="900" dirty="0"/>
+          </a:p>
+        </p:txBody>
+      </p:sp>
+      <p:sp>
+        <p:nvSpPr>
+          <p:cNvPr id="50" name="Shape 48"/>
+          <p:cNvSpPr/>
+          <p:nvPr/>
+        </p:nvSpPr>
+        <p:spPr>
+          <a:xfrm>
+            <a:off x="6062472" y="4169664"/>
+            <a:ext cx="685800" cy="475488"/>
           </a:xfrm>
           <a:prstGeom prst="rect">
             <a:avLst>
-              <a:gd name="adj" fmla="val 9615"/>
+              <a:gd name="adj" fmla="val 7692"/>
             </a:avLst>
           </a:prstGeom>
           <a:solidFill>
@@ -23522,154 +23024,127 @@
           </a:solidFill>
           <a:ln w="12700">
             <a:solidFill>
-              <a:srgbClr val="0D9488"/>
-            </a:solidFill>
-            <a:prstDash val="solid"/>
-          </a:ln>
-        </p:spPr>
-      </p:sp>
-      <p:sp>
-        <p:nvSpPr>
-          <p:cNvPr id="40" name="Text 38"/>
-          <p:cNvSpPr/>
-          <p:nvPr/>
-        </p:nvSpPr>
-        <p:spPr>
-          <a:xfrm>
-            <a:off x="6428232" y="3364992"/>
-            <a:ext cx="1645920" cy="475488"/>
-          </a:xfrm>
-          <a:prstGeom prst="rect">
-            <a:avLst/>
-          </a:prstGeom>
-          <a:noFill/>
-          <a:ln/>
-        </p:spPr>
-        <p:txBody>
-          <a:bodyPr wrap="square" lIns="0" tIns="0" rIns="0" bIns="0" rtlCol="0" anchor="ctr"/>
-          <a:lstStyle/>
-          <a:p>
-            <a:pPr algn="ctr" indent="0" marL="0">
-              <a:buNone/>
-            </a:pPr>
-            <a:r>
-              <a:rPr lang="en-US" sz="1400" b="1" dirty="0">
-                <a:solidFill>
-                  <a:srgbClr val="0D9488"/>
+              <a:srgbClr val="DB2777"/>
+            </a:solidFill>
+            <a:prstDash val="solid"/>
+          </a:ln>
+        </p:spPr>
+      </p:sp>
+      <p:sp>
+        <p:nvSpPr>
+          <p:cNvPr id="51" name="Text 49"/>
+          <p:cNvSpPr/>
+          <p:nvPr/>
+        </p:nvSpPr>
+        <p:spPr>
+          <a:xfrm>
+            <a:off x="6062472" y="4169664"/>
+            <a:ext cx="685800" cy="475488"/>
+          </a:xfrm>
+          <a:prstGeom prst="rect">
+            <a:avLst/>
+          </a:prstGeom>
+          <a:noFill/>
+          <a:ln/>
+        </p:spPr>
+        <p:txBody>
+          <a:bodyPr wrap="square" lIns="0" tIns="0" rIns="0" bIns="0" rtlCol="0" anchor="ctr"/>
+          <a:lstStyle/>
+          <a:p>
+            <a:pPr algn="ctr" indent="0" marL="0">
+              <a:buNone/>
+            </a:pPr>
+            <a:r>
+              <a:rPr lang="en-US" sz="900" b="1" dirty="0">
+                <a:solidFill>
+                  <a:srgbClr val="9D174D"/>
                 </a:solidFill>
                 <a:latin typeface="Trebuchet MS" pitchFamily="34" charset="0"/>
                 <a:ea typeface="Trebuchet MS" pitchFamily="34" charset="-122"/>
                 <a:cs typeface="Trebuchet MS" pitchFamily="34" charset="-120"/>
               </a:rPr>
-              <a:t>grants</a:t>
-            </a:r>
-            <a:endParaRPr lang="en-US" sz="1400" dirty="0"/>
-          </a:p>
-        </p:txBody>
-      </p:sp>
-      <p:sp>
-        <p:nvSpPr>
-          <p:cNvPr id="41" name="Shape 39"/>
-          <p:cNvSpPr/>
-          <p:nvPr/>
-        </p:nvSpPr>
-        <p:spPr>
-          <a:xfrm>
-            <a:off x="365760" y="4096512"/>
-            <a:ext cx="1371600" cy="804672"/>
+              <a:t>o</a:t>
+            </a:r>
+            <a:endParaRPr lang="en-US" sz="900" dirty="0"/>
+          </a:p>
+        </p:txBody>
+      </p:sp>
+      <p:sp>
+        <p:nvSpPr>
+          <p:cNvPr id="52" name="Shape 50"/>
+          <p:cNvSpPr/>
+          <p:nvPr/>
+        </p:nvSpPr>
+        <p:spPr>
+          <a:xfrm>
+            <a:off x="6870192" y="4169664"/>
+            <a:ext cx="685800" cy="475488"/>
           </a:xfrm>
           <a:prstGeom prst="rect">
             <a:avLst>
-              <a:gd name="adj" fmla="val 6818"/>
+              <a:gd name="adj" fmla="val 7692"/>
             </a:avLst>
           </a:prstGeom>
           <a:solidFill>
-            <a:srgbClr val="E2E8F0"/>
-          </a:solidFill>
-          <a:ln w="12700">
-            <a:solidFill>
-              <a:srgbClr val="E2E8F0"/>
-            </a:solidFill>
-            <a:prstDash val="solid"/>
-          </a:ln>
-        </p:spPr>
-      </p:sp>
-      <p:sp>
-        <p:nvSpPr>
-          <p:cNvPr id="42" name="Text 40"/>
-          <p:cNvSpPr/>
-          <p:nvPr/>
-        </p:nvSpPr>
-        <p:spPr>
-          <a:xfrm>
-            <a:off x="365760" y="4096512"/>
-            <a:ext cx="1371600" cy="804672"/>
-          </a:xfrm>
-          <a:prstGeom prst="rect">
-            <a:avLst/>
-          </a:prstGeom>
-          <a:noFill/>
-          <a:ln/>
-        </p:spPr>
-        <p:txBody>
-          <a:bodyPr wrap="square" lIns="0" tIns="0" rIns="0" bIns="0" rtlCol="0" anchor="ctr"/>
-          <a:lstStyle/>
-          <a:p>
-            <a:pPr algn="ctr" indent="0" marL="0">
-              <a:buNone/>
-            </a:pPr>
-            <a:r>
-              <a:rPr lang="en-US" sz="1100" b="1" dirty="0">
-                <a:solidFill>
-                  <a:srgbClr val="475569"/>
+            <a:srgbClr val="FFFFFF"/>
+          </a:solidFill>
+          <a:ln w="12700">
+            <a:solidFill>
+              <a:srgbClr val="DB2777"/>
+            </a:solidFill>
+            <a:prstDash val="solid"/>
+          </a:ln>
+        </p:spPr>
+      </p:sp>
+      <p:sp>
+        <p:nvSpPr>
+          <p:cNvPr id="53" name="Text 51"/>
+          <p:cNvSpPr/>
+          <p:nvPr/>
+        </p:nvSpPr>
+        <p:spPr>
+          <a:xfrm>
+            <a:off x="6870192" y="4169664"/>
+            <a:ext cx="685800" cy="475488"/>
+          </a:xfrm>
+          <a:prstGeom prst="rect">
+            <a:avLst/>
+          </a:prstGeom>
+          <a:noFill/>
+          <a:ln/>
+        </p:spPr>
+        <p:txBody>
+          <a:bodyPr wrap="square" lIns="0" tIns="0" rIns="0" bIns="0" rtlCol="0" anchor="ctr"/>
+          <a:lstStyle/>
+          <a:p>
+            <a:pPr algn="ctr" indent="0" marL="0">
+              <a:buNone/>
+            </a:pPr>
+            <a:r>
+              <a:rPr lang="en-US" sz="900" b="1" dirty="0">
+                <a:solidFill>
+                  <a:srgbClr val="9D174D"/>
                 </a:solidFill>
                 <a:latin typeface="Trebuchet MS" pitchFamily="34" charset="0"/>
                 <a:ea typeface="Trebuchet MS" pitchFamily="34" charset="-122"/>
                 <a:cs typeface="Trebuchet MS" pitchFamily="34" charset="-120"/>
               </a:rPr>
-              <a:t>Phonemes</a:t>
-            </a:r>
-            <a:endParaRPr lang="en-US" sz="1100" dirty="0"/>
-          </a:p>
-        </p:txBody>
-      </p:sp>
-      <p:sp>
-        <p:nvSpPr>
-          <p:cNvPr id="43" name="Shape 41"/>
-          <p:cNvSpPr/>
-          <p:nvPr/>
-        </p:nvSpPr>
-        <p:spPr>
-          <a:xfrm>
-            <a:off x="1874520" y="4096512"/>
-            <a:ext cx="6903720" cy="658368"/>
-          </a:xfrm>
-          <a:prstGeom prst="rect">
-            <a:avLst>
-              <a:gd name="adj" fmla="val 8333"/>
-            </a:avLst>
-          </a:prstGeom>
-          <a:solidFill>
-            <a:srgbClr val="FCE7F3"/>
-          </a:solidFill>
-          <a:ln w="12700">
-            <a:solidFill>
-              <a:srgbClr val="DB2777"/>
-            </a:solidFill>
-            <a:prstDash val="solid"/>
-          </a:ln>
-        </p:spPr>
-      </p:sp>
-      <p:sp>
-        <p:nvSpPr>
-          <p:cNvPr id="44" name="Shape 42"/>
-          <p:cNvSpPr/>
-          <p:nvPr/>
-        </p:nvSpPr>
-        <p:spPr>
-          <a:xfrm>
-            <a:off x="1951330" y="4169664"/>
-            <a:ext cx="676656" cy="475488"/>
+              <a:t>r</a:t>
+            </a:r>
+            <a:endParaRPr lang="en-US" sz="900" dirty="0"/>
+          </a:p>
+        </p:txBody>
+      </p:sp>
+      <p:sp>
+        <p:nvSpPr>
+          <p:cNvPr id="54" name="Shape 52"/>
+          <p:cNvSpPr/>
+          <p:nvPr/>
+        </p:nvSpPr>
+        <p:spPr>
+          <a:xfrm>
+            <a:off x="7677912" y="4169664"/>
+            <a:ext cx="685800" cy="475488"/>
           </a:xfrm>
           <a:prstGeom prst="rect">
             <a:avLst>
@@ -23689,14 +23164,14 @@
       </p:sp>
       <p:sp>
         <p:nvSpPr>
-          <p:cNvPr id="45" name="Text 43"/>
-          <p:cNvSpPr/>
-          <p:nvPr/>
-        </p:nvSpPr>
-        <p:spPr>
-          <a:xfrm>
-            <a:off x="1951330" y="4169664"/>
-            <a:ext cx="676656" cy="475488"/>
+          <p:cNvPr id="55" name="Text 53"/>
+          <p:cNvSpPr/>
+          <p:nvPr/>
+        </p:nvSpPr>
+        <p:spPr>
+          <a:xfrm>
+            <a:off x="7677912" y="4169664"/>
+            <a:ext cx="685800" cy="475488"/>
           </a:xfrm>
           <a:prstGeom prst="rect">
             <a:avLst/>
@@ -23720,535 +23195,7 @@
                 <a:ea typeface="Trebuchet MS" pitchFamily="34" charset="-122"/>
                 <a:cs typeface="Trebuchet MS" pitchFamily="34" charset="-120"/>
               </a:rPr>
-              <a:t>i</a:t>
-            </a:r>
-            <a:endParaRPr lang="en-US" sz="900" dirty="0"/>
-          </a:p>
-        </p:txBody>
-      </p:sp>
-      <p:sp>
-        <p:nvSpPr>
-          <p:cNvPr id="46" name="Shape 44"/>
-          <p:cNvSpPr/>
-          <p:nvPr/>
-        </p:nvSpPr>
-        <p:spPr>
-          <a:xfrm>
-            <a:off x="2677363" y="4169664"/>
-            <a:ext cx="676656" cy="475488"/>
-          </a:xfrm>
-          <a:prstGeom prst="rect">
-            <a:avLst>
-              <a:gd name="adj" fmla="val 7692"/>
-            </a:avLst>
-          </a:prstGeom>
-          <a:solidFill>
-            <a:srgbClr val="FFFFFF"/>
-          </a:solidFill>
-          <a:ln w="12700">
-            <a:solidFill>
-              <a:srgbClr val="DB2777"/>
-            </a:solidFill>
-            <a:prstDash val="solid"/>
-          </a:ln>
-        </p:spPr>
-      </p:sp>
-      <p:sp>
-        <p:nvSpPr>
-          <p:cNvPr id="47" name="Text 45"/>
-          <p:cNvSpPr/>
-          <p:nvPr/>
-        </p:nvSpPr>
-        <p:spPr>
-          <a:xfrm>
-            <a:off x="2677363" y="4169664"/>
-            <a:ext cx="676656" cy="475488"/>
-          </a:xfrm>
-          <a:prstGeom prst="rect">
-            <a:avLst/>
-          </a:prstGeom>
-          <a:noFill/>
-          <a:ln/>
-        </p:spPr>
-        <p:txBody>
-          <a:bodyPr wrap="square" lIns="0" tIns="0" rIns="0" bIns="0" rtlCol="0" anchor="ctr"/>
-          <a:lstStyle/>
-          <a:p>
-            <a:pPr algn="ctr" indent="0" marL="0">
-              <a:buNone/>
-            </a:pPr>
-            <a:r>
-              <a:rPr lang="en-US" sz="900" b="1" dirty="0">
-                <a:solidFill>
-                  <a:srgbClr val="9D174D"/>
-                </a:solidFill>
-                <a:latin typeface="Trebuchet MS" pitchFamily="34" charset="0"/>
-                <a:ea typeface="Trebuchet MS" pitchFamily="34" charset="-122"/>
-                <a:cs typeface="Trebuchet MS" pitchFamily="34" charset="-120"/>
-              </a:rPr>
-              <a:t>mm</a:t>
-            </a:r>
-            <a:endParaRPr lang="en-US" sz="900" dirty="0"/>
-          </a:p>
-        </p:txBody>
-      </p:sp>
-      <p:sp>
-        <p:nvSpPr>
-          <p:cNvPr id="48" name="Shape 46"/>
-          <p:cNvSpPr/>
-          <p:nvPr/>
-        </p:nvSpPr>
-        <p:spPr>
-          <a:xfrm>
-            <a:off x="3403397" y="4169664"/>
-            <a:ext cx="676656" cy="475488"/>
-          </a:xfrm>
-          <a:prstGeom prst="rect">
-            <a:avLst>
-              <a:gd name="adj" fmla="val 7692"/>
-            </a:avLst>
-          </a:prstGeom>
-          <a:solidFill>
-            <a:srgbClr val="FFFFFF"/>
-          </a:solidFill>
-          <a:ln w="12700">
-            <a:solidFill>
-              <a:srgbClr val="DB2777"/>
-            </a:solidFill>
-            <a:prstDash val="solid"/>
-          </a:ln>
-        </p:spPr>
-      </p:sp>
-      <p:sp>
-        <p:nvSpPr>
-          <p:cNvPr id="49" name="Text 47"/>
-          <p:cNvSpPr/>
-          <p:nvPr/>
-        </p:nvSpPr>
-        <p:spPr>
-          <a:xfrm>
-            <a:off x="3403397" y="4169664"/>
-            <a:ext cx="676656" cy="475488"/>
-          </a:xfrm>
-          <a:prstGeom prst="rect">
-            <a:avLst/>
-          </a:prstGeom>
-          <a:noFill/>
-          <a:ln/>
-        </p:spPr>
-        <p:txBody>
-          <a:bodyPr wrap="square" lIns="0" tIns="0" rIns="0" bIns="0" rtlCol="0" anchor="ctr"/>
-          <a:lstStyle/>
-          <a:p>
-            <a:pPr algn="ctr" indent="0" marL="0">
-              <a:buNone/>
-            </a:pPr>
-            <a:r>
-              <a:rPr lang="en-US" sz="900" b="1" dirty="0">
-                <a:solidFill>
-                  <a:srgbClr val="9D174D"/>
-                </a:solidFill>
-                <a:latin typeface="Trebuchet MS" pitchFamily="34" charset="0"/>
-                <a:ea typeface="Trebuchet MS" pitchFamily="34" charset="-122"/>
-                <a:cs typeface="Trebuchet MS" pitchFamily="34" charset="-120"/>
-              </a:rPr>
-              <a:t>i</a:t>
-            </a:r>
-            <a:endParaRPr lang="en-US" sz="900" dirty="0"/>
-          </a:p>
-        </p:txBody>
-      </p:sp>
-      <p:sp>
-        <p:nvSpPr>
-          <p:cNvPr id="50" name="Shape 48"/>
-          <p:cNvSpPr/>
-          <p:nvPr/>
-        </p:nvSpPr>
-        <p:spPr>
-          <a:xfrm>
-            <a:off x="4129430" y="4169664"/>
-            <a:ext cx="676656" cy="475488"/>
-          </a:xfrm>
-          <a:prstGeom prst="rect">
-            <a:avLst>
-              <a:gd name="adj" fmla="val 7692"/>
-            </a:avLst>
-          </a:prstGeom>
-          <a:solidFill>
-            <a:srgbClr val="FFFFFF"/>
-          </a:solidFill>
-          <a:ln w="12700">
-            <a:solidFill>
-              <a:srgbClr val="DB2777"/>
-            </a:solidFill>
-            <a:prstDash val="solid"/>
-          </a:ln>
-        </p:spPr>
-      </p:sp>
-      <p:sp>
-        <p:nvSpPr>
-          <p:cNvPr id="51" name="Text 49"/>
-          <p:cNvSpPr/>
-          <p:nvPr/>
-        </p:nvSpPr>
-        <p:spPr>
-          <a:xfrm>
-            <a:off x="4129430" y="4169664"/>
-            <a:ext cx="676656" cy="475488"/>
-          </a:xfrm>
-          <a:prstGeom prst="rect">
-            <a:avLst/>
-          </a:prstGeom>
-          <a:noFill/>
-          <a:ln/>
-        </p:spPr>
-        <p:txBody>
-          <a:bodyPr wrap="square" lIns="0" tIns="0" rIns="0" bIns="0" rtlCol="0" anchor="ctr"/>
-          <a:lstStyle/>
-          <a:p>
-            <a:pPr algn="ctr" indent="0" marL="0">
-              <a:buNone/>
-            </a:pPr>
-            <a:r>
-              <a:rPr lang="en-US" sz="900" b="1" dirty="0">
-                <a:solidFill>
-                  <a:srgbClr val="9D174D"/>
-                </a:solidFill>
-                <a:latin typeface="Trebuchet MS" pitchFamily="34" charset="0"/>
-                <a:ea typeface="Trebuchet MS" pitchFamily="34" charset="-122"/>
-                <a:cs typeface="Trebuchet MS" pitchFamily="34" charset="-120"/>
-              </a:rPr>
-              <a:t>g</a:t>
-            </a:r>
-            <a:endParaRPr lang="en-US" sz="900" dirty="0"/>
-          </a:p>
-        </p:txBody>
-      </p:sp>
-      <p:sp>
-        <p:nvSpPr>
-          <p:cNvPr id="52" name="Shape 50"/>
-          <p:cNvSpPr/>
-          <p:nvPr/>
-        </p:nvSpPr>
-        <p:spPr>
-          <a:xfrm>
-            <a:off x="4855464" y="4169664"/>
-            <a:ext cx="676656" cy="475488"/>
-          </a:xfrm>
-          <a:prstGeom prst="rect">
-            <a:avLst>
-              <a:gd name="adj" fmla="val 7692"/>
-            </a:avLst>
-          </a:prstGeom>
-          <a:solidFill>
-            <a:srgbClr val="FFFFFF"/>
-          </a:solidFill>
-          <a:ln w="12700">
-            <a:solidFill>
-              <a:srgbClr val="DB2777"/>
-            </a:solidFill>
-            <a:prstDash val="solid"/>
-          </a:ln>
-        </p:spPr>
-      </p:sp>
-      <p:sp>
-        <p:nvSpPr>
-          <p:cNvPr id="53" name="Text 51"/>
-          <p:cNvSpPr/>
-          <p:nvPr/>
-        </p:nvSpPr>
-        <p:spPr>
-          <a:xfrm>
-            <a:off x="4855464" y="4169664"/>
-            <a:ext cx="676656" cy="475488"/>
-          </a:xfrm>
-          <a:prstGeom prst="rect">
-            <a:avLst/>
-          </a:prstGeom>
-          <a:noFill/>
-          <a:ln/>
-        </p:spPr>
-        <p:txBody>
-          <a:bodyPr wrap="square" lIns="0" tIns="0" rIns="0" bIns="0" rtlCol="0" anchor="ctr"/>
-          <a:lstStyle/>
-          <a:p>
-            <a:pPr algn="ctr" indent="0" marL="0">
-              <a:buNone/>
-            </a:pPr>
-            <a:r>
-              <a:rPr lang="en-US" sz="900" b="1" dirty="0">
-                <a:solidFill>
-                  <a:srgbClr val="9D174D"/>
-                </a:solidFill>
-                <a:latin typeface="Trebuchet MS" pitchFamily="34" charset="0"/>
-                <a:ea typeface="Trebuchet MS" pitchFamily="34" charset="-122"/>
-                <a:cs typeface="Trebuchet MS" pitchFamily="34" charset="-120"/>
-              </a:rPr>
-              <a:t>r</a:t>
-            </a:r>
-            <a:endParaRPr lang="en-US" sz="900" dirty="0"/>
-          </a:p>
-        </p:txBody>
-      </p:sp>
-      <p:sp>
-        <p:nvSpPr>
-          <p:cNvPr id="54" name="Shape 52"/>
-          <p:cNvSpPr/>
-          <p:nvPr/>
-        </p:nvSpPr>
-        <p:spPr>
-          <a:xfrm>
-            <a:off x="5581498" y="4169664"/>
-            <a:ext cx="676656" cy="475488"/>
-          </a:xfrm>
-          <a:prstGeom prst="rect">
-            <a:avLst>
-              <a:gd name="adj" fmla="val 7692"/>
-            </a:avLst>
-          </a:prstGeom>
-          <a:solidFill>
-            <a:srgbClr val="FFFFFF"/>
-          </a:solidFill>
-          <a:ln w="12700">
-            <a:solidFill>
-              <a:srgbClr val="DB2777"/>
-            </a:solidFill>
-            <a:prstDash val="solid"/>
-          </a:ln>
-        </p:spPr>
-      </p:sp>
-      <p:sp>
-        <p:nvSpPr>
-          <p:cNvPr id="55" name="Text 53"/>
-          <p:cNvSpPr/>
-          <p:nvPr/>
-        </p:nvSpPr>
-        <p:spPr>
-          <a:xfrm>
-            <a:off x="5581498" y="4169664"/>
-            <a:ext cx="676656" cy="475488"/>
-          </a:xfrm>
-          <a:prstGeom prst="rect">
-            <a:avLst/>
-          </a:prstGeom>
-          <a:noFill/>
-          <a:ln/>
-        </p:spPr>
-        <p:txBody>
-          <a:bodyPr wrap="square" lIns="0" tIns="0" rIns="0" bIns="0" rtlCol="0" anchor="ctr"/>
-          <a:lstStyle/>
-          <a:p>
-            <a:pPr algn="ctr" indent="0" marL="0">
-              <a:buNone/>
-            </a:pPr>
-            <a:r>
-              <a:rPr lang="en-US" sz="900" b="1" dirty="0">
-                <a:solidFill>
-                  <a:srgbClr val="9D174D"/>
-                </a:solidFill>
-                <a:latin typeface="Trebuchet MS" pitchFamily="34" charset="0"/>
-                <a:ea typeface="Trebuchet MS" pitchFamily="34" charset="-122"/>
-                <a:cs typeface="Trebuchet MS" pitchFamily="34" charset="-120"/>
-              </a:rPr>
-              <a:t>a</a:t>
-            </a:r>
-            <a:endParaRPr lang="en-US" sz="900" dirty="0"/>
-          </a:p>
-        </p:txBody>
-      </p:sp>
-      <p:sp>
-        <p:nvSpPr>
-          <p:cNvPr id="56" name="Shape 54"/>
-          <p:cNvSpPr/>
-          <p:nvPr/>
-        </p:nvSpPr>
-        <p:spPr>
-          <a:xfrm>
-            <a:off x="6307531" y="4169664"/>
-            <a:ext cx="676656" cy="475488"/>
-          </a:xfrm>
-          <a:prstGeom prst="rect">
-            <a:avLst>
-              <a:gd name="adj" fmla="val 7692"/>
-            </a:avLst>
-          </a:prstGeom>
-          <a:solidFill>
-            <a:srgbClr val="FFFFFF"/>
-          </a:solidFill>
-          <a:ln w="12700">
-            <a:solidFill>
-              <a:srgbClr val="DB2777"/>
-            </a:solidFill>
-            <a:prstDash val="solid"/>
-          </a:ln>
-        </p:spPr>
-      </p:sp>
-      <p:sp>
-        <p:nvSpPr>
-          <p:cNvPr id="57" name="Text 55"/>
-          <p:cNvSpPr/>
-          <p:nvPr/>
-        </p:nvSpPr>
-        <p:spPr>
-          <a:xfrm>
-            <a:off x="6307531" y="4169664"/>
-            <a:ext cx="676656" cy="475488"/>
-          </a:xfrm>
-          <a:prstGeom prst="rect">
-            <a:avLst/>
-          </a:prstGeom>
-          <a:noFill/>
-          <a:ln/>
-        </p:spPr>
-        <p:txBody>
-          <a:bodyPr wrap="square" lIns="0" tIns="0" rIns="0" bIns="0" rtlCol="0" anchor="ctr"/>
-          <a:lstStyle/>
-          <a:p>
-            <a:pPr algn="ctr" indent="0" marL="0">
-              <a:buNone/>
-            </a:pPr>
-            <a:r>
-              <a:rPr lang="en-US" sz="900" b="1" dirty="0">
-                <a:solidFill>
-                  <a:srgbClr val="9D174D"/>
-                </a:solidFill>
-                <a:latin typeface="Trebuchet MS" pitchFamily="34" charset="0"/>
-                <a:ea typeface="Trebuchet MS" pitchFamily="34" charset="-122"/>
-                <a:cs typeface="Trebuchet MS" pitchFamily="34" charset="-120"/>
-              </a:rPr>
-              <a:t>n</a:t>
-            </a:r>
-            <a:endParaRPr lang="en-US" sz="900" dirty="0"/>
-          </a:p>
-        </p:txBody>
-      </p:sp>
-      <p:sp>
-        <p:nvSpPr>
-          <p:cNvPr id="58" name="Shape 56"/>
-          <p:cNvSpPr/>
-          <p:nvPr/>
-        </p:nvSpPr>
-        <p:spPr>
-          <a:xfrm>
-            <a:off x="7033565" y="4169664"/>
-            <a:ext cx="676656" cy="475488"/>
-          </a:xfrm>
-          <a:prstGeom prst="rect">
-            <a:avLst>
-              <a:gd name="adj" fmla="val 7692"/>
-            </a:avLst>
-          </a:prstGeom>
-          <a:solidFill>
-            <a:srgbClr val="FFFFFF"/>
-          </a:solidFill>
-          <a:ln w="12700">
-            <a:solidFill>
-              <a:srgbClr val="DB2777"/>
-            </a:solidFill>
-            <a:prstDash val="solid"/>
-          </a:ln>
-        </p:spPr>
-      </p:sp>
-      <p:sp>
-        <p:nvSpPr>
-          <p:cNvPr id="59" name="Text 57"/>
-          <p:cNvSpPr/>
-          <p:nvPr/>
-        </p:nvSpPr>
-        <p:spPr>
-          <a:xfrm>
-            <a:off x="7033565" y="4169664"/>
-            <a:ext cx="676656" cy="475488"/>
-          </a:xfrm>
-          <a:prstGeom prst="rect">
-            <a:avLst/>
-          </a:prstGeom>
-          <a:noFill/>
-          <a:ln/>
-        </p:spPr>
-        <p:txBody>
-          <a:bodyPr wrap="square" lIns="0" tIns="0" rIns="0" bIns="0" rtlCol="0" anchor="ctr"/>
-          <a:lstStyle/>
-          <a:p>
-            <a:pPr algn="ctr" indent="0" marL="0">
-              <a:buNone/>
-            </a:pPr>
-            <a:r>
-              <a:rPr lang="en-US" sz="900" b="1" dirty="0">
-                <a:solidFill>
-                  <a:srgbClr val="9D174D"/>
-                </a:solidFill>
-                <a:latin typeface="Trebuchet MS" pitchFamily="34" charset="0"/>
-                <a:ea typeface="Trebuchet MS" pitchFamily="34" charset="-122"/>
-                <a:cs typeface="Trebuchet MS" pitchFamily="34" charset="-120"/>
-              </a:rPr>
-              <a:t>t</a:t>
-            </a:r>
-            <a:endParaRPr lang="en-US" sz="900" dirty="0"/>
-          </a:p>
-        </p:txBody>
-      </p:sp>
-      <p:sp>
-        <p:nvSpPr>
-          <p:cNvPr id="60" name="Shape 58"/>
-          <p:cNvSpPr/>
-          <p:nvPr/>
-        </p:nvSpPr>
-        <p:spPr>
-          <a:xfrm>
-            <a:off x="7759598" y="4169664"/>
-            <a:ext cx="676656" cy="475488"/>
-          </a:xfrm>
-          <a:prstGeom prst="rect">
-            <a:avLst>
-              <a:gd name="adj" fmla="val 7692"/>
-            </a:avLst>
-          </a:prstGeom>
-          <a:solidFill>
-            <a:srgbClr val="FFFFFF"/>
-          </a:solidFill>
-          <a:ln w="12700">
-            <a:solidFill>
-              <a:srgbClr val="DB2777"/>
-            </a:solidFill>
-            <a:prstDash val="solid"/>
-          </a:ln>
-        </p:spPr>
-      </p:sp>
-      <p:sp>
-        <p:nvSpPr>
-          <p:cNvPr id="61" name="Text 59"/>
-          <p:cNvSpPr/>
-          <p:nvPr/>
-        </p:nvSpPr>
-        <p:spPr>
-          <a:xfrm>
-            <a:off x="7759598" y="4169664"/>
-            <a:ext cx="676656" cy="475488"/>
-          </a:xfrm>
-          <a:prstGeom prst="rect">
-            <a:avLst/>
-          </a:prstGeom>
-          <a:noFill/>
-          <a:ln/>
-        </p:spPr>
-        <p:txBody>
-          <a:bodyPr wrap="square" lIns="0" tIns="0" rIns="0" bIns="0" rtlCol="0" anchor="ctr"/>
-          <a:lstStyle/>
-          <a:p>
-            <a:pPr algn="ctr" indent="0" marL="0">
-              <a:buNone/>
-            </a:pPr>
-            <a:r>
-              <a:rPr lang="en-US" sz="900" b="1" dirty="0">
-                <a:solidFill>
-                  <a:srgbClr val="9D174D"/>
-                </a:solidFill>
-                <a:latin typeface="Trebuchet MS" pitchFamily="34" charset="0"/>
-                <a:ea typeface="Trebuchet MS" pitchFamily="34" charset="-122"/>
-                <a:cs typeface="Trebuchet MS" pitchFamily="34" charset="-120"/>
-              </a:rPr>
-              <a:t>s</a:t>
+              <a:t>y</a:t>
             </a:r>
             <a:endParaRPr lang="en-US" sz="900" dirty="0"/>
           </a:p>
@@ -25684,7 +24631,7 @@
                 <a:ea typeface="Calibri" pitchFamily="34" charset="-122"/>
                 <a:cs typeface="Calibri" pitchFamily="34" charset="-120"/>
               </a:rPr>
-              <a:t>out, away from</a:t>
+              <a:t>out of or away from</a:t>
             </a:r>
             <a:endParaRPr lang="en-US" sz="850" dirty="0"/>
           </a:p>
@@ -25796,7 +24743,7 @@
                 <a:ea typeface="Calibri" pitchFamily="34" charset="-122"/>
                 <a:cs typeface="Calibri" pitchFamily="34" charset="-120"/>
               </a:rPr>
-              <a:t>to move from one place</a:t>
+              <a:t>move from one place</a:t>
             </a:r>
             <a:endParaRPr lang="en-US" sz="850" dirty="0"/>
           </a:p>
@@ -27388,7 +26335,7 @@
                 <a:ea typeface="Calibri" pitchFamily="34" charset="-122"/>
                 <a:cs typeface="Calibri" pitchFamily="34" charset="-120"/>
               </a:rPr>
-              <a:t>out, away from</a:t>
+              <a:t>out of or away from</a:t>
             </a:r>
             <a:endParaRPr lang="en-US" sz="850" dirty="0"/>
           </a:p>
@@ -27500,7 +26447,7 @@
                 <a:ea typeface="Calibri" pitchFamily="34" charset="-122"/>
                 <a:cs typeface="Calibri" pitchFamily="34" charset="-120"/>
               </a:rPr>
-              <a:t>to move from one place</a:t>
+              <a:t>move from one place</a:t>
             </a:r>
             <a:endParaRPr lang="en-US" sz="850" dirty="0"/>
           </a:p>
@@ -27659,7 +26606,7 @@
                 <a:ea typeface="Trebuchet MS" pitchFamily="34" charset="-122"/>
                 <a:cs typeface="Trebuchet MS" pitchFamily="34" charset="-120"/>
               </a:rPr>
-              <a:t>em</a:t>
+              <a:t>e</a:t>
             </a:r>
             <a:endParaRPr lang="en-US" sz="1400" dirty="0"/>
           </a:p>
@@ -27764,7 +26711,7 @@
                 <a:ea typeface="Trebuchet MS" pitchFamily="34" charset="-122"/>
                 <a:cs typeface="Trebuchet MS" pitchFamily="34" charset="-120"/>
               </a:rPr>
-              <a:t>i</a:t>
+              <a:t>mi</a:t>
             </a:r>
             <a:endParaRPr lang="en-US" sz="1400" dirty="0"/>
           </a:p>
@@ -28610,7 +27557,7 @@
                 <a:ea typeface="Calibri" pitchFamily="34" charset="-122"/>
                 <a:cs typeface="Calibri" pitchFamily="34" charset="-120"/>
               </a:rPr>
-              <a:t>out, away from</a:t>
+              <a:t>out of or away from</a:t>
             </a:r>
             <a:endParaRPr lang="en-US" sz="850" dirty="0"/>
           </a:p>
@@ -28722,7 +27669,7 @@
                 <a:ea typeface="Calibri" pitchFamily="34" charset="-122"/>
                 <a:cs typeface="Calibri" pitchFamily="34" charset="-120"/>
               </a:rPr>
-              <a:t>to move from one place</a:t>
+              <a:t>move from one place</a:t>
             </a:r>
             <a:endParaRPr lang="en-US" sz="850" dirty="0"/>
           </a:p>
@@ -28881,7 +27828,7 @@
                 <a:ea typeface="Trebuchet MS" pitchFamily="34" charset="-122"/>
                 <a:cs typeface="Trebuchet MS" pitchFamily="34" charset="-120"/>
               </a:rPr>
-              <a:t>em</a:t>
+              <a:t>e</a:t>
             </a:r>
             <a:endParaRPr lang="en-US" sz="1400" dirty="0"/>
           </a:p>
@@ -28986,7 +27933,7 @@
                 <a:ea typeface="Trebuchet MS" pitchFamily="34" charset="-122"/>
                 <a:cs typeface="Trebuchet MS" pitchFamily="34" charset="-120"/>
               </a:rPr>
-              <a:t>i</a:t>
+              <a:t>mi</a:t>
             </a:r>
             <a:endParaRPr lang="en-US" sz="1400" dirty="0"/>
           </a:p>
@@ -29198,7 +28145,7 @@
         </p:nvSpPr>
         <p:spPr>
           <a:xfrm>
-            <a:off x="2023872" y="4169664"/>
+            <a:off x="2254649" y="4169664"/>
             <a:ext cx="685800" cy="475488"/>
           </a:xfrm>
           <a:prstGeom prst="rect">
@@ -29225,7 +28172,7 @@
         </p:nvSpPr>
         <p:spPr>
           <a:xfrm>
-            <a:off x="2023872" y="4169664"/>
+            <a:off x="2254649" y="4169664"/>
             <a:ext cx="685800" cy="475488"/>
           </a:xfrm>
           <a:prstGeom prst="rect">
@@ -29264,7 +28211,7 @@
         </p:nvSpPr>
         <p:spPr>
           <a:xfrm>
-            <a:off x="2831592" y="4169664"/>
+            <a:off x="3293146" y="4169664"/>
             <a:ext cx="685800" cy="475488"/>
           </a:xfrm>
           <a:prstGeom prst="rect">
@@ -29291,7 +28238,7 @@
         </p:nvSpPr>
         <p:spPr>
           <a:xfrm>
-            <a:off x="2831592" y="4169664"/>
+            <a:off x="3293146" y="4169664"/>
             <a:ext cx="685800" cy="475488"/>
           </a:xfrm>
           <a:prstGeom prst="rect">
@@ -29330,7 +28277,7 @@
         </p:nvSpPr>
         <p:spPr>
           <a:xfrm>
-            <a:off x="3639312" y="4169664"/>
+            <a:off x="4331643" y="4169664"/>
             <a:ext cx="685800" cy="475488"/>
           </a:xfrm>
           <a:prstGeom prst="rect">
@@ -29357,7 +28304,7 @@
         </p:nvSpPr>
         <p:spPr>
           <a:xfrm>
-            <a:off x="3639312" y="4169664"/>
+            <a:off x="4331643" y="4169664"/>
             <a:ext cx="685800" cy="475488"/>
           </a:xfrm>
           <a:prstGeom prst="rect">
@@ -29396,7 +28343,7 @@
         </p:nvSpPr>
         <p:spPr>
           <a:xfrm>
-            <a:off x="4447032" y="4169664"/>
+            <a:off x="5370141" y="4169664"/>
             <a:ext cx="685800" cy="475488"/>
           </a:xfrm>
           <a:prstGeom prst="rect">
@@ -29423,7 +28370,7 @@
         </p:nvSpPr>
         <p:spPr>
           <a:xfrm>
-            <a:off x="4447032" y="4169664"/>
+            <a:off x="5370141" y="4169664"/>
             <a:ext cx="685800" cy="475488"/>
           </a:xfrm>
           <a:prstGeom prst="rect">
@@ -29448,7 +28395,7 @@
                 <a:ea typeface="Trebuchet MS" pitchFamily="34" charset="-122"/>
                 <a:cs typeface="Trebuchet MS" pitchFamily="34" charset="-120"/>
               </a:rPr>
-              <a:t>g</a:t>
+              <a:t>gr</a:t>
             </a:r>
             <a:endParaRPr lang="en-US" sz="900" dirty="0"/>
           </a:p>
@@ -29462,7 +28409,7 @@
         </p:nvSpPr>
         <p:spPr>
           <a:xfrm>
-            <a:off x="5254752" y="4169664"/>
+            <a:off x="6408638" y="4169664"/>
             <a:ext cx="685800" cy="475488"/>
           </a:xfrm>
           <a:prstGeom prst="rect">
@@ -29489,7 +28436,7 @@
         </p:nvSpPr>
         <p:spPr>
           <a:xfrm>
-            <a:off x="5254752" y="4169664"/>
+            <a:off x="6408638" y="4169664"/>
             <a:ext cx="685800" cy="475488"/>
           </a:xfrm>
           <a:prstGeom prst="rect">
@@ -29514,7 +28461,7 @@
                 <a:ea typeface="Trebuchet MS" pitchFamily="34" charset="-122"/>
                 <a:cs typeface="Trebuchet MS" pitchFamily="34" charset="-120"/>
               </a:rPr>
-              <a:t>r</a:t>
+              <a:t>a</a:t>
             </a:r>
             <a:endParaRPr lang="en-US" sz="900" dirty="0"/>
           </a:p>
@@ -29528,7 +28475,7 @@
         </p:nvSpPr>
         <p:spPr>
           <a:xfrm>
-            <a:off x="6062472" y="4169664"/>
+            <a:off x="7447135" y="4169664"/>
             <a:ext cx="685800" cy="475488"/>
           </a:xfrm>
           <a:prstGeom prst="rect">
@@ -29555,7 +28502,7 @@
         </p:nvSpPr>
         <p:spPr>
           <a:xfrm>
-            <a:off x="6062472" y="4169664"/>
+            <a:off x="7447135" y="4169664"/>
             <a:ext cx="685800" cy="475488"/>
           </a:xfrm>
           <a:prstGeom prst="rect">
@@ -29580,139 +28527,7 @@
                 <a:ea typeface="Trebuchet MS" pitchFamily="34" charset="-122"/>
                 <a:cs typeface="Trebuchet MS" pitchFamily="34" charset="-120"/>
               </a:rPr>
-              <a:t>a</a:t>
-            </a:r>
-            <a:endParaRPr lang="en-US" sz="900" dirty="0"/>
-          </a:p>
-        </p:txBody>
-      </p:sp>
-      <p:sp>
-        <p:nvSpPr>
-          <p:cNvPr id="48" name="Shape 46"/>
-          <p:cNvSpPr/>
-          <p:nvPr/>
-        </p:nvSpPr>
-        <p:spPr>
-          <a:xfrm>
-            <a:off x="6870192" y="4169664"/>
-            <a:ext cx="685800" cy="475488"/>
-          </a:xfrm>
-          <a:prstGeom prst="rect">
-            <a:avLst>
-              <a:gd name="adj" fmla="val 7692"/>
-            </a:avLst>
-          </a:prstGeom>
-          <a:solidFill>
-            <a:srgbClr val="FFFFFF"/>
-          </a:solidFill>
-          <a:ln w="12700">
-            <a:solidFill>
-              <a:srgbClr val="DB2777"/>
-            </a:solidFill>
-            <a:prstDash val="solid"/>
-          </a:ln>
-        </p:spPr>
-      </p:sp>
-      <p:sp>
-        <p:nvSpPr>
-          <p:cNvPr id="49" name="Text 47"/>
-          <p:cNvSpPr/>
-          <p:nvPr/>
-        </p:nvSpPr>
-        <p:spPr>
-          <a:xfrm>
-            <a:off x="6870192" y="4169664"/>
-            <a:ext cx="685800" cy="475488"/>
-          </a:xfrm>
-          <a:prstGeom prst="rect">
-            <a:avLst/>
-          </a:prstGeom>
-          <a:noFill/>
-          <a:ln/>
-        </p:spPr>
-        <p:txBody>
-          <a:bodyPr wrap="square" lIns="0" tIns="0" rIns="0" bIns="0" rtlCol="0" anchor="ctr"/>
-          <a:lstStyle/>
-          <a:p>
-            <a:pPr algn="ctr" indent="0" marL="0">
-              <a:buNone/>
-            </a:pPr>
-            <a:r>
-              <a:rPr lang="en-US" sz="900" b="1" dirty="0">
-                <a:solidFill>
-                  <a:srgbClr val="9D174D"/>
-                </a:solidFill>
-                <a:latin typeface="Trebuchet MS" pitchFamily="34" charset="0"/>
-                <a:ea typeface="Trebuchet MS" pitchFamily="34" charset="-122"/>
-                <a:cs typeface="Trebuchet MS" pitchFamily="34" charset="-120"/>
-              </a:rPr>
-              <a:t>t</a:t>
-            </a:r>
-            <a:endParaRPr lang="en-US" sz="900" dirty="0"/>
-          </a:p>
-        </p:txBody>
-      </p:sp>
-      <p:sp>
-        <p:nvSpPr>
-          <p:cNvPr id="50" name="Shape 48"/>
-          <p:cNvSpPr/>
-          <p:nvPr/>
-        </p:nvSpPr>
-        <p:spPr>
-          <a:xfrm>
-            <a:off x="7677912" y="4169664"/>
-            <a:ext cx="685800" cy="475488"/>
-          </a:xfrm>
-          <a:prstGeom prst="rect">
-            <a:avLst>
-              <a:gd name="adj" fmla="val 7692"/>
-            </a:avLst>
-          </a:prstGeom>
-          <a:solidFill>
-            <a:srgbClr val="FFFFFF"/>
-          </a:solidFill>
-          <a:ln w="12700">
-            <a:solidFill>
-              <a:srgbClr val="DB2777"/>
-            </a:solidFill>
-            <a:prstDash val="solid"/>
-          </a:ln>
-        </p:spPr>
-      </p:sp>
-      <p:sp>
-        <p:nvSpPr>
-          <p:cNvPr id="51" name="Text 49"/>
-          <p:cNvSpPr/>
-          <p:nvPr/>
-        </p:nvSpPr>
-        <p:spPr>
-          <a:xfrm>
-            <a:off x="7677912" y="4169664"/>
-            <a:ext cx="685800" cy="475488"/>
-          </a:xfrm>
-          <a:prstGeom prst="rect">
-            <a:avLst/>
-          </a:prstGeom>
-          <a:noFill/>
-          <a:ln/>
-        </p:spPr>
-        <p:txBody>
-          <a:bodyPr wrap="square" lIns="0" tIns="0" rIns="0" bIns="0" rtlCol="0" anchor="ctr"/>
-          <a:lstStyle/>
-          <a:p>
-            <a:pPr algn="ctr" indent="0" marL="0">
-              <a:buNone/>
-            </a:pPr>
-            <a:r>
-              <a:rPr lang="en-US" sz="900" b="1" dirty="0">
-                <a:solidFill>
-                  <a:srgbClr val="9D174D"/>
-                </a:solidFill>
-                <a:latin typeface="Trebuchet MS" pitchFamily="34" charset="0"/>
-                <a:ea typeface="Trebuchet MS" pitchFamily="34" charset="-122"/>
-                <a:cs typeface="Trebuchet MS" pitchFamily="34" charset="-120"/>
-              </a:rPr>
-              <a:t>e</a:t>
+              <a:t>te</a:t>
             </a:r>
             <a:endParaRPr lang="en-US" sz="900" dirty="0"/>
           </a:p>
@@ -30143,7 +28958,7 @@
                 <a:ea typeface="Trebuchet MS" pitchFamily="34" charset="-122"/>
                 <a:cs typeface="Trebuchet MS" pitchFamily="34" charset="-120"/>
               </a:rPr>
-              <a:t>migration</a:t>
+              <a:t>transmigration</a:t>
             </a:r>
             <a:endParaRPr lang="en-US" sz="2800" dirty="0"/>
           </a:p>
@@ -30970,7 +29785,7 @@
                 <a:ea typeface="Trebuchet MS" pitchFamily="34" charset="-122"/>
                 <a:cs typeface="Trebuchet MS" pitchFamily="34" charset="-120"/>
               </a:rPr>
-              <a:t>migration</a:t>
+              <a:t>transmigration</a:t>
             </a:r>
             <a:endParaRPr lang="en-US" sz="2800" dirty="0"/>
           </a:p>
@@ -31050,7 +29865,7 @@
         </p:nvSpPr>
         <p:spPr>
           <a:xfrm>
-            <a:off x="2938272" y="2258568"/>
+            <a:off x="2221992" y="2258568"/>
             <a:ext cx="1828800" cy="292608"/>
           </a:xfrm>
           <a:prstGeom prst="rect">
@@ -31059,11 +29874,11 @@
             </a:avLst>
           </a:prstGeom>
           <a:solidFill>
-            <a:srgbClr val="CCFBF1"/>
+            <a:srgbClr val="DDD6FE"/>
           </a:solidFill>
           <a:ln w="19050">
             <a:solidFill>
-              <a:srgbClr val="0D9488"/>
+              <a:srgbClr val="7C3AED"/>
             </a:solidFill>
             <a:prstDash val="solid"/>
           </a:ln>
@@ -31084,7 +29899,7 @@
         </p:nvSpPr>
         <p:spPr>
           <a:xfrm>
-            <a:off x="2938272" y="2258568"/>
+            <a:off x="2221992" y="2258568"/>
             <a:ext cx="1828800" cy="292608"/>
           </a:xfrm>
           <a:prstGeom prst="rect">
@@ -31103,13 +29918,13 @@
             <a:r>
               <a:rPr lang="en-US" sz="1300" b="1" dirty="0">
                 <a:solidFill>
-                  <a:srgbClr val="0F766E"/>
+                  <a:srgbClr val="4C1D95"/>
                 </a:solidFill>
                 <a:latin typeface="Trebuchet MS" pitchFamily="34" charset="0"/>
                 <a:ea typeface="Trebuchet MS" pitchFamily="34" charset="-122"/>
                 <a:cs typeface="Trebuchet MS" pitchFamily="34" charset="-120"/>
               </a:rPr>
-              <a:t>migrate</a:t>
+              <a:t>trans</a:t>
             </a:r>
             <a:endParaRPr lang="en-US" sz="1300" dirty="0"/>
           </a:p>
@@ -31123,7 +29938,7 @@
         </p:nvSpPr>
         <p:spPr>
           <a:xfrm>
-            <a:off x="2938272" y="2569464"/>
+            <a:off x="2221992" y="2569464"/>
             <a:ext cx="1828800" cy="201168"/>
           </a:xfrm>
           <a:prstGeom prst="rect">
@@ -31148,7 +29963,7 @@
                 <a:ea typeface="Calibri" pitchFamily="34" charset="-122"/>
                 <a:cs typeface="Calibri" pitchFamily="34" charset="-120"/>
               </a:rPr>
-              <a:t>to move from one place</a:t>
+              <a:t>across or through</a:t>
             </a:r>
             <a:endParaRPr lang="en-US" sz="850" dirty="0"/>
           </a:p>
@@ -31156,52 +29971,13 @@
       </p:sp>
       <p:sp>
         <p:nvSpPr>
-          <p:cNvPr id="19" name="Text 17"/>
-          <p:cNvSpPr/>
-          <p:nvPr/>
-        </p:nvSpPr>
-        <p:spPr>
-          <a:xfrm>
-            <a:off x="2938272" y="2752344"/>
-            <a:ext cx="1828800" cy="182880"/>
-          </a:xfrm>
-          <a:prstGeom prst="rect">
-            <a:avLst/>
-          </a:prstGeom>
-          <a:noFill/>
-          <a:ln/>
-        </p:spPr>
-        <p:txBody>
-          <a:bodyPr wrap="square" lIns="0" tIns="0" rIns="0" bIns="0" rtlCol="0" anchor="t"/>
-          <a:lstStyle/>
-          <a:p>
-            <a:pPr algn="ctr" indent="0" marL="0">
-              <a:buNone/>
-            </a:pPr>
-            <a:r>
-              <a:rPr lang="en-US" sz="700" i="1" dirty="0">
-                <a:solidFill>
-                  <a:srgbClr val="94A3B8"/>
-                </a:solidFill>
-                <a:latin typeface="Calibri" pitchFamily="34" charset="0"/>
-                <a:ea typeface="Calibri" pitchFamily="34" charset="-122"/>
-                <a:cs typeface="Calibri" pitchFamily="34" charset="-120"/>
-              </a:rPr>
-              <a:t>'e' dropped before vowel suffix</a:t>
-            </a:r>
-            <a:endParaRPr lang="en-US" sz="700" dirty="0"/>
-          </a:p>
-        </p:txBody>
-      </p:sp>
-      <p:sp>
-        <p:nvSpPr>
-          <p:cNvPr id="20" name="Shape 18"/>
-          <p:cNvSpPr/>
-          <p:nvPr/>
-        </p:nvSpPr>
-        <p:spPr>
-          <a:xfrm>
-            <a:off x="5803392" y="2258568"/>
+          <p:cNvPr id="19" name="Shape 17"/>
+          <p:cNvSpPr/>
+          <p:nvPr/>
+        </p:nvSpPr>
+        <p:spPr>
+          <a:xfrm>
+            <a:off x="4370832" y="2258568"/>
             <a:ext cx="1828800" cy="292608"/>
           </a:xfrm>
           <a:prstGeom prst="rect">
@@ -31210,11 +29986,11 @@
             </a:avLst>
           </a:prstGeom>
           <a:solidFill>
-            <a:srgbClr val="FCE7F3"/>
+            <a:srgbClr val="CCFBF1"/>
           </a:solidFill>
           <a:ln w="19050">
             <a:solidFill>
-              <a:srgbClr val="DB2777"/>
+              <a:srgbClr val="0D9488"/>
             </a:solidFill>
             <a:prstDash val="solid"/>
           </a:ln>
@@ -31229,13 +30005,13 @@
       </p:sp>
       <p:sp>
         <p:nvSpPr>
-          <p:cNvPr id="21" name="Text 19"/>
-          <p:cNvSpPr/>
-          <p:nvPr/>
-        </p:nvSpPr>
-        <p:spPr>
-          <a:xfrm>
-            <a:off x="5803392" y="2258568"/>
+          <p:cNvPr id="20" name="Text 18"/>
+          <p:cNvSpPr/>
+          <p:nvPr/>
+        </p:nvSpPr>
+        <p:spPr>
+          <a:xfrm>
+            <a:off x="4370832" y="2258568"/>
             <a:ext cx="1828800" cy="292608"/>
           </a:xfrm>
           <a:prstGeom prst="rect">
@@ -31254,13 +30030,13 @@
             <a:r>
               <a:rPr lang="en-US" sz="1300" b="1" dirty="0">
                 <a:solidFill>
-                  <a:srgbClr val="9D174D"/>
+                  <a:srgbClr val="0F766E"/>
                 </a:solidFill>
                 <a:latin typeface="Trebuchet MS" pitchFamily="34" charset="0"/>
                 <a:ea typeface="Trebuchet MS" pitchFamily="34" charset="-122"/>
                 <a:cs typeface="Trebuchet MS" pitchFamily="34" charset="-120"/>
               </a:rPr>
-              <a:t>ion</a:t>
+              <a:t>migrate</a:t>
             </a:r>
             <a:endParaRPr lang="en-US" sz="1300" dirty="0"/>
           </a:p>
@@ -31268,13 +30044,13 @@
       </p:sp>
       <p:sp>
         <p:nvSpPr>
-          <p:cNvPr id="22" name="Text 20"/>
-          <p:cNvSpPr/>
-          <p:nvPr/>
-        </p:nvSpPr>
-        <p:spPr>
-          <a:xfrm>
-            <a:off x="5803392" y="2569464"/>
+          <p:cNvPr id="21" name="Text 19"/>
+          <p:cNvSpPr/>
+          <p:nvPr/>
+        </p:nvSpPr>
+        <p:spPr>
+          <a:xfrm>
+            <a:off x="4370832" y="2569464"/>
             <a:ext cx="1828800" cy="201168"/>
           </a:xfrm>
           <a:prstGeom prst="rect">
@@ -31299,7 +30075,7 @@
                 <a:ea typeface="Calibri" pitchFamily="34" charset="-122"/>
                 <a:cs typeface="Calibri" pitchFamily="34" charset="-120"/>
               </a:rPr>
-              <a:t>the act or process of</a:t>
+              <a:t>move from one place</a:t>
             </a:r>
             <a:endParaRPr lang="en-US" sz="850" dirty="0"/>
           </a:p>
@@ -31307,7 +30083,158 @@
       </p:sp>
       <p:sp>
         <p:nvSpPr>
+          <p:cNvPr id="22" name="Text 20"/>
+          <p:cNvSpPr/>
+          <p:nvPr/>
+        </p:nvSpPr>
+        <p:spPr>
+          <a:xfrm>
+            <a:off x="4370832" y="2752344"/>
+            <a:ext cx="1828800" cy="182880"/>
+          </a:xfrm>
+          <a:prstGeom prst="rect">
+            <a:avLst/>
+          </a:prstGeom>
+          <a:noFill/>
+          <a:ln/>
+        </p:spPr>
+        <p:txBody>
+          <a:bodyPr wrap="square" lIns="0" tIns="0" rIns="0" bIns="0" rtlCol="0" anchor="t"/>
+          <a:lstStyle/>
+          <a:p>
+            <a:pPr algn="ctr" indent="0" marL="0">
+              <a:buNone/>
+            </a:pPr>
+            <a:r>
+              <a:rPr lang="en-US" sz="700" i="1" dirty="0">
+                <a:solidFill>
+                  <a:srgbClr val="94A3B8"/>
+                </a:solidFill>
+                <a:latin typeface="Calibri" pitchFamily="34" charset="0"/>
+                <a:ea typeface="Calibri" pitchFamily="34" charset="-122"/>
+                <a:cs typeface="Calibri" pitchFamily="34" charset="-120"/>
+              </a:rPr>
+              <a:t>'e' dropped before vowel suffix</a:t>
+            </a:r>
+            <a:endParaRPr lang="en-US" sz="700" dirty="0"/>
+          </a:p>
+        </p:txBody>
+      </p:sp>
+      <p:sp>
+        <p:nvSpPr>
           <p:cNvPr id="23" name="Shape 21"/>
+          <p:cNvSpPr/>
+          <p:nvPr/>
+        </p:nvSpPr>
+        <p:spPr>
+          <a:xfrm>
+            <a:off x="6519672" y="2258568"/>
+            <a:ext cx="1828800" cy="292608"/>
+          </a:xfrm>
+          <a:prstGeom prst="rect">
+            <a:avLst>
+              <a:gd name="adj" fmla="val 25000"/>
+            </a:avLst>
+          </a:prstGeom>
+          <a:solidFill>
+            <a:srgbClr val="FCE7F3"/>
+          </a:solidFill>
+          <a:ln w="19050">
+            <a:solidFill>
+              <a:srgbClr val="DB2777"/>
+            </a:solidFill>
+            <a:prstDash val="solid"/>
+          </a:ln>
+          <a:effectLst>
+            <a:outerShdw sx="100000" sy="100000" kx="0" ky="0" algn="bl" rotWithShape="0" blurRad="101600" dist="38100" dir="8100000">
+              <a:srgbClr val="000000">
+                <a:alpha val="12000"/>
+              </a:srgbClr>
+            </a:outerShdw>
+          </a:effectLst>
+        </p:spPr>
+      </p:sp>
+      <p:sp>
+        <p:nvSpPr>
+          <p:cNvPr id="24" name="Text 22"/>
+          <p:cNvSpPr/>
+          <p:nvPr/>
+        </p:nvSpPr>
+        <p:spPr>
+          <a:xfrm>
+            <a:off x="6519672" y="2258568"/>
+            <a:ext cx="1828800" cy="292608"/>
+          </a:xfrm>
+          <a:prstGeom prst="rect">
+            <a:avLst/>
+          </a:prstGeom>
+          <a:noFill/>
+          <a:ln/>
+        </p:spPr>
+        <p:txBody>
+          <a:bodyPr wrap="square" lIns="0" tIns="0" rIns="0" bIns="0" rtlCol="0" anchor="ctr"/>
+          <a:lstStyle/>
+          <a:p>
+            <a:pPr algn="ctr" indent="0" marL="0">
+              <a:buNone/>
+            </a:pPr>
+            <a:r>
+              <a:rPr lang="en-US" sz="1300" b="1" dirty="0">
+                <a:solidFill>
+                  <a:srgbClr val="9D174D"/>
+                </a:solidFill>
+                <a:latin typeface="Trebuchet MS" pitchFamily="34" charset="0"/>
+                <a:ea typeface="Trebuchet MS" pitchFamily="34" charset="-122"/>
+                <a:cs typeface="Trebuchet MS" pitchFamily="34" charset="-120"/>
+              </a:rPr>
+              <a:t>ion</a:t>
+            </a:r>
+            <a:endParaRPr lang="en-US" sz="1300" dirty="0"/>
+          </a:p>
+        </p:txBody>
+      </p:sp>
+      <p:sp>
+        <p:nvSpPr>
+          <p:cNvPr id="25" name="Text 23"/>
+          <p:cNvSpPr/>
+          <p:nvPr/>
+        </p:nvSpPr>
+        <p:spPr>
+          <a:xfrm>
+            <a:off x="6519672" y="2569464"/>
+            <a:ext cx="1828800" cy="201168"/>
+          </a:xfrm>
+          <a:prstGeom prst="rect">
+            <a:avLst/>
+          </a:prstGeom>
+          <a:noFill/>
+          <a:ln/>
+        </p:spPr>
+        <p:txBody>
+          <a:bodyPr wrap="square" lIns="0" tIns="0" rIns="0" bIns="0" rtlCol="0" anchor="t"/>
+          <a:lstStyle/>
+          <a:p>
+            <a:pPr algn="ctr" indent="0" marL="0">
+              <a:buNone/>
+            </a:pPr>
+            <a:r>
+              <a:rPr lang="en-US" sz="850" dirty="0">
+                <a:solidFill>
+                  <a:srgbClr val="475569"/>
+                </a:solidFill>
+                <a:latin typeface="Calibri" pitchFamily="34" charset="0"/>
+                <a:ea typeface="Calibri" pitchFamily="34" charset="-122"/>
+                <a:cs typeface="Calibri" pitchFamily="34" charset="-120"/>
+              </a:rPr>
+              <a:t>act or process of</a:t>
+            </a:r>
+            <a:endParaRPr lang="en-US" sz="850" dirty="0"/>
+          </a:p>
+        </p:txBody>
+      </p:sp>
+      <p:sp>
+        <p:nvSpPr>
+          <p:cNvPr id="26" name="Shape 24"/>
           <p:cNvSpPr/>
           <p:nvPr/>
         </p:nvSpPr>
@@ -31334,7 +30261,7 @@
       </p:sp>
       <p:sp>
         <p:nvSpPr>
-          <p:cNvPr id="24" name="Text 22"/>
+          <p:cNvPr id="27" name="Text 25"/>
           <p:cNvSpPr/>
           <p:nvPr/>
         </p:nvSpPr>
@@ -31373,7 +30300,7 @@
       </p:sp>
       <p:sp>
         <p:nvSpPr>
-          <p:cNvPr id="25" name="Shape 23"/>
+          <p:cNvPr id="28" name="Shape 26"/>
           <p:cNvSpPr/>
           <p:nvPr/>
         </p:nvSpPr>
@@ -31400,7 +30327,7 @@
       </p:sp>
       <p:sp>
         <p:nvSpPr>
-          <p:cNvPr id="26" name="Text 24"/>
+          <p:cNvPr id="29" name="Text 27"/>
           <p:cNvSpPr/>
           <p:nvPr/>
         </p:nvSpPr>
@@ -31439,7 +30366,7 @@
       </p:sp>
       <p:sp>
         <p:nvSpPr>
-          <p:cNvPr id="27" name="Shape 25"/>
+          <p:cNvPr id="30" name="Shape 28"/>
           <p:cNvSpPr/>
           <p:nvPr/>
         </p:nvSpPr>
@@ -31466,7 +30393,7 @@
       </p:sp>
       <p:sp>
         <p:nvSpPr>
-          <p:cNvPr id="28" name="Text 26"/>
+          <p:cNvPr id="31" name="Text 29"/>
           <p:cNvSpPr/>
           <p:nvPr/>
         </p:nvSpPr>
@@ -31505,7 +30432,7 @@
       </p:sp>
       <p:sp>
         <p:nvSpPr>
-          <p:cNvPr id="29" name="Shape 27"/>
+          <p:cNvPr id="32" name="Shape 30"/>
           <p:cNvSpPr/>
           <p:nvPr/>
         </p:nvSpPr>
@@ -31532,7 +30459,7 @@
       </p:sp>
       <p:sp>
         <p:nvSpPr>
-          <p:cNvPr id="30" name="Text 28"/>
+          <p:cNvPr id="33" name="Text 31"/>
           <p:cNvSpPr/>
           <p:nvPr/>
         </p:nvSpPr>
@@ -31994,7 +30921,7 @@
                 <a:ea typeface="Trebuchet MS" pitchFamily="34" charset="-122"/>
                 <a:cs typeface="Trebuchet MS" pitchFamily="34" charset="-120"/>
               </a:rPr>
-              <a:t>migration</a:t>
+              <a:t>transmigration</a:t>
             </a:r>
             <a:endParaRPr lang="en-US" sz="2800" dirty="0"/>
           </a:p>
@@ -32074,7 +31001,7 @@
         </p:nvSpPr>
         <p:spPr>
           <a:xfrm>
-            <a:off x="2938272" y="2258568"/>
+            <a:off x="2221992" y="2258568"/>
             <a:ext cx="1828800" cy="292608"/>
           </a:xfrm>
           <a:prstGeom prst="rect">
@@ -32083,11 +31010,11 @@
             </a:avLst>
           </a:prstGeom>
           <a:solidFill>
-            <a:srgbClr val="CCFBF1"/>
+            <a:srgbClr val="DDD6FE"/>
           </a:solidFill>
           <a:ln w="19050">
             <a:solidFill>
-              <a:srgbClr val="0D9488"/>
+              <a:srgbClr val="7C3AED"/>
             </a:solidFill>
             <a:prstDash val="solid"/>
           </a:ln>
@@ -32108,7 +31035,7 @@
         </p:nvSpPr>
         <p:spPr>
           <a:xfrm>
-            <a:off x="2938272" y="2258568"/>
+            <a:off x="2221992" y="2258568"/>
             <a:ext cx="1828800" cy="292608"/>
           </a:xfrm>
           <a:prstGeom prst="rect">
@@ -32127,13 +31054,13 @@
             <a:r>
               <a:rPr lang="en-US" sz="1300" b="1" dirty="0">
                 <a:solidFill>
-                  <a:srgbClr val="0F766E"/>
+                  <a:srgbClr val="4C1D95"/>
                 </a:solidFill>
                 <a:latin typeface="Trebuchet MS" pitchFamily="34" charset="0"/>
                 <a:ea typeface="Trebuchet MS" pitchFamily="34" charset="-122"/>
                 <a:cs typeface="Trebuchet MS" pitchFamily="34" charset="-120"/>
               </a:rPr>
-              <a:t>migrate</a:t>
+              <a:t>trans</a:t>
             </a:r>
             <a:endParaRPr lang="en-US" sz="1300" dirty="0"/>
           </a:p>
@@ -32147,7 +31074,7 @@
         </p:nvSpPr>
         <p:spPr>
           <a:xfrm>
-            <a:off x="2938272" y="2569464"/>
+            <a:off x="2221992" y="2569464"/>
             <a:ext cx="1828800" cy="201168"/>
           </a:xfrm>
           <a:prstGeom prst="rect">
@@ -32172,7 +31099,7 @@
                 <a:ea typeface="Calibri" pitchFamily="34" charset="-122"/>
                 <a:cs typeface="Calibri" pitchFamily="34" charset="-120"/>
               </a:rPr>
-              <a:t>to move from one place</a:t>
+              <a:t>across or through</a:t>
             </a:r>
             <a:endParaRPr lang="en-US" sz="850" dirty="0"/>
           </a:p>
@@ -32180,52 +31107,13 @@
       </p:sp>
       <p:sp>
         <p:nvSpPr>
-          <p:cNvPr id="19" name="Text 17"/>
-          <p:cNvSpPr/>
-          <p:nvPr/>
-        </p:nvSpPr>
-        <p:spPr>
-          <a:xfrm>
-            <a:off x="2938272" y="2752344"/>
-            <a:ext cx="1828800" cy="182880"/>
-          </a:xfrm>
-          <a:prstGeom prst="rect">
-            <a:avLst/>
-          </a:prstGeom>
-          <a:noFill/>
-          <a:ln/>
-        </p:spPr>
-        <p:txBody>
-          <a:bodyPr wrap="square" lIns="0" tIns="0" rIns="0" bIns="0" rtlCol="0" anchor="t"/>
-          <a:lstStyle/>
-          <a:p>
-            <a:pPr algn="ctr" indent="0" marL="0">
-              <a:buNone/>
-            </a:pPr>
-            <a:r>
-              <a:rPr lang="en-US" sz="700" i="1" dirty="0">
-                <a:solidFill>
-                  <a:srgbClr val="94A3B8"/>
-                </a:solidFill>
-                <a:latin typeface="Calibri" pitchFamily="34" charset="0"/>
-                <a:ea typeface="Calibri" pitchFamily="34" charset="-122"/>
-                <a:cs typeface="Calibri" pitchFamily="34" charset="-120"/>
-              </a:rPr>
-              <a:t>'e' dropped before vowel suffix</a:t>
-            </a:r>
-            <a:endParaRPr lang="en-US" sz="700" dirty="0"/>
-          </a:p>
-        </p:txBody>
-      </p:sp>
-      <p:sp>
-        <p:nvSpPr>
-          <p:cNvPr id="20" name="Shape 18"/>
-          <p:cNvSpPr/>
-          <p:nvPr/>
-        </p:nvSpPr>
-        <p:spPr>
-          <a:xfrm>
-            <a:off x="5803392" y="2258568"/>
+          <p:cNvPr id="19" name="Shape 17"/>
+          <p:cNvSpPr/>
+          <p:nvPr/>
+        </p:nvSpPr>
+        <p:spPr>
+          <a:xfrm>
+            <a:off x="4370832" y="2258568"/>
             <a:ext cx="1828800" cy="292608"/>
           </a:xfrm>
           <a:prstGeom prst="rect">
@@ -32234,11 +31122,11 @@
             </a:avLst>
           </a:prstGeom>
           <a:solidFill>
-            <a:srgbClr val="FCE7F3"/>
+            <a:srgbClr val="CCFBF1"/>
           </a:solidFill>
           <a:ln w="19050">
             <a:solidFill>
-              <a:srgbClr val="DB2777"/>
+              <a:srgbClr val="0D9488"/>
             </a:solidFill>
             <a:prstDash val="solid"/>
           </a:ln>
@@ -32253,13 +31141,13 @@
       </p:sp>
       <p:sp>
         <p:nvSpPr>
-          <p:cNvPr id="21" name="Text 19"/>
-          <p:cNvSpPr/>
-          <p:nvPr/>
-        </p:nvSpPr>
-        <p:spPr>
-          <a:xfrm>
-            <a:off x="5803392" y="2258568"/>
+          <p:cNvPr id="20" name="Text 18"/>
+          <p:cNvSpPr/>
+          <p:nvPr/>
+        </p:nvSpPr>
+        <p:spPr>
+          <a:xfrm>
+            <a:off x="4370832" y="2258568"/>
             <a:ext cx="1828800" cy="292608"/>
           </a:xfrm>
           <a:prstGeom prst="rect">
@@ -32278,13 +31166,13 @@
             <a:r>
               <a:rPr lang="en-US" sz="1300" b="1" dirty="0">
                 <a:solidFill>
-                  <a:srgbClr val="9D174D"/>
+                  <a:srgbClr val="0F766E"/>
                 </a:solidFill>
                 <a:latin typeface="Trebuchet MS" pitchFamily="34" charset="0"/>
                 <a:ea typeface="Trebuchet MS" pitchFamily="34" charset="-122"/>
                 <a:cs typeface="Trebuchet MS" pitchFamily="34" charset="-120"/>
               </a:rPr>
-              <a:t>ion</a:t>
+              <a:t>migrate</a:t>
             </a:r>
             <a:endParaRPr lang="en-US" sz="1300" dirty="0"/>
           </a:p>
@@ -32292,13 +31180,13 @@
       </p:sp>
       <p:sp>
         <p:nvSpPr>
-          <p:cNvPr id="22" name="Text 20"/>
-          <p:cNvSpPr/>
-          <p:nvPr/>
-        </p:nvSpPr>
-        <p:spPr>
-          <a:xfrm>
-            <a:off x="5803392" y="2569464"/>
+          <p:cNvPr id="21" name="Text 19"/>
+          <p:cNvSpPr/>
+          <p:nvPr/>
+        </p:nvSpPr>
+        <p:spPr>
+          <a:xfrm>
+            <a:off x="4370832" y="2569464"/>
             <a:ext cx="1828800" cy="201168"/>
           </a:xfrm>
           <a:prstGeom prst="rect">
@@ -32323,7 +31211,7 @@
                 <a:ea typeface="Calibri" pitchFamily="34" charset="-122"/>
                 <a:cs typeface="Calibri" pitchFamily="34" charset="-120"/>
               </a:rPr>
-              <a:t>the act or process of</a:t>
+              <a:t>move from one place</a:t>
             </a:r>
             <a:endParaRPr lang="en-US" sz="850" dirty="0"/>
           </a:p>
@@ -32331,7 +31219,158 @@
       </p:sp>
       <p:sp>
         <p:nvSpPr>
+          <p:cNvPr id="22" name="Text 20"/>
+          <p:cNvSpPr/>
+          <p:nvPr/>
+        </p:nvSpPr>
+        <p:spPr>
+          <a:xfrm>
+            <a:off x="4370832" y="2752344"/>
+            <a:ext cx="1828800" cy="182880"/>
+          </a:xfrm>
+          <a:prstGeom prst="rect">
+            <a:avLst/>
+          </a:prstGeom>
+          <a:noFill/>
+          <a:ln/>
+        </p:spPr>
+        <p:txBody>
+          <a:bodyPr wrap="square" lIns="0" tIns="0" rIns="0" bIns="0" rtlCol="0" anchor="t"/>
+          <a:lstStyle/>
+          <a:p>
+            <a:pPr algn="ctr" indent="0" marL="0">
+              <a:buNone/>
+            </a:pPr>
+            <a:r>
+              <a:rPr lang="en-US" sz="700" i="1" dirty="0">
+                <a:solidFill>
+                  <a:srgbClr val="94A3B8"/>
+                </a:solidFill>
+                <a:latin typeface="Calibri" pitchFamily="34" charset="0"/>
+                <a:ea typeface="Calibri" pitchFamily="34" charset="-122"/>
+                <a:cs typeface="Calibri" pitchFamily="34" charset="-120"/>
+              </a:rPr>
+              <a:t>'e' dropped before vowel suffix</a:t>
+            </a:r>
+            <a:endParaRPr lang="en-US" sz="700" dirty="0"/>
+          </a:p>
+        </p:txBody>
+      </p:sp>
+      <p:sp>
+        <p:nvSpPr>
           <p:cNvPr id="23" name="Shape 21"/>
+          <p:cNvSpPr/>
+          <p:nvPr/>
+        </p:nvSpPr>
+        <p:spPr>
+          <a:xfrm>
+            <a:off x="6519672" y="2258568"/>
+            <a:ext cx="1828800" cy="292608"/>
+          </a:xfrm>
+          <a:prstGeom prst="rect">
+            <a:avLst>
+              <a:gd name="adj" fmla="val 25000"/>
+            </a:avLst>
+          </a:prstGeom>
+          <a:solidFill>
+            <a:srgbClr val="FCE7F3"/>
+          </a:solidFill>
+          <a:ln w="19050">
+            <a:solidFill>
+              <a:srgbClr val="DB2777"/>
+            </a:solidFill>
+            <a:prstDash val="solid"/>
+          </a:ln>
+          <a:effectLst>
+            <a:outerShdw sx="100000" sy="100000" kx="0" ky="0" algn="bl" rotWithShape="0" blurRad="101600" dist="38100" dir="8100000">
+              <a:srgbClr val="000000">
+                <a:alpha val="12000"/>
+              </a:srgbClr>
+            </a:outerShdw>
+          </a:effectLst>
+        </p:spPr>
+      </p:sp>
+      <p:sp>
+        <p:nvSpPr>
+          <p:cNvPr id="24" name="Text 22"/>
+          <p:cNvSpPr/>
+          <p:nvPr/>
+        </p:nvSpPr>
+        <p:spPr>
+          <a:xfrm>
+            <a:off x="6519672" y="2258568"/>
+            <a:ext cx="1828800" cy="292608"/>
+          </a:xfrm>
+          <a:prstGeom prst="rect">
+            <a:avLst/>
+          </a:prstGeom>
+          <a:noFill/>
+          <a:ln/>
+        </p:spPr>
+        <p:txBody>
+          <a:bodyPr wrap="square" lIns="0" tIns="0" rIns="0" bIns="0" rtlCol="0" anchor="ctr"/>
+          <a:lstStyle/>
+          <a:p>
+            <a:pPr algn="ctr" indent="0" marL="0">
+              <a:buNone/>
+            </a:pPr>
+            <a:r>
+              <a:rPr lang="en-US" sz="1300" b="1" dirty="0">
+                <a:solidFill>
+                  <a:srgbClr val="9D174D"/>
+                </a:solidFill>
+                <a:latin typeface="Trebuchet MS" pitchFamily="34" charset="0"/>
+                <a:ea typeface="Trebuchet MS" pitchFamily="34" charset="-122"/>
+                <a:cs typeface="Trebuchet MS" pitchFamily="34" charset="-120"/>
+              </a:rPr>
+              <a:t>ion</a:t>
+            </a:r>
+            <a:endParaRPr lang="en-US" sz="1300" dirty="0"/>
+          </a:p>
+        </p:txBody>
+      </p:sp>
+      <p:sp>
+        <p:nvSpPr>
+          <p:cNvPr id="25" name="Text 23"/>
+          <p:cNvSpPr/>
+          <p:nvPr/>
+        </p:nvSpPr>
+        <p:spPr>
+          <a:xfrm>
+            <a:off x="6519672" y="2569464"/>
+            <a:ext cx="1828800" cy="201168"/>
+          </a:xfrm>
+          <a:prstGeom prst="rect">
+            <a:avLst/>
+          </a:prstGeom>
+          <a:noFill/>
+          <a:ln/>
+        </p:spPr>
+        <p:txBody>
+          <a:bodyPr wrap="square" lIns="0" tIns="0" rIns="0" bIns="0" rtlCol="0" anchor="t"/>
+          <a:lstStyle/>
+          <a:p>
+            <a:pPr algn="ctr" indent="0" marL="0">
+              <a:buNone/>
+            </a:pPr>
+            <a:r>
+              <a:rPr lang="en-US" sz="850" dirty="0">
+                <a:solidFill>
+                  <a:srgbClr val="475569"/>
+                </a:solidFill>
+                <a:latin typeface="Calibri" pitchFamily="34" charset="0"/>
+                <a:ea typeface="Calibri" pitchFamily="34" charset="-122"/>
+                <a:cs typeface="Calibri" pitchFamily="34" charset="-120"/>
+              </a:rPr>
+              <a:t>act or process of</a:t>
+            </a:r>
+            <a:endParaRPr lang="en-US" sz="850" dirty="0"/>
+          </a:p>
+        </p:txBody>
+      </p:sp>
+      <p:sp>
+        <p:nvSpPr>
+          <p:cNvPr id="26" name="Shape 24"/>
           <p:cNvSpPr/>
           <p:nvPr/>
         </p:nvSpPr>
@@ -32358,7 +31397,7 @@
       </p:sp>
       <p:sp>
         <p:nvSpPr>
-          <p:cNvPr id="24" name="Text 22"/>
+          <p:cNvPr id="27" name="Text 25"/>
           <p:cNvSpPr/>
           <p:nvPr/>
         </p:nvSpPr>
@@ -32397,7 +31436,7 @@
       </p:sp>
       <p:sp>
         <p:nvSpPr>
-          <p:cNvPr id="25" name="Shape 23"/>
+          <p:cNvPr id="28" name="Shape 26"/>
           <p:cNvSpPr/>
           <p:nvPr/>
         </p:nvSpPr>
@@ -32424,14 +31463,14 @@
       </p:sp>
       <p:sp>
         <p:nvSpPr>
-          <p:cNvPr id="26" name="Shape 24"/>
-          <p:cNvSpPr/>
-          <p:nvPr/>
-        </p:nvSpPr>
-        <p:spPr>
-          <a:xfrm>
-            <a:off x="2313432" y="3364992"/>
-            <a:ext cx="1645920" cy="475488"/>
+          <p:cNvPr id="29" name="Shape 27"/>
+          <p:cNvSpPr/>
+          <p:nvPr/>
+        </p:nvSpPr>
+        <p:spPr>
+          <a:xfrm>
+            <a:off x="1975104" y="3364992"/>
+            <a:ext cx="1554480" cy="475488"/>
           </a:xfrm>
           <a:prstGeom prst="rect">
             <a:avLst>
@@ -32451,14 +31490,14 @@
       </p:sp>
       <p:sp>
         <p:nvSpPr>
-          <p:cNvPr id="27" name="Text 25"/>
-          <p:cNvSpPr/>
-          <p:nvPr/>
-        </p:nvSpPr>
-        <p:spPr>
-          <a:xfrm>
-            <a:off x="2313432" y="3364992"/>
-            <a:ext cx="1645920" cy="475488"/>
+          <p:cNvPr id="30" name="Text 28"/>
+          <p:cNvSpPr/>
+          <p:nvPr/>
+        </p:nvSpPr>
+        <p:spPr>
+          <a:xfrm>
+            <a:off x="1975104" y="3364992"/>
+            <a:ext cx="1554480" cy="475488"/>
           </a:xfrm>
           <a:prstGeom prst="rect">
             <a:avLst/>
@@ -32482,7 +31521,7 @@
                 <a:ea typeface="Trebuchet MS" pitchFamily="34" charset="-122"/>
                 <a:cs typeface="Trebuchet MS" pitchFamily="34" charset="-120"/>
               </a:rPr>
-              <a:t>mi</a:t>
+              <a:t>trans</a:t>
             </a:r>
             <a:endParaRPr lang="en-US" sz="1400" dirty="0"/>
           </a:p>
@@ -32490,14 +31529,14 @@
       </p:sp>
       <p:sp>
         <p:nvSpPr>
-          <p:cNvPr id="28" name="Text 26"/>
-          <p:cNvSpPr/>
-          <p:nvPr/>
-        </p:nvSpPr>
-        <p:spPr>
-          <a:xfrm>
-            <a:off x="3959352" y="3364992"/>
-            <a:ext cx="411480" cy="475488"/>
+          <p:cNvPr id="31" name="Text 29"/>
+          <p:cNvSpPr/>
+          <p:nvPr/>
+        </p:nvSpPr>
+        <p:spPr>
+          <a:xfrm>
+            <a:off x="3529584" y="3364992"/>
+            <a:ext cx="73152" cy="475488"/>
           </a:xfrm>
           <a:prstGeom prst="rect">
             <a:avLst/>
@@ -32529,14 +31568,14 @@
       </p:sp>
       <p:sp>
         <p:nvSpPr>
-          <p:cNvPr id="29" name="Shape 27"/>
-          <p:cNvSpPr/>
-          <p:nvPr/>
-        </p:nvSpPr>
-        <p:spPr>
-          <a:xfrm>
-            <a:off x="4370832" y="3364992"/>
-            <a:ext cx="1645920" cy="475488"/>
+          <p:cNvPr id="32" name="Shape 30"/>
+          <p:cNvSpPr/>
+          <p:nvPr/>
+        </p:nvSpPr>
+        <p:spPr>
+          <a:xfrm>
+            <a:off x="3602736" y="3364992"/>
+            <a:ext cx="1554480" cy="475488"/>
           </a:xfrm>
           <a:prstGeom prst="rect">
             <a:avLst>
@@ -32556,14 +31595,14 @@
       </p:sp>
       <p:sp>
         <p:nvSpPr>
-          <p:cNvPr id="30" name="Text 28"/>
-          <p:cNvSpPr/>
-          <p:nvPr/>
-        </p:nvSpPr>
-        <p:spPr>
-          <a:xfrm>
-            <a:off x="4370832" y="3364992"/>
-            <a:ext cx="1645920" cy="475488"/>
+          <p:cNvPr id="33" name="Text 31"/>
+          <p:cNvSpPr/>
+          <p:nvPr/>
+        </p:nvSpPr>
+        <p:spPr>
+          <a:xfrm>
+            <a:off x="3602736" y="3364992"/>
+            <a:ext cx="1554480" cy="475488"/>
           </a:xfrm>
           <a:prstGeom prst="rect">
             <a:avLst/>
@@ -32587,7 +31626,7 @@
                 <a:ea typeface="Trebuchet MS" pitchFamily="34" charset="-122"/>
                 <a:cs typeface="Trebuchet MS" pitchFamily="34" charset="-120"/>
               </a:rPr>
-              <a:t>gra</a:t>
+              <a:t>mi</a:t>
             </a:r>
             <a:endParaRPr lang="en-US" sz="1400" dirty="0"/>
           </a:p>
@@ -32595,14 +31634,14 @@
       </p:sp>
       <p:sp>
         <p:nvSpPr>
-          <p:cNvPr id="31" name="Text 29"/>
-          <p:cNvSpPr/>
-          <p:nvPr/>
-        </p:nvSpPr>
-        <p:spPr>
-          <a:xfrm>
-            <a:off x="6016752" y="3364992"/>
-            <a:ext cx="411480" cy="475488"/>
+          <p:cNvPr id="34" name="Text 32"/>
+          <p:cNvSpPr/>
+          <p:nvPr/>
+        </p:nvSpPr>
+        <p:spPr>
+          <a:xfrm>
+            <a:off x="5157216" y="3364992"/>
+            <a:ext cx="73152" cy="475488"/>
           </a:xfrm>
           <a:prstGeom prst="rect">
             <a:avLst/>
@@ -32634,14 +31673,14 @@
       </p:sp>
       <p:sp>
         <p:nvSpPr>
-          <p:cNvPr id="32" name="Shape 30"/>
-          <p:cNvSpPr/>
-          <p:nvPr/>
-        </p:nvSpPr>
-        <p:spPr>
-          <a:xfrm>
-            <a:off x="6428232" y="3364992"/>
-            <a:ext cx="1645920" cy="475488"/>
+          <p:cNvPr id="35" name="Shape 33"/>
+          <p:cNvSpPr/>
+          <p:nvPr/>
+        </p:nvSpPr>
+        <p:spPr>
+          <a:xfrm>
+            <a:off x="5230368" y="3364992"/>
+            <a:ext cx="1554480" cy="475488"/>
           </a:xfrm>
           <a:prstGeom prst="rect">
             <a:avLst>
@@ -32661,14 +31700,14 @@
       </p:sp>
       <p:sp>
         <p:nvSpPr>
-          <p:cNvPr id="33" name="Text 31"/>
-          <p:cNvSpPr/>
-          <p:nvPr/>
-        </p:nvSpPr>
-        <p:spPr>
-          <a:xfrm>
-            <a:off x="6428232" y="3364992"/>
-            <a:ext cx="1645920" cy="475488"/>
+          <p:cNvPr id="36" name="Text 34"/>
+          <p:cNvSpPr/>
+          <p:nvPr/>
+        </p:nvSpPr>
+        <p:spPr>
+          <a:xfrm>
+            <a:off x="5230368" y="3364992"/>
+            <a:ext cx="1554480" cy="475488"/>
           </a:xfrm>
           <a:prstGeom prst="rect">
             <a:avLst/>
@@ -32692,6 +31731,111 @@
                 <a:ea typeface="Trebuchet MS" pitchFamily="34" charset="-122"/>
                 <a:cs typeface="Trebuchet MS" pitchFamily="34" charset="-120"/>
               </a:rPr>
+              <a:t>gra</a:t>
+            </a:r>
+            <a:endParaRPr lang="en-US" sz="1400" dirty="0"/>
+          </a:p>
+        </p:txBody>
+      </p:sp>
+      <p:sp>
+        <p:nvSpPr>
+          <p:cNvPr id="37" name="Text 35"/>
+          <p:cNvSpPr/>
+          <p:nvPr/>
+        </p:nvSpPr>
+        <p:spPr>
+          <a:xfrm>
+            <a:off x="6784848" y="3364992"/>
+            <a:ext cx="73152" cy="475488"/>
+          </a:xfrm>
+          <a:prstGeom prst="rect">
+            <a:avLst/>
+          </a:prstGeom>
+          <a:noFill/>
+          <a:ln/>
+        </p:spPr>
+        <p:txBody>
+          <a:bodyPr wrap="square" lIns="0" tIns="0" rIns="0" bIns="0" rtlCol="0" anchor="ctr"/>
+          <a:lstStyle/>
+          <a:p>
+            <a:pPr algn="ctr" indent="0" marL="0">
+              <a:buNone/>
+            </a:pPr>
+            <a:r>
+              <a:rPr lang="en-US" sz="1600" b="1" dirty="0">
+                <a:solidFill>
+                  <a:srgbClr val="0D9488"/>
+                </a:solidFill>
+                <a:latin typeface="Trebuchet MS" pitchFamily="34" charset="0"/>
+                <a:ea typeface="Trebuchet MS" pitchFamily="34" charset="-122"/>
+                <a:cs typeface="Trebuchet MS" pitchFamily="34" charset="-120"/>
+              </a:rPr>
+              <a:t>·</a:t>
+            </a:r>
+            <a:endParaRPr lang="en-US" sz="1600" dirty="0"/>
+          </a:p>
+        </p:txBody>
+      </p:sp>
+      <p:sp>
+        <p:nvSpPr>
+          <p:cNvPr id="38" name="Shape 36"/>
+          <p:cNvSpPr/>
+          <p:nvPr/>
+        </p:nvSpPr>
+        <p:spPr>
+          <a:xfrm>
+            <a:off x="6858000" y="3364992"/>
+            <a:ext cx="1554480" cy="475488"/>
+          </a:xfrm>
+          <a:prstGeom prst="rect">
+            <a:avLst>
+              <a:gd name="adj" fmla="val 9615"/>
+            </a:avLst>
+          </a:prstGeom>
+          <a:solidFill>
+            <a:srgbClr val="FFFFFF"/>
+          </a:solidFill>
+          <a:ln w="12700">
+            <a:solidFill>
+              <a:srgbClr val="0D9488"/>
+            </a:solidFill>
+            <a:prstDash val="solid"/>
+          </a:ln>
+        </p:spPr>
+      </p:sp>
+      <p:sp>
+        <p:nvSpPr>
+          <p:cNvPr id="39" name="Text 37"/>
+          <p:cNvSpPr/>
+          <p:nvPr/>
+        </p:nvSpPr>
+        <p:spPr>
+          <a:xfrm>
+            <a:off x="6858000" y="3364992"/>
+            <a:ext cx="1554480" cy="475488"/>
+          </a:xfrm>
+          <a:prstGeom prst="rect">
+            <a:avLst/>
+          </a:prstGeom>
+          <a:noFill/>
+          <a:ln/>
+        </p:spPr>
+        <p:txBody>
+          <a:bodyPr wrap="square" lIns="0" tIns="0" rIns="0" bIns="0" rtlCol="0" anchor="ctr"/>
+          <a:lstStyle/>
+          <a:p>
+            <a:pPr algn="ctr" indent="0" marL="0">
+              <a:buNone/>
+            </a:pPr>
+            <a:r>
+              <a:rPr lang="en-US" sz="1400" b="1" dirty="0">
+                <a:solidFill>
+                  <a:srgbClr val="0D9488"/>
+                </a:solidFill>
+                <a:latin typeface="Trebuchet MS" pitchFamily="34" charset="0"/>
+                <a:ea typeface="Trebuchet MS" pitchFamily="34" charset="-122"/>
+                <a:cs typeface="Trebuchet MS" pitchFamily="34" charset="-120"/>
+              </a:rPr>
               <a:t>tion</a:t>
             </a:r>
             <a:endParaRPr lang="en-US" sz="1400" dirty="0"/>
@@ -32700,7 +31844,7 @@
       </p:sp>
       <p:sp>
         <p:nvSpPr>
-          <p:cNvPr id="34" name="Shape 32"/>
+          <p:cNvPr id="40" name="Shape 38"/>
           <p:cNvSpPr/>
           <p:nvPr/>
         </p:nvSpPr>
@@ -32727,7 +31871,7 @@
       </p:sp>
       <p:sp>
         <p:nvSpPr>
-          <p:cNvPr id="35" name="Text 33"/>
+          <p:cNvPr id="41" name="Text 39"/>
           <p:cNvSpPr/>
           <p:nvPr/>
         </p:nvSpPr>
@@ -32766,7 +31910,7 @@
       </p:sp>
       <p:sp>
         <p:nvSpPr>
-          <p:cNvPr id="36" name="Shape 34"/>
+          <p:cNvPr id="42" name="Shape 40"/>
           <p:cNvSpPr/>
           <p:nvPr/>
         </p:nvSpPr>
@@ -32793,7 +31937,7 @@
       </p:sp>
       <p:sp>
         <p:nvSpPr>
-          <p:cNvPr id="37" name="Text 35"/>
+          <p:cNvPr id="43" name="Text 41"/>
           <p:cNvSpPr/>
           <p:nvPr/>
         </p:nvSpPr>
@@ -33255,7 +32399,7 @@
                 <a:ea typeface="Trebuchet MS" pitchFamily="34" charset="-122"/>
                 <a:cs typeface="Trebuchet MS" pitchFamily="34" charset="-120"/>
               </a:rPr>
-              <a:t>migration</a:t>
+              <a:t>transmigration</a:t>
             </a:r>
             <a:endParaRPr lang="en-US" sz="2800" dirty="0"/>
           </a:p>
@@ -33335,7 +32479,7 @@
         </p:nvSpPr>
         <p:spPr>
           <a:xfrm>
-            <a:off x="2938272" y="2258568"/>
+            <a:off x="2221992" y="2258568"/>
             <a:ext cx="1828800" cy="292608"/>
           </a:xfrm>
           <a:prstGeom prst="rect">
@@ -33344,11 +32488,11 @@
             </a:avLst>
           </a:prstGeom>
           <a:solidFill>
-            <a:srgbClr val="CCFBF1"/>
+            <a:srgbClr val="DDD6FE"/>
           </a:solidFill>
           <a:ln w="19050">
             <a:solidFill>
-              <a:srgbClr val="0D9488"/>
+              <a:srgbClr val="7C3AED"/>
             </a:solidFill>
             <a:prstDash val="solid"/>
           </a:ln>
@@ -33369,7 +32513,7 @@
         </p:nvSpPr>
         <p:spPr>
           <a:xfrm>
-            <a:off x="2938272" y="2258568"/>
+            <a:off x="2221992" y="2258568"/>
             <a:ext cx="1828800" cy="292608"/>
           </a:xfrm>
           <a:prstGeom prst="rect">
@@ -33388,13 +32532,13 @@
             <a:r>
               <a:rPr lang="en-US" sz="1300" b="1" dirty="0">
                 <a:solidFill>
-                  <a:srgbClr val="0F766E"/>
+                  <a:srgbClr val="4C1D95"/>
                 </a:solidFill>
                 <a:latin typeface="Trebuchet MS" pitchFamily="34" charset="0"/>
                 <a:ea typeface="Trebuchet MS" pitchFamily="34" charset="-122"/>
                 <a:cs typeface="Trebuchet MS" pitchFamily="34" charset="-120"/>
               </a:rPr>
-              <a:t>migrate</a:t>
+              <a:t>trans</a:t>
             </a:r>
             <a:endParaRPr lang="en-US" sz="1300" dirty="0"/>
           </a:p>
@@ -33408,7 +32552,7 @@
         </p:nvSpPr>
         <p:spPr>
           <a:xfrm>
-            <a:off x="2938272" y="2569464"/>
+            <a:off x="2221992" y="2569464"/>
             <a:ext cx="1828800" cy="201168"/>
           </a:xfrm>
           <a:prstGeom prst="rect">
@@ -33433,7 +32577,7 @@
                 <a:ea typeface="Calibri" pitchFamily="34" charset="-122"/>
                 <a:cs typeface="Calibri" pitchFamily="34" charset="-120"/>
               </a:rPr>
-              <a:t>to move from one place</a:t>
+              <a:t>across or through</a:t>
             </a:r>
             <a:endParaRPr lang="en-US" sz="850" dirty="0"/>
           </a:p>
@@ -33441,52 +32585,13 @@
       </p:sp>
       <p:sp>
         <p:nvSpPr>
-          <p:cNvPr id="19" name="Text 17"/>
-          <p:cNvSpPr/>
-          <p:nvPr/>
-        </p:nvSpPr>
-        <p:spPr>
-          <a:xfrm>
-            <a:off x="2938272" y="2752344"/>
-            <a:ext cx="1828800" cy="182880"/>
-          </a:xfrm>
-          <a:prstGeom prst="rect">
-            <a:avLst/>
-          </a:prstGeom>
-          <a:noFill/>
-          <a:ln/>
-        </p:spPr>
-        <p:txBody>
-          <a:bodyPr wrap="square" lIns="0" tIns="0" rIns="0" bIns="0" rtlCol="0" anchor="t"/>
-          <a:lstStyle/>
-          <a:p>
-            <a:pPr algn="ctr" indent="0" marL="0">
-              <a:buNone/>
-            </a:pPr>
-            <a:r>
-              <a:rPr lang="en-US" sz="700" i="1" dirty="0">
-                <a:solidFill>
-                  <a:srgbClr val="94A3B8"/>
-                </a:solidFill>
-                <a:latin typeface="Calibri" pitchFamily="34" charset="0"/>
-                <a:ea typeface="Calibri" pitchFamily="34" charset="-122"/>
-                <a:cs typeface="Calibri" pitchFamily="34" charset="-120"/>
-              </a:rPr>
-              <a:t>'e' dropped before vowel suffix</a:t>
-            </a:r>
-            <a:endParaRPr lang="en-US" sz="700" dirty="0"/>
-          </a:p>
-        </p:txBody>
-      </p:sp>
-      <p:sp>
-        <p:nvSpPr>
-          <p:cNvPr id="20" name="Shape 18"/>
-          <p:cNvSpPr/>
-          <p:nvPr/>
-        </p:nvSpPr>
-        <p:spPr>
-          <a:xfrm>
-            <a:off x="5803392" y="2258568"/>
+          <p:cNvPr id="19" name="Shape 17"/>
+          <p:cNvSpPr/>
+          <p:nvPr/>
+        </p:nvSpPr>
+        <p:spPr>
+          <a:xfrm>
+            <a:off x="4370832" y="2258568"/>
             <a:ext cx="1828800" cy="292608"/>
           </a:xfrm>
           <a:prstGeom prst="rect">
@@ -33495,11 +32600,11 @@
             </a:avLst>
           </a:prstGeom>
           <a:solidFill>
-            <a:srgbClr val="FCE7F3"/>
+            <a:srgbClr val="CCFBF1"/>
           </a:solidFill>
           <a:ln w="19050">
             <a:solidFill>
-              <a:srgbClr val="DB2777"/>
+              <a:srgbClr val="0D9488"/>
             </a:solidFill>
             <a:prstDash val="solid"/>
           </a:ln>
@@ -33514,13 +32619,13 @@
       </p:sp>
       <p:sp>
         <p:nvSpPr>
-          <p:cNvPr id="21" name="Text 19"/>
-          <p:cNvSpPr/>
-          <p:nvPr/>
-        </p:nvSpPr>
-        <p:spPr>
-          <a:xfrm>
-            <a:off x="5803392" y="2258568"/>
+          <p:cNvPr id="20" name="Text 18"/>
+          <p:cNvSpPr/>
+          <p:nvPr/>
+        </p:nvSpPr>
+        <p:spPr>
+          <a:xfrm>
+            <a:off x="4370832" y="2258568"/>
             <a:ext cx="1828800" cy="292608"/>
           </a:xfrm>
           <a:prstGeom prst="rect">
@@ -33539,13 +32644,13 @@
             <a:r>
               <a:rPr lang="en-US" sz="1300" b="1" dirty="0">
                 <a:solidFill>
-                  <a:srgbClr val="9D174D"/>
+                  <a:srgbClr val="0F766E"/>
                 </a:solidFill>
                 <a:latin typeface="Trebuchet MS" pitchFamily="34" charset="0"/>
                 <a:ea typeface="Trebuchet MS" pitchFamily="34" charset="-122"/>
                 <a:cs typeface="Trebuchet MS" pitchFamily="34" charset="-120"/>
               </a:rPr>
-              <a:t>ion</a:t>
+              <a:t>migrate</a:t>
             </a:r>
             <a:endParaRPr lang="en-US" sz="1300" dirty="0"/>
           </a:p>
@@ -33553,13 +32658,13 @@
       </p:sp>
       <p:sp>
         <p:nvSpPr>
-          <p:cNvPr id="22" name="Text 20"/>
-          <p:cNvSpPr/>
-          <p:nvPr/>
-        </p:nvSpPr>
-        <p:spPr>
-          <a:xfrm>
-            <a:off x="5803392" y="2569464"/>
+          <p:cNvPr id="21" name="Text 19"/>
+          <p:cNvSpPr/>
+          <p:nvPr/>
+        </p:nvSpPr>
+        <p:spPr>
+          <a:xfrm>
+            <a:off x="4370832" y="2569464"/>
             <a:ext cx="1828800" cy="201168"/>
           </a:xfrm>
           <a:prstGeom prst="rect">
@@ -33584,7 +32689,7 @@
                 <a:ea typeface="Calibri" pitchFamily="34" charset="-122"/>
                 <a:cs typeface="Calibri" pitchFamily="34" charset="-120"/>
               </a:rPr>
-              <a:t>the act or process of</a:t>
+              <a:t>move from one place</a:t>
             </a:r>
             <a:endParaRPr lang="en-US" sz="850" dirty="0"/>
           </a:p>
@@ -33592,7 +32697,158 @@
       </p:sp>
       <p:sp>
         <p:nvSpPr>
+          <p:cNvPr id="22" name="Text 20"/>
+          <p:cNvSpPr/>
+          <p:nvPr/>
+        </p:nvSpPr>
+        <p:spPr>
+          <a:xfrm>
+            <a:off x="4370832" y="2752344"/>
+            <a:ext cx="1828800" cy="182880"/>
+          </a:xfrm>
+          <a:prstGeom prst="rect">
+            <a:avLst/>
+          </a:prstGeom>
+          <a:noFill/>
+          <a:ln/>
+        </p:spPr>
+        <p:txBody>
+          <a:bodyPr wrap="square" lIns="0" tIns="0" rIns="0" bIns="0" rtlCol="0" anchor="t"/>
+          <a:lstStyle/>
+          <a:p>
+            <a:pPr algn="ctr" indent="0" marL="0">
+              <a:buNone/>
+            </a:pPr>
+            <a:r>
+              <a:rPr lang="en-US" sz="700" i="1" dirty="0">
+                <a:solidFill>
+                  <a:srgbClr val="94A3B8"/>
+                </a:solidFill>
+                <a:latin typeface="Calibri" pitchFamily="34" charset="0"/>
+                <a:ea typeface="Calibri" pitchFamily="34" charset="-122"/>
+                <a:cs typeface="Calibri" pitchFamily="34" charset="-120"/>
+              </a:rPr>
+              <a:t>'e' dropped before vowel suffix</a:t>
+            </a:r>
+            <a:endParaRPr lang="en-US" sz="700" dirty="0"/>
+          </a:p>
+        </p:txBody>
+      </p:sp>
+      <p:sp>
+        <p:nvSpPr>
           <p:cNvPr id="23" name="Shape 21"/>
+          <p:cNvSpPr/>
+          <p:nvPr/>
+        </p:nvSpPr>
+        <p:spPr>
+          <a:xfrm>
+            <a:off x="6519672" y="2258568"/>
+            <a:ext cx="1828800" cy="292608"/>
+          </a:xfrm>
+          <a:prstGeom prst="rect">
+            <a:avLst>
+              <a:gd name="adj" fmla="val 25000"/>
+            </a:avLst>
+          </a:prstGeom>
+          <a:solidFill>
+            <a:srgbClr val="FCE7F3"/>
+          </a:solidFill>
+          <a:ln w="19050">
+            <a:solidFill>
+              <a:srgbClr val="DB2777"/>
+            </a:solidFill>
+            <a:prstDash val="solid"/>
+          </a:ln>
+          <a:effectLst>
+            <a:outerShdw sx="100000" sy="100000" kx="0" ky="0" algn="bl" rotWithShape="0" blurRad="101600" dist="38100" dir="8100000">
+              <a:srgbClr val="000000">
+                <a:alpha val="12000"/>
+              </a:srgbClr>
+            </a:outerShdw>
+          </a:effectLst>
+        </p:spPr>
+      </p:sp>
+      <p:sp>
+        <p:nvSpPr>
+          <p:cNvPr id="24" name="Text 22"/>
+          <p:cNvSpPr/>
+          <p:nvPr/>
+        </p:nvSpPr>
+        <p:spPr>
+          <a:xfrm>
+            <a:off x="6519672" y="2258568"/>
+            <a:ext cx="1828800" cy="292608"/>
+          </a:xfrm>
+          <a:prstGeom prst="rect">
+            <a:avLst/>
+          </a:prstGeom>
+          <a:noFill/>
+          <a:ln/>
+        </p:spPr>
+        <p:txBody>
+          <a:bodyPr wrap="square" lIns="0" tIns="0" rIns="0" bIns="0" rtlCol="0" anchor="ctr"/>
+          <a:lstStyle/>
+          <a:p>
+            <a:pPr algn="ctr" indent="0" marL="0">
+              <a:buNone/>
+            </a:pPr>
+            <a:r>
+              <a:rPr lang="en-US" sz="1300" b="1" dirty="0">
+                <a:solidFill>
+                  <a:srgbClr val="9D174D"/>
+                </a:solidFill>
+                <a:latin typeface="Trebuchet MS" pitchFamily="34" charset="0"/>
+                <a:ea typeface="Trebuchet MS" pitchFamily="34" charset="-122"/>
+                <a:cs typeface="Trebuchet MS" pitchFamily="34" charset="-120"/>
+              </a:rPr>
+              <a:t>ion</a:t>
+            </a:r>
+            <a:endParaRPr lang="en-US" sz="1300" dirty="0"/>
+          </a:p>
+        </p:txBody>
+      </p:sp>
+      <p:sp>
+        <p:nvSpPr>
+          <p:cNvPr id="25" name="Text 23"/>
+          <p:cNvSpPr/>
+          <p:nvPr/>
+        </p:nvSpPr>
+        <p:spPr>
+          <a:xfrm>
+            <a:off x="6519672" y="2569464"/>
+            <a:ext cx="1828800" cy="201168"/>
+          </a:xfrm>
+          <a:prstGeom prst="rect">
+            <a:avLst/>
+          </a:prstGeom>
+          <a:noFill/>
+          <a:ln/>
+        </p:spPr>
+        <p:txBody>
+          <a:bodyPr wrap="square" lIns="0" tIns="0" rIns="0" bIns="0" rtlCol="0" anchor="t"/>
+          <a:lstStyle/>
+          <a:p>
+            <a:pPr algn="ctr" indent="0" marL="0">
+              <a:buNone/>
+            </a:pPr>
+            <a:r>
+              <a:rPr lang="en-US" sz="850" dirty="0">
+                <a:solidFill>
+                  <a:srgbClr val="475569"/>
+                </a:solidFill>
+                <a:latin typeface="Calibri" pitchFamily="34" charset="0"/>
+                <a:ea typeface="Calibri" pitchFamily="34" charset="-122"/>
+                <a:cs typeface="Calibri" pitchFamily="34" charset="-120"/>
+              </a:rPr>
+              <a:t>act or process of</a:t>
+            </a:r>
+            <a:endParaRPr lang="en-US" sz="850" dirty="0"/>
+          </a:p>
+        </p:txBody>
+      </p:sp>
+      <p:sp>
+        <p:nvSpPr>
+          <p:cNvPr id="26" name="Shape 24"/>
           <p:cNvSpPr/>
           <p:nvPr/>
         </p:nvSpPr>
@@ -33619,7 +32875,7 @@
       </p:sp>
       <p:sp>
         <p:nvSpPr>
-          <p:cNvPr id="24" name="Text 22"/>
+          <p:cNvPr id="27" name="Text 25"/>
           <p:cNvSpPr/>
           <p:nvPr/>
         </p:nvSpPr>
@@ -33658,7 +32914,7 @@
       </p:sp>
       <p:sp>
         <p:nvSpPr>
-          <p:cNvPr id="25" name="Shape 23"/>
+          <p:cNvPr id="28" name="Shape 26"/>
           <p:cNvSpPr/>
           <p:nvPr/>
         </p:nvSpPr>
@@ -33685,14 +32941,14 @@
       </p:sp>
       <p:sp>
         <p:nvSpPr>
-          <p:cNvPr id="26" name="Shape 24"/>
-          <p:cNvSpPr/>
-          <p:nvPr/>
-        </p:nvSpPr>
-        <p:spPr>
-          <a:xfrm>
-            <a:off x="2313432" y="3364992"/>
-            <a:ext cx="1645920" cy="475488"/>
+          <p:cNvPr id="29" name="Shape 27"/>
+          <p:cNvSpPr/>
+          <p:nvPr/>
+        </p:nvSpPr>
+        <p:spPr>
+          <a:xfrm>
+            <a:off x="1975104" y="3364992"/>
+            <a:ext cx="1554480" cy="475488"/>
           </a:xfrm>
           <a:prstGeom prst="rect">
             <a:avLst>
@@ -33712,14 +32968,14 @@
       </p:sp>
       <p:sp>
         <p:nvSpPr>
-          <p:cNvPr id="27" name="Text 25"/>
-          <p:cNvSpPr/>
-          <p:nvPr/>
-        </p:nvSpPr>
-        <p:spPr>
-          <a:xfrm>
-            <a:off x="2313432" y="3364992"/>
-            <a:ext cx="1645920" cy="475488"/>
+          <p:cNvPr id="30" name="Text 28"/>
+          <p:cNvSpPr/>
+          <p:nvPr/>
+        </p:nvSpPr>
+        <p:spPr>
+          <a:xfrm>
+            <a:off x="1975104" y="3364992"/>
+            <a:ext cx="1554480" cy="475488"/>
           </a:xfrm>
           <a:prstGeom prst="rect">
             <a:avLst/>
@@ -33743,7 +32999,7 @@
                 <a:ea typeface="Trebuchet MS" pitchFamily="34" charset="-122"/>
                 <a:cs typeface="Trebuchet MS" pitchFamily="34" charset="-120"/>
               </a:rPr>
-              <a:t>mi</a:t>
+              <a:t>trans</a:t>
             </a:r>
             <a:endParaRPr lang="en-US" sz="1400" dirty="0"/>
           </a:p>
@@ -33751,14 +33007,14 @@
       </p:sp>
       <p:sp>
         <p:nvSpPr>
-          <p:cNvPr id="28" name="Text 26"/>
-          <p:cNvSpPr/>
-          <p:nvPr/>
-        </p:nvSpPr>
-        <p:spPr>
-          <a:xfrm>
-            <a:off x="3959352" y="3364992"/>
-            <a:ext cx="411480" cy="475488"/>
+          <p:cNvPr id="31" name="Text 29"/>
+          <p:cNvSpPr/>
+          <p:nvPr/>
+        </p:nvSpPr>
+        <p:spPr>
+          <a:xfrm>
+            <a:off x="3529584" y="3364992"/>
+            <a:ext cx="73152" cy="475488"/>
           </a:xfrm>
           <a:prstGeom prst="rect">
             <a:avLst/>
@@ -33790,14 +33046,14 @@
       </p:sp>
       <p:sp>
         <p:nvSpPr>
-          <p:cNvPr id="29" name="Shape 27"/>
-          <p:cNvSpPr/>
-          <p:nvPr/>
-        </p:nvSpPr>
-        <p:spPr>
-          <a:xfrm>
-            <a:off x="4370832" y="3364992"/>
-            <a:ext cx="1645920" cy="475488"/>
+          <p:cNvPr id="32" name="Shape 30"/>
+          <p:cNvSpPr/>
+          <p:nvPr/>
+        </p:nvSpPr>
+        <p:spPr>
+          <a:xfrm>
+            <a:off x="3602736" y="3364992"/>
+            <a:ext cx="1554480" cy="475488"/>
           </a:xfrm>
           <a:prstGeom prst="rect">
             <a:avLst>
@@ -33817,14 +33073,14 @@
       </p:sp>
       <p:sp>
         <p:nvSpPr>
-          <p:cNvPr id="30" name="Text 28"/>
-          <p:cNvSpPr/>
-          <p:nvPr/>
-        </p:nvSpPr>
-        <p:spPr>
-          <a:xfrm>
-            <a:off x="4370832" y="3364992"/>
-            <a:ext cx="1645920" cy="475488"/>
+          <p:cNvPr id="33" name="Text 31"/>
+          <p:cNvSpPr/>
+          <p:nvPr/>
+        </p:nvSpPr>
+        <p:spPr>
+          <a:xfrm>
+            <a:off x="3602736" y="3364992"/>
+            <a:ext cx="1554480" cy="475488"/>
           </a:xfrm>
           <a:prstGeom prst="rect">
             <a:avLst/>
@@ -33848,7 +33104,7 @@
                 <a:ea typeface="Trebuchet MS" pitchFamily="34" charset="-122"/>
                 <a:cs typeface="Trebuchet MS" pitchFamily="34" charset="-120"/>
               </a:rPr>
-              <a:t>gra</a:t>
+              <a:t>mi</a:t>
             </a:r>
             <a:endParaRPr lang="en-US" sz="1400" dirty="0"/>
           </a:p>
@@ -33856,14 +33112,14 @@
       </p:sp>
       <p:sp>
         <p:nvSpPr>
-          <p:cNvPr id="31" name="Text 29"/>
-          <p:cNvSpPr/>
-          <p:nvPr/>
-        </p:nvSpPr>
-        <p:spPr>
-          <a:xfrm>
-            <a:off x="6016752" y="3364992"/>
-            <a:ext cx="411480" cy="475488"/>
+          <p:cNvPr id="34" name="Text 32"/>
+          <p:cNvSpPr/>
+          <p:nvPr/>
+        </p:nvSpPr>
+        <p:spPr>
+          <a:xfrm>
+            <a:off x="5157216" y="3364992"/>
+            <a:ext cx="73152" cy="475488"/>
           </a:xfrm>
           <a:prstGeom prst="rect">
             <a:avLst/>
@@ -33895,14 +33151,14 @@
       </p:sp>
       <p:sp>
         <p:nvSpPr>
-          <p:cNvPr id="32" name="Shape 30"/>
-          <p:cNvSpPr/>
-          <p:nvPr/>
-        </p:nvSpPr>
-        <p:spPr>
-          <a:xfrm>
-            <a:off x="6428232" y="3364992"/>
-            <a:ext cx="1645920" cy="475488"/>
+          <p:cNvPr id="35" name="Shape 33"/>
+          <p:cNvSpPr/>
+          <p:nvPr/>
+        </p:nvSpPr>
+        <p:spPr>
+          <a:xfrm>
+            <a:off x="5230368" y="3364992"/>
+            <a:ext cx="1554480" cy="475488"/>
           </a:xfrm>
           <a:prstGeom prst="rect">
             <a:avLst>
@@ -33922,14 +33178,14 @@
       </p:sp>
       <p:sp>
         <p:nvSpPr>
-          <p:cNvPr id="33" name="Text 31"/>
-          <p:cNvSpPr/>
-          <p:nvPr/>
-        </p:nvSpPr>
-        <p:spPr>
-          <a:xfrm>
-            <a:off x="6428232" y="3364992"/>
-            <a:ext cx="1645920" cy="475488"/>
+          <p:cNvPr id="36" name="Text 34"/>
+          <p:cNvSpPr/>
+          <p:nvPr/>
+        </p:nvSpPr>
+        <p:spPr>
+          <a:xfrm>
+            <a:off x="5230368" y="3364992"/>
+            <a:ext cx="1554480" cy="475488"/>
           </a:xfrm>
           <a:prstGeom prst="rect">
             <a:avLst/>
@@ -33953,6 +33209,111 @@
                 <a:ea typeface="Trebuchet MS" pitchFamily="34" charset="-122"/>
                 <a:cs typeface="Trebuchet MS" pitchFamily="34" charset="-120"/>
               </a:rPr>
+              <a:t>gra</a:t>
+            </a:r>
+            <a:endParaRPr lang="en-US" sz="1400" dirty="0"/>
+          </a:p>
+        </p:txBody>
+      </p:sp>
+      <p:sp>
+        <p:nvSpPr>
+          <p:cNvPr id="37" name="Text 35"/>
+          <p:cNvSpPr/>
+          <p:nvPr/>
+        </p:nvSpPr>
+        <p:spPr>
+          <a:xfrm>
+            <a:off x="6784848" y="3364992"/>
+            <a:ext cx="73152" cy="475488"/>
+          </a:xfrm>
+          <a:prstGeom prst="rect">
+            <a:avLst/>
+          </a:prstGeom>
+          <a:noFill/>
+          <a:ln/>
+        </p:spPr>
+        <p:txBody>
+          <a:bodyPr wrap="square" lIns="0" tIns="0" rIns="0" bIns="0" rtlCol="0" anchor="ctr"/>
+          <a:lstStyle/>
+          <a:p>
+            <a:pPr algn="ctr" indent="0" marL="0">
+              <a:buNone/>
+            </a:pPr>
+            <a:r>
+              <a:rPr lang="en-US" sz="1600" b="1" dirty="0">
+                <a:solidFill>
+                  <a:srgbClr val="0D9488"/>
+                </a:solidFill>
+                <a:latin typeface="Trebuchet MS" pitchFamily="34" charset="0"/>
+                <a:ea typeface="Trebuchet MS" pitchFamily="34" charset="-122"/>
+                <a:cs typeface="Trebuchet MS" pitchFamily="34" charset="-120"/>
+              </a:rPr>
+              <a:t>·</a:t>
+            </a:r>
+            <a:endParaRPr lang="en-US" sz="1600" dirty="0"/>
+          </a:p>
+        </p:txBody>
+      </p:sp>
+      <p:sp>
+        <p:nvSpPr>
+          <p:cNvPr id="38" name="Shape 36"/>
+          <p:cNvSpPr/>
+          <p:nvPr/>
+        </p:nvSpPr>
+        <p:spPr>
+          <a:xfrm>
+            <a:off x="6858000" y="3364992"/>
+            <a:ext cx="1554480" cy="475488"/>
+          </a:xfrm>
+          <a:prstGeom prst="rect">
+            <a:avLst>
+              <a:gd name="adj" fmla="val 9615"/>
+            </a:avLst>
+          </a:prstGeom>
+          <a:solidFill>
+            <a:srgbClr val="FFFFFF"/>
+          </a:solidFill>
+          <a:ln w="12700">
+            <a:solidFill>
+              <a:srgbClr val="0D9488"/>
+            </a:solidFill>
+            <a:prstDash val="solid"/>
+          </a:ln>
+        </p:spPr>
+      </p:sp>
+      <p:sp>
+        <p:nvSpPr>
+          <p:cNvPr id="39" name="Text 37"/>
+          <p:cNvSpPr/>
+          <p:nvPr/>
+        </p:nvSpPr>
+        <p:spPr>
+          <a:xfrm>
+            <a:off x="6858000" y="3364992"/>
+            <a:ext cx="1554480" cy="475488"/>
+          </a:xfrm>
+          <a:prstGeom prst="rect">
+            <a:avLst/>
+          </a:prstGeom>
+          <a:noFill/>
+          <a:ln/>
+        </p:spPr>
+        <p:txBody>
+          <a:bodyPr wrap="square" lIns="0" tIns="0" rIns="0" bIns="0" rtlCol="0" anchor="ctr"/>
+          <a:lstStyle/>
+          <a:p>
+            <a:pPr algn="ctr" indent="0" marL="0">
+              <a:buNone/>
+            </a:pPr>
+            <a:r>
+              <a:rPr lang="en-US" sz="1400" b="1" dirty="0">
+                <a:solidFill>
+                  <a:srgbClr val="0D9488"/>
+                </a:solidFill>
+                <a:latin typeface="Trebuchet MS" pitchFamily="34" charset="0"/>
+                <a:ea typeface="Trebuchet MS" pitchFamily="34" charset="-122"/>
+                <a:cs typeface="Trebuchet MS" pitchFamily="34" charset="-120"/>
+              </a:rPr>
               <a:t>tion</a:t>
             </a:r>
             <a:endParaRPr lang="en-US" sz="1400" dirty="0"/>
@@ -33961,7 +33322,7 @@
       </p:sp>
       <p:sp>
         <p:nvSpPr>
-          <p:cNvPr id="34" name="Shape 32"/>
+          <p:cNvPr id="40" name="Shape 38"/>
           <p:cNvSpPr/>
           <p:nvPr/>
         </p:nvSpPr>
@@ -33988,7 +33349,7 @@
       </p:sp>
       <p:sp>
         <p:nvSpPr>
-          <p:cNvPr id="35" name="Text 33"/>
+          <p:cNvPr id="41" name="Text 39"/>
           <p:cNvSpPr/>
           <p:nvPr/>
         </p:nvSpPr>
@@ -34027,7 +33388,7 @@
       </p:sp>
       <p:sp>
         <p:nvSpPr>
-          <p:cNvPr id="36" name="Shape 34"/>
+          <p:cNvPr id="42" name="Shape 40"/>
           <p:cNvSpPr/>
           <p:nvPr/>
         </p:nvSpPr>
@@ -34054,14 +33415,14 @@
       </p:sp>
       <p:sp>
         <p:nvSpPr>
-          <p:cNvPr id="37" name="Shape 35"/>
-          <p:cNvSpPr/>
-          <p:nvPr/>
-        </p:nvSpPr>
-        <p:spPr>
-          <a:xfrm>
-            <a:off x="2023872" y="4169664"/>
-            <a:ext cx="685800" cy="384048"/>
+          <p:cNvPr id="43" name="Shape 41"/>
+          <p:cNvSpPr/>
+          <p:nvPr/>
+        </p:nvSpPr>
+        <p:spPr>
+          <a:xfrm>
+            <a:off x="1952244" y="4169664"/>
+            <a:ext cx="543652" cy="384048"/>
           </a:xfrm>
           <a:prstGeom prst="rect">
             <a:avLst>
@@ -34081,14 +33442,14 @@
       </p:sp>
       <p:sp>
         <p:nvSpPr>
-          <p:cNvPr id="38" name="Text 36"/>
-          <p:cNvSpPr/>
-          <p:nvPr/>
-        </p:nvSpPr>
-        <p:spPr>
-          <a:xfrm>
-            <a:off x="2023872" y="4169664"/>
-            <a:ext cx="685800" cy="384048"/>
+          <p:cNvPr id="44" name="Text 42"/>
+          <p:cNvSpPr/>
+          <p:nvPr/>
+        </p:nvSpPr>
+        <p:spPr>
+          <a:xfrm>
+            <a:off x="1952244" y="4169664"/>
+            <a:ext cx="543652" cy="384048"/>
           </a:xfrm>
           <a:prstGeom prst="rect">
             <a:avLst/>
@@ -34112,7 +33473,7 @@
                 <a:ea typeface="Trebuchet MS" pitchFamily="34" charset="-122"/>
                 <a:cs typeface="Trebuchet MS" pitchFamily="34" charset="-120"/>
               </a:rPr>
-              <a:t>m</a:t>
+              <a:t>tr</a:t>
             </a:r>
             <a:endParaRPr lang="en-US" sz="900" dirty="0"/>
           </a:p>
@@ -34120,14 +33481,14 @@
       </p:sp>
       <p:sp>
         <p:nvSpPr>
-          <p:cNvPr id="39" name="Shape 37"/>
-          <p:cNvSpPr/>
-          <p:nvPr/>
-        </p:nvSpPr>
-        <p:spPr>
-          <a:xfrm>
-            <a:off x="2831592" y="4169664"/>
-            <a:ext cx="685800" cy="384048"/>
+          <p:cNvPr id="45" name="Shape 43"/>
+          <p:cNvSpPr/>
+          <p:nvPr/>
+        </p:nvSpPr>
+        <p:spPr>
+          <a:xfrm>
+            <a:off x="2546188" y="4169664"/>
+            <a:ext cx="543652" cy="384048"/>
           </a:xfrm>
           <a:prstGeom prst="rect">
             <a:avLst>
@@ -34147,14 +33508,14 @@
       </p:sp>
       <p:sp>
         <p:nvSpPr>
-          <p:cNvPr id="40" name="Text 38"/>
-          <p:cNvSpPr/>
-          <p:nvPr/>
-        </p:nvSpPr>
-        <p:spPr>
-          <a:xfrm>
-            <a:off x="2831592" y="4169664"/>
-            <a:ext cx="685800" cy="384048"/>
+          <p:cNvPr id="46" name="Text 44"/>
+          <p:cNvSpPr/>
+          <p:nvPr/>
+        </p:nvSpPr>
+        <p:spPr>
+          <a:xfrm>
+            <a:off x="2546188" y="4169664"/>
+            <a:ext cx="543652" cy="384048"/>
           </a:xfrm>
           <a:prstGeom prst="rect">
             <a:avLst/>
@@ -34178,7 +33539,7 @@
                 <a:ea typeface="Trebuchet MS" pitchFamily="34" charset="-122"/>
                 <a:cs typeface="Trebuchet MS" pitchFamily="34" charset="-120"/>
               </a:rPr>
-              <a:t>i</a:t>
+              <a:t>a</a:t>
             </a:r>
             <a:endParaRPr lang="en-US" sz="900" dirty="0"/>
           </a:p>
@@ -34186,14 +33547,14 @@
       </p:sp>
       <p:sp>
         <p:nvSpPr>
-          <p:cNvPr id="41" name="Shape 39"/>
-          <p:cNvSpPr/>
-          <p:nvPr/>
-        </p:nvSpPr>
-        <p:spPr>
-          <a:xfrm>
-            <a:off x="3639312" y="4169664"/>
-            <a:ext cx="685800" cy="384048"/>
+          <p:cNvPr id="47" name="Shape 45"/>
+          <p:cNvSpPr/>
+          <p:nvPr/>
+        </p:nvSpPr>
+        <p:spPr>
+          <a:xfrm>
+            <a:off x="3140133" y="4169664"/>
+            <a:ext cx="543652" cy="384048"/>
           </a:xfrm>
           <a:prstGeom prst="rect">
             <a:avLst>
@@ -34213,14 +33574,14 @@
       </p:sp>
       <p:sp>
         <p:nvSpPr>
-          <p:cNvPr id="42" name="Text 40"/>
-          <p:cNvSpPr/>
-          <p:nvPr/>
-        </p:nvSpPr>
-        <p:spPr>
-          <a:xfrm>
-            <a:off x="3639312" y="4169664"/>
-            <a:ext cx="685800" cy="384048"/>
+          <p:cNvPr id="48" name="Text 46"/>
+          <p:cNvSpPr/>
+          <p:nvPr/>
+        </p:nvSpPr>
+        <p:spPr>
+          <a:xfrm>
+            <a:off x="3140133" y="4169664"/>
+            <a:ext cx="543652" cy="384048"/>
           </a:xfrm>
           <a:prstGeom prst="rect">
             <a:avLst/>
@@ -34244,7 +33605,7 @@
                 <a:ea typeface="Trebuchet MS" pitchFamily="34" charset="-122"/>
                 <a:cs typeface="Trebuchet MS" pitchFamily="34" charset="-120"/>
               </a:rPr>
-              <a:t>g</a:t>
+              <a:t>n</a:t>
             </a:r>
             <a:endParaRPr lang="en-US" sz="900" dirty="0"/>
           </a:p>
@@ -34252,14 +33613,14 @@
       </p:sp>
       <p:sp>
         <p:nvSpPr>
-          <p:cNvPr id="43" name="Shape 41"/>
-          <p:cNvSpPr/>
-          <p:nvPr/>
-        </p:nvSpPr>
-        <p:spPr>
-          <a:xfrm>
-            <a:off x="4447032" y="4169664"/>
-            <a:ext cx="685800" cy="384048"/>
+          <p:cNvPr id="49" name="Shape 47"/>
+          <p:cNvSpPr/>
+          <p:nvPr/>
+        </p:nvSpPr>
+        <p:spPr>
+          <a:xfrm>
+            <a:off x="3734077" y="4169664"/>
+            <a:ext cx="543652" cy="384048"/>
           </a:xfrm>
           <a:prstGeom prst="rect">
             <a:avLst>
@@ -34279,14 +33640,14 @@
       </p:sp>
       <p:sp>
         <p:nvSpPr>
-          <p:cNvPr id="44" name="Text 42"/>
-          <p:cNvSpPr/>
-          <p:nvPr/>
-        </p:nvSpPr>
-        <p:spPr>
-          <a:xfrm>
-            <a:off x="4447032" y="4169664"/>
-            <a:ext cx="685800" cy="384048"/>
+          <p:cNvPr id="50" name="Text 48"/>
+          <p:cNvSpPr/>
+          <p:nvPr/>
+        </p:nvSpPr>
+        <p:spPr>
+          <a:xfrm>
+            <a:off x="3734077" y="4169664"/>
+            <a:ext cx="543652" cy="384048"/>
           </a:xfrm>
           <a:prstGeom prst="rect">
             <a:avLst/>
@@ -34310,7 +33671,7 @@
                 <a:ea typeface="Trebuchet MS" pitchFamily="34" charset="-122"/>
                 <a:cs typeface="Trebuchet MS" pitchFamily="34" charset="-120"/>
               </a:rPr>
-              <a:t>r</a:t>
+              <a:t>s</a:t>
             </a:r>
             <a:endParaRPr lang="en-US" sz="900" dirty="0"/>
           </a:p>
@@ -34318,14 +33679,14 @@
       </p:sp>
       <p:sp>
         <p:nvSpPr>
-          <p:cNvPr id="45" name="Shape 43"/>
-          <p:cNvSpPr/>
-          <p:nvPr/>
-        </p:nvSpPr>
-        <p:spPr>
-          <a:xfrm>
-            <a:off x="5254752" y="4169664"/>
-            <a:ext cx="685800" cy="384048"/>
+          <p:cNvPr id="51" name="Shape 49"/>
+          <p:cNvSpPr/>
+          <p:nvPr/>
+        </p:nvSpPr>
+        <p:spPr>
+          <a:xfrm>
+            <a:off x="4328021" y="4169664"/>
+            <a:ext cx="543652" cy="384048"/>
           </a:xfrm>
           <a:prstGeom prst="rect">
             <a:avLst>
@@ -34345,14 +33706,14 @@
       </p:sp>
       <p:sp>
         <p:nvSpPr>
-          <p:cNvPr id="46" name="Text 44"/>
-          <p:cNvSpPr/>
-          <p:nvPr/>
-        </p:nvSpPr>
-        <p:spPr>
-          <a:xfrm>
-            <a:off x="5254752" y="4169664"/>
-            <a:ext cx="685800" cy="384048"/>
+          <p:cNvPr id="52" name="Text 50"/>
+          <p:cNvSpPr/>
+          <p:nvPr/>
+        </p:nvSpPr>
+        <p:spPr>
+          <a:xfrm>
+            <a:off x="4328021" y="4169664"/>
+            <a:ext cx="543652" cy="384048"/>
           </a:xfrm>
           <a:prstGeom prst="rect">
             <a:avLst/>
@@ -34376,7 +33737,7 @@
                 <a:ea typeface="Trebuchet MS" pitchFamily="34" charset="-122"/>
                 <a:cs typeface="Trebuchet MS" pitchFamily="34" charset="-120"/>
               </a:rPr>
-              <a:t>a</a:t>
+              <a:t>m</a:t>
             </a:r>
             <a:endParaRPr lang="en-US" sz="900" dirty="0"/>
           </a:p>
@@ -34384,14 +33745,14 @@
       </p:sp>
       <p:sp>
         <p:nvSpPr>
-          <p:cNvPr id="47" name="Shape 45"/>
-          <p:cNvSpPr/>
-          <p:nvPr/>
-        </p:nvSpPr>
-        <p:spPr>
-          <a:xfrm>
-            <a:off x="6062472" y="4169664"/>
-            <a:ext cx="685800" cy="384048"/>
+          <p:cNvPr id="53" name="Shape 51"/>
+          <p:cNvSpPr/>
+          <p:nvPr/>
+        </p:nvSpPr>
+        <p:spPr>
+          <a:xfrm>
+            <a:off x="4921966" y="4169664"/>
+            <a:ext cx="543652" cy="384048"/>
           </a:xfrm>
           <a:prstGeom prst="rect">
             <a:avLst>
@@ -34411,14 +33772,14 @@
       </p:sp>
       <p:sp>
         <p:nvSpPr>
-          <p:cNvPr id="48" name="Text 46"/>
-          <p:cNvSpPr/>
-          <p:nvPr/>
-        </p:nvSpPr>
-        <p:spPr>
-          <a:xfrm>
-            <a:off x="6062472" y="4169664"/>
-            <a:ext cx="685800" cy="384048"/>
+          <p:cNvPr id="54" name="Text 52"/>
+          <p:cNvSpPr/>
+          <p:nvPr/>
+        </p:nvSpPr>
+        <p:spPr>
+          <a:xfrm>
+            <a:off x="4921966" y="4169664"/>
+            <a:ext cx="543652" cy="384048"/>
           </a:xfrm>
           <a:prstGeom prst="rect">
             <a:avLst/>
@@ -34442,6 +33803,204 @@
                 <a:ea typeface="Trebuchet MS" pitchFamily="34" charset="-122"/>
                 <a:cs typeface="Trebuchet MS" pitchFamily="34" charset="-120"/>
               </a:rPr>
+              <a:t>i</a:t>
+            </a:r>
+            <a:endParaRPr lang="en-US" sz="900" dirty="0"/>
+          </a:p>
+        </p:txBody>
+      </p:sp>
+      <p:sp>
+        <p:nvSpPr>
+          <p:cNvPr id="55" name="Shape 53"/>
+          <p:cNvSpPr/>
+          <p:nvPr/>
+        </p:nvSpPr>
+        <p:spPr>
+          <a:xfrm>
+            <a:off x="5515910" y="4169664"/>
+            <a:ext cx="543652" cy="384048"/>
+          </a:xfrm>
+          <a:prstGeom prst="rect">
+            <a:avLst>
+              <a:gd name="adj" fmla="val 9524"/>
+            </a:avLst>
+          </a:prstGeom>
+          <a:solidFill>
+            <a:srgbClr val="FFFFFF"/>
+          </a:solidFill>
+          <a:ln w="12700">
+            <a:solidFill>
+              <a:srgbClr val="DB2777"/>
+            </a:solidFill>
+            <a:prstDash val="solid"/>
+          </a:ln>
+        </p:spPr>
+      </p:sp>
+      <p:sp>
+        <p:nvSpPr>
+          <p:cNvPr id="56" name="Text 54"/>
+          <p:cNvSpPr/>
+          <p:nvPr/>
+        </p:nvSpPr>
+        <p:spPr>
+          <a:xfrm>
+            <a:off x="5515910" y="4169664"/>
+            <a:ext cx="543652" cy="384048"/>
+          </a:xfrm>
+          <a:prstGeom prst="rect">
+            <a:avLst/>
+          </a:prstGeom>
+          <a:noFill/>
+          <a:ln/>
+        </p:spPr>
+        <p:txBody>
+          <a:bodyPr wrap="square" lIns="0" tIns="0" rIns="0" bIns="0" rtlCol="0" anchor="ctr"/>
+          <a:lstStyle/>
+          <a:p>
+            <a:pPr algn="ctr" indent="0" marL="0">
+              <a:buNone/>
+            </a:pPr>
+            <a:r>
+              <a:rPr lang="en-US" sz="900" b="1" dirty="0">
+                <a:solidFill>
+                  <a:srgbClr val="9D174D"/>
+                </a:solidFill>
+                <a:latin typeface="Trebuchet MS" pitchFamily="34" charset="0"/>
+                <a:ea typeface="Trebuchet MS" pitchFamily="34" charset="-122"/>
+                <a:cs typeface="Trebuchet MS" pitchFamily="34" charset="-120"/>
+              </a:rPr>
+              <a:t>gr</a:t>
+            </a:r>
+            <a:endParaRPr lang="en-US" sz="900" dirty="0"/>
+          </a:p>
+        </p:txBody>
+      </p:sp>
+      <p:sp>
+        <p:nvSpPr>
+          <p:cNvPr id="57" name="Shape 55"/>
+          <p:cNvSpPr/>
+          <p:nvPr/>
+        </p:nvSpPr>
+        <p:spPr>
+          <a:xfrm>
+            <a:off x="6109855" y="4169664"/>
+            <a:ext cx="543652" cy="384048"/>
+          </a:xfrm>
+          <a:prstGeom prst="rect">
+            <a:avLst>
+              <a:gd name="adj" fmla="val 9524"/>
+            </a:avLst>
+          </a:prstGeom>
+          <a:solidFill>
+            <a:srgbClr val="FFFFFF"/>
+          </a:solidFill>
+          <a:ln w="12700">
+            <a:solidFill>
+              <a:srgbClr val="DB2777"/>
+            </a:solidFill>
+            <a:prstDash val="solid"/>
+          </a:ln>
+        </p:spPr>
+      </p:sp>
+      <p:sp>
+        <p:nvSpPr>
+          <p:cNvPr id="58" name="Text 56"/>
+          <p:cNvSpPr/>
+          <p:nvPr/>
+        </p:nvSpPr>
+        <p:spPr>
+          <a:xfrm>
+            <a:off x="6109855" y="4169664"/>
+            <a:ext cx="543652" cy="384048"/>
+          </a:xfrm>
+          <a:prstGeom prst="rect">
+            <a:avLst/>
+          </a:prstGeom>
+          <a:noFill/>
+          <a:ln/>
+        </p:spPr>
+        <p:txBody>
+          <a:bodyPr wrap="square" lIns="0" tIns="0" rIns="0" bIns="0" rtlCol="0" anchor="ctr"/>
+          <a:lstStyle/>
+          <a:p>
+            <a:pPr algn="ctr" indent="0" marL="0">
+              <a:buNone/>
+            </a:pPr>
+            <a:r>
+              <a:rPr lang="en-US" sz="900" b="1" dirty="0">
+                <a:solidFill>
+                  <a:srgbClr val="9D174D"/>
+                </a:solidFill>
+                <a:latin typeface="Trebuchet MS" pitchFamily="34" charset="0"/>
+                <a:ea typeface="Trebuchet MS" pitchFamily="34" charset="-122"/>
+                <a:cs typeface="Trebuchet MS" pitchFamily="34" charset="-120"/>
+              </a:rPr>
+              <a:t>a</a:t>
+            </a:r>
+            <a:endParaRPr lang="en-US" sz="900" dirty="0"/>
+          </a:p>
+        </p:txBody>
+      </p:sp>
+      <p:sp>
+        <p:nvSpPr>
+          <p:cNvPr id="59" name="Shape 57"/>
+          <p:cNvSpPr/>
+          <p:nvPr/>
+        </p:nvSpPr>
+        <p:spPr>
+          <a:xfrm>
+            <a:off x="6703799" y="4169664"/>
+            <a:ext cx="543652" cy="384048"/>
+          </a:xfrm>
+          <a:prstGeom prst="rect">
+            <a:avLst>
+              <a:gd name="adj" fmla="val 9524"/>
+            </a:avLst>
+          </a:prstGeom>
+          <a:solidFill>
+            <a:srgbClr val="FFFFFF"/>
+          </a:solidFill>
+          <a:ln w="12700">
+            <a:solidFill>
+              <a:srgbClr val="DB2777"/>
+            </a:solidFill>
+            <a:prstDash val="solid"/>
+          </a:ln>
+        </p:spPr>
+      </p:sp>
+      <p:sp>
+        <p:nvSpPr>
+          <p:cNvPr id="60" name="Text 58"/>
+          <p:cNvSpPr/>
+          <p:nvPr/>
+        </p:nvSpPr>
+        <p:spPr>
+          <a:xfrm>
+            <a:off x="6703799" y="4169664"/>
+            <a:ext cx="543652" cy="384048"/>
+          </a:xfrm>
+          <a:prstGeom prst="rect">
+            <a:avLst/>
+          </a:prstGeom>
+          <a:noFill/>
+          <a:ln/>
+        </p:spPr>
+        <p:txBody>
+          <a:bodyPr wrap="square" lIns="0" tIns="0" rIns="0" bIns="0" rtlCol="0" anchor="ctr"/>
+          <a:lstStyle/>
+          <a:p>
+            <a:pPr algn="ctr" indent="0" marL="0">
+              <a:buNone/>
+            </a:pPr>
+            <a:r>
+              <a:rPr lang="en-US" sz="900" b="1" dirty="0">
+                <a:solidFill>
+                  <a:srgbClr val="9D174D"/>
+                </a:solidFill>
+                <a:latin typeface="Trebuchet MS" pitchFamily="34" charset="0"/>
+                <a:ea typeface="Trebuchet MS" pitchFamily="34" charset="-122"/>
+                <a:cs typeface="Trebuchet MS" pitchFamily="34" charset="-120"/>
+              </a:rPr>
               <a:t>t</a:t>
             </a:r>
             <a:endParaRPr lang="en-US" sz="900" dirty="0"/>
@@ -34450,14 +34009,14 @@
       </p:sp>
       <p:sp>
         <p:nvSpPr>
-          <p:cNvPr id="49" name="Text 47"/>
-          <p:cNvSpPr/>
-          <p:nvPr/>
-        </p:nvSpPr>
-        <p:spPr>
-          <a:xfrm>
-            <a:off x="6062472" y="4572000"/>
-            <a:ext cx="685800" cy="219456"/>
+          <p:cNvPr id="61" name="Text 59"/>
+          <p:cNvSpPr/>
+          <p:nvPr/>
+        </p:nvSpPr>
+        <p:spPr>
+          <a:xfrm>
+            <a:off x="6703799" y="4572000"/>
+            <a:ext cx="543652" cy="219456"/>
           </a:xfrm>
           <a:prstGeom prst="rect">
             <a:avLst/>
@@ -34489,14 +34048,14 @@
       </p:sp>
       <p:sp>
         <p:nvSpPr>
-          <p:cNvPr id="50" name="Shape 48"/>
-          <p:cNvSpPr/>
-          <p:nvPr/>
-        </p:nvSpPr>
-        <p:spPr>
-          <a:xfrm>
-            <a:off x="6870192" y="4169664"/>
-            <a:ext cx="685800" cy="384048"/>
+          <p:cNvPr id="62" name="Shape 60"/>
+          <p:cNvSpPr/>
+          <p:nvPr/>
+        </p:nvSpPr>
+        <p:spPr>
+          <a:xfrm>
+            <a:off x="7297743" y="4169664"/>
+            <a:ext cx="543652" cy="384048"/>
           </a:xfrm>
           <a:prstGeom prst="rect">
             <a:avLst>
@@ -34516,14 +34075,14 @@
       </p:sp>
       <p:sp>
         <p:nvSpPr>
-          <p:cNvPr id="51" name="Text 49"/>
-          <p:cNvSpPr/>
-          <p:nvPr/>
-        </p:nvSpPr>
-        <p:spPr>
-          <a:xfrm>
-            <a:off x="6870192" y="4169664"/>
-            <a:ext cx="685800" cy="384048"/>
+          <p:cNvPr id="63" name="Text 61"/>
+          <p:cNvSpPr/>
+          <p:nvPr/>
+        </p:nvSpPr>
+        <p:spPr>
+          <a:xfrm>
+            <a:off x="7297743" y="4169664"/>
+            <a:ext cx="543652" cy="384048"/>
           </a:xfrm>
           <a:prstGeom prst="rect">
             <a:avLst/>
@@ -34555,14 +34114,14 @@
       </p:sp>
       <p:sp>
         <p:nvSpPr>
-          <p:cNvPr id="52" name="Shape 50"/>
-          <p:cNvSpPr/>
-          <p:nvPr/>
-        </p:nvSpPr>
-        <p:spPr>
-          <a:xfrm>
-            <a:off x="7677912" y="4169664"/>
-            <a:ext cx="685800" cy="384048"/>
+          <p:cNvPr id="64" name="Shape 62"/>
+          <p:cNvSpPr/>
+          <p:nvPr/>
+        </p:nvSpPr>
+        <p:spPr>
+          <a:xfrm>
+            <a:off x="7891688" y="4169664"/>
+            <a:ext cx="543652" cy="384048"/>
           </a:xfrm>
           <a:prstGeom prst="rect">
             <a:avLst>
@@ -34582,14 +34141,14 @@
       </p:sp>
       <p:sp>
         <p:nvSpPr>
-          <p:cNvPr id="53" name="Text 51"/>
-          <p:cNvSpPr/>
-          <p:nvPr/>
-        </p:nvSpPr>
-        <p:spPr>
-          <a:xfrm>
-            <a:off x="7677912" y="4169664"/>
-            <a:ext cx="685800" cy="384048"/>
+          <p:cNvPr id="65" name="Text 63"/>
+          <p:cNvSpPr/>
+          <p:nvPr/>
+        </p:nvSpPr>
+        <p:spPr>
+          <a:xfrm>
+            <a:off x="7891688" y="4169664"/>
+            <a:ext cx="543652" cy="384048"/>
           </a:xfrm>
           <a:prstGeom prst="rect">
             <a:avLst/>
@@ -37418,7 +36977,7 @@
                 <a:ea typeface="Trebuchet MS" pitchFamily="34" charset="-122"/>
                 <a:cs typeface="Trebuchet MS" pitchFamily="34" charset="-120"/>
               </a:rPr>
-              <a:t>migratory</a:t>
+              <a:t>immigrate</a:t>
             </a:r>
             <a:endParaRPr lang="en-US" sz="1200" dirty="0"/>
           </a:p>
@@ -37484,7 +37043,7 @@
                 <a:ea typeface="Trebuchet MS" pitchFamily="34" charset="-122"/>
                 <a:cs typeface="Trebuchet MS" pitchFamily="34" charset="-120"/>
               </a:rPr>
-              <a:t>immigrate</a:t>
+              <a:t>emigrate</a:t>
             </a:r>
             <a:endParaRPr lang="en-US" sz="1200" dirty="0"/>
           </a:p>
@@ -37550,7 +37109,7 @@
                 <a:ea typeface="Trebuchet MS" pitchFamily="34" charset="-122"/>
                 <a:cs typeface="Trebuchet MS" pitchFamily="34" charset="-120"/>
               </a:rPr>
-              <a:t>emigrate</a:t>
+              <a:t>transmigrate</a:t>
             </a:r>
             <a:endParaRPr lang="en-US" sz="1200" dirty="0"/>
           </a:p>
@@ -37616,7 +37175,7 @@
                 <a:ea typeface="Trebuchet MS" pitchFamily="34" charset="-122"/>
                 <a:cs typeface="Trebuchet MS" pitchFamily="34" charset="-120"/>
               </a:rPr>
-              <a:t>transmigrate</a:t>
+              <a:t>migratory</a:t>
             </a:r>
             <a:endParaRPr lang="en-US" sz="1200" dirty="0"/>
           </a:p>
@@ -38870,7 +38429,7 @@
                 <a:ea typeface="Calibri" pitchFamily="34" charset="-122"/>
                 <a:cs typeface="Calibri" pitchFamily="34" charset="-120"/>
               </a:rPr>
-              <a:t>1.  The root 'migrate' comes from a Latin word meaning to move from one place.</a:t>
+              <a:t>1.  The root 'migrate' comes from a Latin word meaning to move.</a:t>
             </a:r>
             <a:endParaRPr lang="en-US" sz="1300" dirty="0"/>
           </a:p>
@@ -39009,7 +38568,7 @@
                 <a:ea typeface="Calibri" pitchFamily="34" charset="-122"/>
                 <a:cs typeface="Calibri" pitchFamily="34" charset="-120"/>
               </a:rPr>
-              <a:t>2.  A migrant is someone who never leaves their home country.</a:t>
+              <a:t>2.  The prefix 'im' in 'immigrate' means 'away from'.</a:t>
             </a:r>
             <a:endParaRPr lang="en-US" sz="1300" dirty="0"/>
           </a:p>
@@ -39148,7 +38707,7 @@
                 <a:ea typeface="Calibri" pitchFamily="34" charset="-122"/>
                 <a:cs typeface="Calibri" pitchFamily="34" charset="-120"/>
               </a:rPr>
-              <a:t>3.  Birds that fly to warmer places in winter are described as migratory.</a:t>
+              <a:t>3.  The word 'migrate' means to stay in one place forever.</a:t>
             </a:r>
             <a:endParaRPr lang="en-US" sz="1300" dirty="0"/>
           </a:p>
@@ -39171,11 +38730,11 @@
             </a:avLst>
           </a:prstGeom>
           <a:solidFill>
-            <a:srgbClr val="DCFCE7"/>
-          </a:solidFill>
-          <a:ln w="12700">
-            <a:solidFill>
-              <a:srgbClr val="16A34A"/>
+            <a:srgbClr val="FEE2E2"/>
+          </a:solidFill>
+          <a:ln w="12700">
+            <a:solidFill>
+              <a:srgbClr val="DC2626"/>
             </a:solidFill>
             <a:prstDash val="solid"/>
           </a:ln>
@@ -39208,13 +38767,13 @@
             <a:r>
               <a:rPr lang="en-US" sz="1100" b="1" dirty="0">
                 <a:solidFill>
-                  <a:srgbClr val="16A34A"/>
+                  <a:srgbClr val="DC2626"/>
                 </a:solidFill>
                 <a:latin typeface="Trebuchet MS" pitchFamily="34" charset="0"/>
                 <a:ea typeface="Trebuchet MS" pitchFamily="34" charset="-122"/>
                 <a:cs typeface="Trebuchet MS" pitchFamily="34" charset="-120"/>
               </a:rPr>
-              <a:t>TRUE</a:t>
+              <a:t>FALSE</a:t>
             </a:r>
             <a:endParaRPr lang="en-US" sz="1100" dirty="0"/>
           </a:p>
@@ -39287,7 +38846,7 @@
                 <a:ea typeface="Calibri" pitchFamily="34" charset="-122"/>
                 <a:cs typeface="Calibri" pitchFamily="34" charset="-120"/>
               </a:rPr>
-              <a:t>4.  Immigrate means to come into a new country to live.</a:t>
+              <a:t>4.  Birds that fly to warmer countries each winter are called migratory animals.</a:t>
             </a:r>
             <a:endParaRPr lang="en-US" sz="1300" dirty="0"/>
           </a:p>
@@ -39426,7 +38985,7 @@
                 <a:ea typeface="Calibri" pitchFamily="34" charset="-122"/>
                 <a:cs typeface="Calibri" pitchFamily="34" charset="-120"/>
               </a:rPr>
-              <a:t>5.  Emigrate and immigrate mean exactly the same thing.</a:t>
+              <a:t>5.  Someone who immigrates is moving into a new country.</a:t>
             </a:r>
             <a:endParaRPr lang="en-US" sz="1300" dirty="0"/>
           </a:p>
@@ -39449,11 +39008,11 @@
             </a:avLst>
           </a:prstGeom>
           <a:solidFill>
-            <a:srgbClr val="FEE2E2"/>
-          </a:solidFill>
-          <a:ln w="12700">
-            <a:solidFill>
-              <a:srgbClr val="DC2626"/>
+            <a:srgbClr val="DCFCE7"/>
+          </a:solidFill>
+          <a:ln w="12700">
+            <a:solidFill>
+              <a:srgbClr val="16A34A"/>
             </a:solidFill>
             <a:prstDash val="solid"/>
           </a:ln>
@@ -39486,13 +39045,13 @@
             <a:r>
               <a:rPr lang="en-US" sz="1100" b="1" dirty="0">
                 <a:solidFill>
-                  <a:srgbClr val="DC2626"/>
+                  <a:srgbClr val="16A34A"/>
                 </a:solidFill>
                 <a:latin typeface="Trebuchet MS" pitchFamily="34" charset="0"/>
                 <a:ea typeface="Trebuchet MS" pitchFamily="34" charset="-122"/>
                 <a:cs typeface="Trebuchet MS" pitchFamily="34" charset="-120"/>
               </a:rPr>
-              <a:t>FALSE</a:t>
+              <a:t>TRUE</a:t>
             </a:r>
             <a:endParaRPr lang="en-US" sz="1100" dirty="0"/>
           </a:p>
@@ -40263,7 +39822,7 @@
                 <a:ea typeface="Trebuchet MS" pitchFamily="34" charset="-122"/>
                 <a:cs typeface="Trebuchet MS" pitchFamily="34" charset="-120"/>
               </a:rPr>
-              <a:t>migratory</a:t>
+              <a:t>immigrate</a:t>
             </a:r>
             <a:endParaRPr lang="en-US" sz="1300" dirty="0"/>
           </a:p>
@@ -40329,7 +39888,7 @@
                 <a:ea typeface="Trebuchet MS" pitchFamily="34" charset="-122"/>
                 <a:cs typeface="Trebuchet MS" pitchFamily="34" charset="-120"/>
               </a:rPr>
-              <a:t>immigrate</a:t>
+              <a:t>emigrate</a:t>
             </a:r>
             <a:endParaRPr lang="en-US" sz="1300" dirty="0"/>
           </a:p>
@@ -40395,7 +39954,7 @@
                 <a:ea typeface="Trebuchet MS" pitchFamily="34" charset="-122"/>
                 <a:cs typeface="Trebuchet MS" pitchFamily="34" charset="-120"/>
               </a:rPr>
-              <a:t>emigrate</a:t>
+              <a:t>transmigrate</a:t>
             </a:r>
             <a:endParaRPr lang="en-US" sz="1300" dirty="0"/>
           </a:p>
@@ -40461,7 +40020,7 @@
                 <a:ea typeface="Trebuchet MS" pitchFamily="34" charset="-122"/>
                 <a:cs typeface="Trebuchet MS" pitchFamily="34" charset="-120"/>
               </a:rPr>
-              <a:t>transmigrate</a:t>
+              <a:t>migratory</a:t>
             </a:r>
             <a:endParaRPr lang="en-US" sz="1300" dirty="0"/>
           </a:p>
@@ -42705,7 +42264,7 @@
                 <a:ea typeface="Calibri" pitchFamily="34" charset="-122"/>
                 <a:cs typeface="Calibri" pitchFamily="34" charset="-120"/>
               </a:rPr>
-              <a:t>To move or pass from one place, country, or state to another.</a:t>
+              <a:t>Describing animals or people that regularly move from place to place.</a:t>
             </a:r>
             <a:endParaRPr lang="en-US" sz="1200" dirty="0"/>
           </a:p>
@@ -42844,7 +42403,7 @@
                 <a:ea typeface="Calibri" pitchFamily="34" charset="-122"/>
                 <a:cs typeface="Calibri" pitchFamily="34" charset="-120"/>
               </a:rPr>
-              <a:t>Describing animals or people that regularly move from place to place.</a:t>
+              <a:t>To come into a new country to live there permanently.</a:t>
             </a:r>
             <a:endParaRPr lang="en-US" sz="1200" dirty="0"/>
           </a:p>
@@ -42983,7 +42542,7 @@
                 <a:ea typeface="Calibri" pitchFamily="34" charset="-122"/>
                 <a:cs typeface="Calibri" pitchFamily="34" charset="-120"/>
               </a:rPr>
-              <a:t>To come into a new country to live there permanently.</a:t>
+              <a:t>To leave your home country to go and live in a different country.</a:t>
             </a:r>
             <a:endParaRPr lang="en-US" sz="1200" dirty="0"/>
           </a:p>
@@ -43056,7 +42615,7 @@
                 <a:ea typeface="Trebuchet MS" pitchFamily="34" charset="-122"/>
                 <a:cs typeface="Trebuchet MS" pitchFamily="34" charset="-120"/>
               </a:rPr>
-              <a:t>migratory</a:t>
+              <a:t>immigrate</a:t>
             </a:r>
             <a:endParaRPr lang="en-US" sz="1200" dirty="0"/>
           </a:p>
@@ -43122,7 +42681,7 @@
                 <a:ea typeface="Calibri" pitchFamily="34" charset="-122"/>
                 <a:cs typeface="Calibri" pitchFamily="34" charset="-120"/>
               </a:rPr>
-              <a:t>A person or animal that moves from one place to another.</a:t>
+              <a:t>A person or animal that moves from one place to another to live.</a:t>
             </a:r>
             <a:endParaRPr lang="en-US" sz="1200" dirty="0"/>
           </a:p>
@@ -43195,7 +42754,7 @@
                 <a:ea typeface="Trebuchet MS" pitchFamily="34" charset="-122"/>
                 <a:cs typeface="Trebuchet MS" pitchFamily="34" charset="-120"/>
               </a:rPr>
-              <a:t>immigrate</a:t>
+              <a:t>emigrate</a:t>
             </a:r>
             <a:endParaRPr lang="en-US" sz="1200" dirty="0"/>
           </a:p>
@@ -43261,7 +42820,7 @@
                 <a:ea typeface="Calibri" pitchFamily="34" charset="-122"/>
                 <a:cs typeface="Calibri" pitchFamily="34" charset="-120"/>
               </a:rPr>
-              <a:t>To leave your own country to go and live in another country.</a:t>
+              <a:t>To move or pass from one place or state to another.</a:t>
             </a:r>
             <a:endParaRPr lang="en-US" sz="1200" dirty="0"/>
           </a:p>
@@ -43334,7 +42893,7 @@
                 <a:ea typeface="Trebuchet MS" pitchFamily="34" charset="-122"/>
                 <a:cs typeface="Trebuchet MS" pitchFamily="34" charset="-120"/>
               </a:rPr>
-              <a:t>emigrate</a:t>
+              <a:t>transmigrate</a:t>
             </a:r>
             <a:endParaRPr lang="en-US" sz="1200" dirty="0"/>
           </a:p>
@@ -43400,7 +42959,7 @@
                 <a:ea typeface="Calibri" pitchFamily="34" charset="-122"/>
                 <a:cs typeface="Calibri" pitchFamily="34" charset="-120"/>
               </a:rPr>
-              <a:t>To move from one place to another, often to live somewhere new.</a:t>
+              <a:t>To move from one place to another, like birds flying south for winter.</a:t>
             </a:r>
             <a:endParaRPr lang="en-US" sz="1200" dirty="0"/>
           </a:p>
@@ -43473,7 +43032,7 @@
                 <a:ea typeface="Trebuchet MS" pitchFamily="34" charset="-122"/>
                 <a:cs typeface="Trebuchet MS" pitchFamily="34" charset="-120"/>
               </a:rPr>
-              <a:t>transmigrate</a:t>
+              <a:t>migratory</a:t>
             </a:r>
             <a:endParaRPr lang="en-US" sz="1200" dirty="0"/>
           </a:p>
@@ -43539,7 +43098,7 @@
                 <a:ea typeface="Calibri" pitchFamily="34" charset="-122"/>
                 <a:cs typeface="Calibri" pitchFamily="34" charset="-120"/>
               </a:rPr>
-              <a:t>The journey of moving from one place to another to live or find food.</a:t>
+              <a:t>The act of moving from one place to another, often done by animals each season.</a:t>
             </a:r>
             <a:endParaRPr lang="en-US" sz="1200" dirty="0"/>
           </a:p>
@@ -44034,7 +43593,7 @@
                 <a:ea typeface="Calibri" pitchFamily="34" charset="-122"/>
                 <a:cs typeface="Calibri" pitchFamily="34" charset="-120"/>
               </a:rPr>
-              <a:t>Every year, millions of birds migrate south to find warmer weather and more food.</a:t>
+              <a:t>Every year, millions of birds migrate thousands of kilometres to find warmer weather.</a:t>
             </a:r>
             <a:endParaRPr lang="en-US" sz="1500" dirty="0"/>
           </a:p>
@@ -44362,7 +43921,7 @@
                 <a:ea typeface="Calibri" pitchFamily="34" charset="-122"/>
                 <a:cs typeface="Calibri" pitchFamily="34" charset="-120"/>
               </a:rPr>
-              <a:t>Scientists study the migration patterns of whales to learn how far they travel.</a:t>
+              <a:t>The scientists studied the migration patterns of humpback whales along the Australian coast.</a:t>
             </a:r>
             <a:endParaRPr lang="en-US" sz="1500" dirty="0"/>
           </a:p>
